--- a/2026-Q2/12-ObedienceOfFaith-Ch12-16/2026-06-28-Romans-Ch12-16.pptx
+++ b/2026-Q2/12-ObedienceOfFaith-Ch12-16/2026-06-28-Romans-Ch12-16.pptx
@@ -6,7 +6,7 @@
     <p:sldMasterId id="2147484131" r:id="rId2"/>
   </p:sldMasterIdLst>
   <p:notesMasterIdLst>
-    <p:notesMasterId r:id="rId11"/>
+    <p:notesMasterId r:id="rId12"/>
   </p:notesMasterIdLst>
   <p:sldIdLst>
     <p:sldId id="256" r:id="rId3"/>
@@ -14,9 +14,10 @@
     <p:sldId id="398" r:id="rId5"/>
     <p:sldId id="393" r:id="rId6"/>
     <p:sldId id="394" r:id="rId7"/>
-    <p:sldId id="395" r:id="rId8"/>
-    <p:sldId id="396" r:id="rId9"/>
-    <p:sldId id="397" r:id="rId10"/>
+    <p:sldId id="399" r:id="rId8"/>
+    <p:sldId id="395" r:id="rId9"/>
+    <p:sldId id="396" r:id="rId10"/>
+    <p:sldId id="397" r:id="rId11"/>
   </p:sldIdLst>
   <p:sldSz cx="9144000" cy="6858000" type="screen4x3"/>
   <p:notesSz cx="7077075" cy="9393238"/>
@@ -269,7 +270,7 @@
               <a:pPr>
                 <a:defRPr/>
               </a:pPr>
-              <a:t>6/25/26</a:t>
+              <a:t>6/28/26</a:t>
             </a:fld>
             <a:endParaRPr lang="en-US"/>
           </a:p>
@@ -735,128 +736,6 @@
           </a:bodyPr>
           <a:lstStyle/>
           <a:p>
-            <a:r>
-              <a:rPr lang="en-US" sz="1200" b="1" kern="1200" dirty="0">
-                <a:solidFill>
-                  <a:schemeClr val="tx1"/>
-                </a:solidFill>
-                <a:effectLst/>
-                <a:latin typeface="+mn-lt"/>
-                <a:ea typeface="ＭＳ Ｐゴシック" pitchFamily="-106" charset="-128"/>
-                <a:cs typeface="ＭＳ Ｐゴシック" pitchFamily="-106" charset="-128"/>
-              </a:rPr>
-              <a:t>Romans 8-11 is one continuous argument</a:t>
-            </a:r>
-            <a:r>
-              <a:rPr lang="en-US" sz="1200" kern="1200" dirty="0">
-                <a:solidFill>
-                  <a:schemeClr val="tx1"/>
-                </a:solidFill>
-                <a:effectLst/>
-                <a:latin typeface="+mn-lt"/>
-                <a:ea typeface="ＭＳ Ｐゴシック" pitchFamily="-106" charset="-128"/>
-                <a:cs typeface="ＭＳ Ｐゴシック" pitchFamily="-106" charset="-128"/>
-              </a:rPr>
-              <a:t>. Unfortunately, chapter divisions often cause readers to isolate Romans 9 from Romans 8 and 10-11. When read together, Paul's emphasis becomes clearer.</a:t>
-            </a:r>
-          </a:p>
-          <a:p>
-            <a:endParaRPr lang="en-US" sz="1200" kern="1200" dirty="0">
-              <a:solidFill>
-                <a:schemeClr val="tx1"/>
-              </a:solidFill>
-              <a:effectLst/>
-              <a:latin typeface="+mn-lt"/>
-              <a:ea typeface="ＭＳ Ｐゴシック" pitchFamily="-106" charset="-128"/>
-              <a:cs typeface="ＭＳ Ｐゴシック" pitchFamily="-106" charset="-128"/>
-            </a:endParaRPr>
-          </a:p>
-          <a:p>
-            <a:r>
-              <a:rPr lang="en-US" sz="1200" kern="1200" dirty="0">
-                <a:solidFill>
-                  <a:schemeClr val="tx1"/>
-                </a:solidFill>
-                <a:effectLst/>
-                <a:latin typeface="+mn-lt"/>
-                <a:ea typeface="ＭＳ Ｐゴシック" pitchFamily="-106" charset="-128"/>
-                <a:cs typeface="ＭＳ Ｐゴシック" pitchFamily="-106" charset="-128"/>
-              </a:rPr>
-              <a:t>The question Paul is answering is:</a:t>
-            </a:r>
-          </a:p>
-          <a:p>
-            <a:r>
-              <a:rPr lang="en-US" sz="1200" b="1" kern="1200" dirty="0">
-                <a:solidFill>
-                  <a:schemeClr val="tx1"/>
-                </a:solidFill>
-                <a:effectLst/>
-                <a:latin typeface="+mn-lt"/>
-                <a:ea typeface="ＭＳ Ｐゴシック" pitchFamily="-106" charset="-128"/>
-                <a:cs typeface="ＭＳ Ｐゴシック" pitchFamily="-106" charset="-128"/>
-              </a:rPr>
-              <a:t>If God chose Israel, why have so many Israelites rejected the Messiah? Has God's word failed?</a:t>
-            </a:r>
-            <a:endParaRPr lang="en-US" sz="1200" kern="1200" dirty="0">
-              <a:solidFill>
-                <a:schemeClr val="tx1"/>
-              </a:solidFill>
-              <a:effectLst/>
-              <a:latin typeface="+mn-lt"/>
-              <a:ea typeface="ＭＳ Ｐゴシック" pitchFamily="-106" charset="-128"/>
-              <a:cs typeface="ＭＳ Ｐゴシック" pitchFamily="-106" charset="-128"/>
-            </a:endParaRPr>
-          </a:p>
-          <a:p>
-            <a:endParaRPr lang="en-US" sz="1200" kern="1200" dirty="0">
-              <a:solidFill>
-                <a:schemeClr val="tx1"/>
-              </a:solidFill>
-              <a:effectLst/>
-              <a:latin typeface="+mn-lt"/>
-              <a:ea typeface="ＭＳ Ｐゴシック" pitchFamily="-106" charset="-128"/>
-              <a:cs typeface="ＭＳ Ｐゴシック" pitchFamily="-106" charset="-128"/>
-            </a:endParaRPr>
-          </a:p>
-          <a:p>
-            <a:r>
-              <a:rPr lang="en-US" sz="1200" kern="1200" dirty="0">
-                <a:solidFill>
-                  <a:schemeClr val="tx1"/>
-                </a:solidFill>
-                <a:effectLst/>
-                <a:latin typeface="+mn-lt"/>
-                <a:ea typeface="ＭＳ Ｐゴシック" pitchFamily="-106" charset="-128"/>
-                <a:cs typeface="ＭＳ Ｐゴシック" pitchFamily="-106" charset="-128"/>
-              </a:rPr>
-              <a:t>His answer is:</a:t>
-            </a:r>
-          </a:p>
-          <a:p>
-            <a:r>
-              <a:rPr lang="en-US" sz="1200" b="1" kern="1200" dirty="0">
-                <a:solidFill>
-                  <a:schemeClr val="tx1"/>
-                </a:solidFill>
-                <a:effectLst/>
-                <a:latin typeface="+mn-lt"/>
-                <a:ea typeface="ＭＳ Ｐゴシック" pitchFamily="-106" charset="-128"/>
-                <a:cs typeface="ＭＳ Ｐゴシック" pitchFamily="-106" charset="-128"/>
-              </a:rPr>
-              <a:t>No. God's purpose has never depended upon ethnic descent, human privilege, or human achievement. God remains sovereignly faithful to His promises, and He is accomplishing His redemptive plan exactly as intended.</a:t>
-            </a:r>
-            <a:endParaRPr lang="en-US" sz="1200" kern="1200" dirty="0">
-              <a:solidFill>
-                <a:schemeClr val="tx1"/>
-              </a:solidFill>
-              <a:effectLst/>
-              <a:latin typeface="+mn-lt"/>
-              <a:ea typeface="ＭＳ Ｐゴシック" pitchFamily="-106" charset="-128"/>
-              <a:cs typeface="ＭＳ Ｐゴシック" pitchFamily="-106" charset="-128"/>
-            </a:endParaRPr>
-          </a:p>
-          <a:p>
             <a:endParaRPr lang="en-US" dirty="0"/>
           </a:p>
         </p:txBody>
@@ -963,11 +842,25 @@
         <p:spPr/>
         <p:txBody>
           <a:bodyPr>
-            <a:normAutofit fontScale="40000" lnSpcReduction="20000"/>
+            <a:normAutofit fontScale="32500" lnSpcReduction="20000"/>
           </a:bodyPr>
           <a:lstStyle/>
           <a:p>
-            <a:endParaRPr lang="en-US" sz="1200" b="1" kern="1200" dirty="0">
+            <a:r>
+              <a:rPr lang="en-US" sz="1400" b="1" kern="1200" dirty="0">
+                <a:solidFill>
+                  <a:schemeClr val="tx1"/>
+                </a:solidFill>
+                <a:effectLst/>
+                <a:latin typeface="+mn-lt"/>
+                <a:ea typeface="ＭＳ Ｐゴシック" pitchFamily="-106" charset="-128"/>
+                <a:cs typeface="ＭＳ Ｐゴシック" pitchFamily="-106" charset="-128"/>
+              </a:rPr>
+              <a:t>What did Obedience of the Law produce?</a:t>
+            </a:r>
+          </a:p>
+          <a:p>
+            <a:endParaRPr lang="en-US" sz="1400" b="1" kern="1200" dirty="0">
               <a:solidFill>
                 <a:schemeClr val="tx1"/>
               </a:solidFill>
@@ -979,7 +872,7 @@
           </a:p>
           <a:p>
             <a:r>
-              <a:rPr lang="en-US" sz="1200" b="1" kern="1200" dirty="0">
+              <a:rPr lang="en-US" sz="1400" b="1" kern="1200" dirty="0">
                 <a:solidFill>
                   <a:schemeClr val="tx1"/>
                 </a:solidFill>
@@ -988,11 +881,11 @@
                 <a:ea typeface="ＭＳ Ｐゴシック" pitchFamily="-106" charset="-128"/>
                 <a:cs typeface="ＭＳ Ｐゴシック" pitchFamily="-106" charset="-128"/>
               </a:rPr>
-              <a:t>What did Obedience of the Law produce?</a:t>
-            </a:r>
-          </a:p>
-          <a:p>
-            <a:endParaRPr lang="en-US" sz="1200" b="1" kern="1200" dirty="0">
+              <a:t>What does Obedience of Faith produce?</a:t>
+            </a:r>
+          </a:p>
+          <a:p>
+            <a:endParaRPr lang="en-US" sz="1400" kern="1200" dirty="0">
               <a:solidFill>
                 <a:schemeClr val="tx1"/>
               </a:solidFill>
@@ -1004,7 +897,7 @@
           </a:p>
           <a:p>
             <a:r>
-              <a:rPr lang="en-US" sz="1200" b="1" kern="1200" dirty="0">
+              <a:rPr lang="en-US" sz="1400" kern="1200" dirty="0">
                 <a:solidFill>
                   <a:schemeClr val="tx1"/>
                 </a:solidFill>
@@ -1013,11 +906,11 @@
                 <a:ea typeface="ＭＳ Ｐゴシック" pitchFamily="-106" charset="-128"/>
                 <a:cs typeface="ＭＳ Ｐゴシック" pitchFamily="-106" charset="-128"/>
               </a:rPr>
-              <a:t>What does Obedience of Faith produce?</a:t>
-            </a:r>
-          </a:p>
-          <a:p>
-            <a:endParaRPr lang="en-US" sz="1200" kern="1200" dirty="0">
+              <a:t>Romans suggests that faith and obedience are inseparable aspects of the same response to God.</a:t>
+            </a:r>
+          </a:p>
+          <a:p>
+            <a:endParaRPr lang="en-US" sz="1400" kern="1200" dirty="0">
               <a:solidFill>
                 <a:schemeClr val="tx1"/>
               </a:solidFill>
@@ -1028,7 +921,59 @@
             </a:endParaRPr>
           </a:p>
           <a:p>
-            <a:endParaRPr lang="en-US" sz="1200" kern="1200" dirty="0">
+            <a:r>
+              <a:rPr lang="en-US" sz="1400" b="1" kern="1200" dirty="0">
+                <a:solidFill>
+                  <a:schemeClr val="tx1"/>
+                </a:solidFill>
+                <a:effectLst/>
+                <a:latin typeface="+mn-lt"/>
+                <a:ea typeface="ＭＳ Ｐゴシック" pitchFamily="-106" charset="-128"/>
+                <a:cs typeface="ＭＳ Ｐゴシック" pitchFamily="-106" charset="-128"/>
+              </a:rPr>
+              <a:t>Notice how Paul frames the entire letter:</a:t>
+            </a:r>
+          </a:p>
+          <a:p>
+            <a:r>
+              <a:rPr lang="en-US" sz="1400" i="1" kern="1200" dirty="0">
+                <a:solidFill>
+                  <a:schemeClr val="tx1"/>
+                </a:solidFill>
+                <a:effectLst/>
+                <a:latin typeface="+mn-lt"/>
+                <a:ea typeface="ＭＳ Ｐゴシック" pitchFamily="-106" charset="-128"/>
+                <a:cs typeface="ＭＳ Ｐゴシック" pitchFamily="-106" charset="-128"/>
+              </a:rPr>
+              <a:t>“through whom we have received grace and our apostleship to bring about the </a:t>
+            </a:r>
+            <a:r>
+              <a:rPr lang="en-US" sz="1400" i="1" u="sng" kern="1200" dirty="0">
+                <a:solidFill>
+                  <a:schemeClr val="tx1"/>
+                </a:solidFill>
+                <a:effectLst/>
+                <a:latin typeface="+mn-lt"/>
+                <a:ea typeface="ＭＳ Ｐゴシック" pitchFamily="-106" charset="-128"/>
+                <a:cs typeface="ＭＳ Ｐゴシック" pitchFamily="-106" charset="-128"/>
+              </a:rPr>
+              <a:t>obedience of faith</a:t>
+            </a:r>
+            <a:r>
+              <a:rPr lang="en-US" sz="1400" i="1" kern="1200" dirty="0">
+                <a:solidFill>
+                  <a:schemeClr val="tx1"/>
+                </a:solidFill>
+                <a:effectLst/>
+                <a:latin typeface="+mn-lt"/>
+                <a:ea typeface="ＭＳ Ｐゴシック" pitchFamily="-106" charset="-128"/>
+                <a:cs typeface="ＭＳ Ｐゴシック" pitchFamily="-106" charset="-128"/>
+              </a:rPr>
+              <a:t> among all the Gentiles…” (Romans 1:5, NET)</a:t>
+            </a:r>
+          </a:p>
+          <a:p>
+            <a:endParaRPr lang="en-US" sz="1400" i="1" kern="1200" dirty="0">
               <a:solidFill>
                 <a:schemeClr val="tx1"/>
               </a:solidFill>
@@ -1039,7 +984,59 @@
             </a:endParaRPr>
           </a:p>
           <a:p>
-            <a:endParaRPr lang="en-US" sz="1200" kern="1200" dirty="0">
+            <a:r>
+              <a:rPr lang="en-US" sz="1400" b="1" kern="1200" dirty="0">
+                <a:solidFill>
+                  <a:schemeClr val="tx1"/>
+                </a:solidFill>
+                <a:effectLst/>
+                <a:latin typeface="+mn-lt"/>
+                <a:ea typeface="ＭＳ Ｐゴシック" pitchFamily="-106" charset="-128"/>
+                <a:cs typeface="ＭＳ Ｐゴシック" pitchFamily="-106" charset="-128"/>
+              </a:rPr>
+              <a:t>And at the conclusion:</a:t>
+            </a:r>
+          </a:p>
+          <a:p>
+            <a:r>
+              <a:rPr lang="en-US" sz="1400" i="1" kern="1200" dirty="0">
+                <a:solidFill>
+                  <a:schemeClr val="tx1"/>
+                </a:solidFill>
+                <a:effectLst/>
+                <a:latin typeface="+mn-lt"/>
+                <a:ea typeface="ＭＳ Ｐゴシック" pitchFamily="-106" charset="-128"/>
+                <a:cs typeface="ＭＳ Ｐゴシック" pitchFamily="-106" charset="-128"/>
+              </a:rPr>
+              <a:t>“…according to the command of the eternal God to bring about the </a:t>
+            </a:r>
+            <a:r>
+              <a:rPr lang="en-US" sz="1400" i="1" u="sng" kern="1200" dirty="0">
+                <a:solidFill>
+                  <a:schemeClr val="tx1"/>
+                </a:solidFill>
+                <a:effectLst/>
+                <a:latin typeface="+mn-lt"/>
+                <a:ea typeface="ＭＳ Ｐゴシック" pitchFamily="-106" charset="-128"/>
+                <a:cs typeface="ＭＳ Ｐゴシック" pitchFamily="-106" charset="-128"/>
+              </a:rPr>
+              <a:t>obedience of faith</a:t>
+            </a:r>
+            <a:r>
+              <a:rPr lang="en-US" sz="1400" i="1" kern="1200" dirty="0">
+                <a:solidFill>
+                  <a:schemeClr val="tx1"/>
+                </a:solidFill>
+                <a:effectLst/>
+                <a:latin typeface="+mn-lt"/>
+                <a:ea typeface="ＭＳ Ｐゴシック" pitchFamily="-106" charset="-128"/>
+                <a:cs typeface="ＭＳ Ｐゴシック" pitchFamily="-106" charset="-128"/>
+              </a:rPr>
+              <a:t>.” (Romans 16:26, NET)</a:t>
+            </a:r>
+          </a:p>
+          <a:p>
+            <a:endParaRPr lang="en-US" sz="1400" i="1" kern="1200" dirty="0">
               <a:solidFill>
                 <a:schemeClr val="tx1"/>
               </a:solidFill>
@@ -1051,7 +1048,7 @@
           </a:p>
           <a:p>
             <a:r>
-              <a:rPr lang="en-US" sz="1200" kern="1200" dirty="0">
+              <a:rPr lang="en-US" sz="1400" i="1" kern="1200" dirty="0">
                 <a:solidFill>
                   <a:schemeClr val="tx1"/>
                 </a:solidFill>
@@ -1060,23 +1057,10 @@
                 <a:ea typeface="ＭＳ Ｐゴシック" pitchFamily="-106" charset="-128"/>
                 <a:cs typeface="ＭＳ Ｐゴシック" pitchFamily="-106" charset="-128"/>
               </a:rPr>
-              <a:t>Romans suggests that faith and obedience are inseparable aspects of the same response to God.</a:t>
-            </a:r>
-          </a:p>
-          <a:p>
-            <a:endParaRPr lang="en-US" sz="1200" kern="1200" dirty="0">
-              <a:solidFill>
-                <a:schemeClr val="tx1"/>
-              </a:solidFill>
-              <a:effectLst/>
-              <a:latin typeface="+mn-lt"/>
-              <a:ea typeface="ＭＳ Ｐゴシック" pitchFamily="-106" charset="-128"/>
-              <a:cs typeface="ＭＳ Ｐゴシック" pitchFamily="-106" charset="-128"/>
-            </a:endParaRPr>
-          </a:p>
-          <a:p>
-            <a:r>
-              <a:rPr lang="en-US" sz="1200" kern="1200" dirty="0">
+              <a:t>This phrase forms an </a:t>
+            </a:r>
+            <a:r>
+              <a:rPr lang="en-US" sz="1400" i="1" kern="1200" dirty="0" err="1">
                 <a:solidFill>
                   <a:schemeClr val="tx1"/>
                 </a:solidFill>
@@ -1085,12 +1069,10 @@
                 <a:ea typeface="ＭＳ Ｐゴシック" pitchFamily="-106" charset="-128"/>
                 <a:cs typeface="ＭＳ Ｐゴシック" pitchFamily="-106" charset="-128"/>
               </a:rPr>
-              <a:t>Notice how Paul frames the entire letter:</a:t>
-            </a:r>
-          </a:p>
-          <a:p>
-            <a:r>
-              <a:rPr lang="en-US" sz="1200" kern="1200" dirty="0">
+              <a:t>inclusio</a:t>
+            </a:r>
+            <a:r>
+              <a:rPr lang="en-US" sz="1400" i="1" kern="1200" dirty="0">
                 <a:solidFill>
                   <a:schemeClr val="tx1"/>
                 </a:solidFill>
@@ -1099,23 +1081,12 @@
                 <a:ea typeface="ＭＳ Ｐゴシック" pitchFamily="-106" charset="-128"/>
                 <a:cs typeface="ＭＳ Ｐゴシック" pitchFamily="-106" charset="-128"/>
               </a:rPr>
-              <a:t>“through whom we have received grace and our apostleship to bring about the obedience of faith among all the Gentiles…” (Romans 1:5, NET)</a:t>
-            </a:r>
-          </a:p>
-          <a:p>
-            <a:endParaRPr lang="en-US" sz="1200" kern="1200" dirty="0">
-              <a:solidFill>
-                <a:schemeClr val="tx1"/>
-              </a:solidFill>
-              <a:effectLst/>
-              <a:latin typeface="+mn-lt"/>
-              <a:ea typeface="ＭＳ Ｐゴシック" pitchFamily="-106" charset="-128"/>
-              <a:cs typeface="ＭＳ Ｐゴシック" pitchFamily="-106" charset="-128"/>
-            </a:endParaRPr>
-          </a:p>
-          <a:p>
-            <a:r>
-              <a:rPr lang="en-US" sz="1200" kern="1200" dirty="0">
+              <a:t> around the entire epistle. Paul begins and ends Romans with “the obedience of faith.”</a:t>
+            </a:r>
+          </a:p>
+          <a:p>
+            <a:r>
+              <a:rPr lang="en-US" sz="1400" i="1" kern="1200" dirty="0">
                 <a:solidFill>
                   <a:schemeClr val="tx1"/>
                 </a:solidFill>
@@ -1124,91 +1095,14 @@
                 <a:ea typeface="ＭＳ Ｐゴシック" pitchFamily="-106" charset="-128"/>
                 <a:cs typeface="ＭＳ Ｐゴシック" pitchFamily="-106" charset="-128"/>
               </a:rPr>
-              <a:t>And at the conclusion:</a:t>
-            </a:r>
-          </a:p>
-          <a:p>
-            <a:r>
-              <a:rPr lang="en-US" sz="1200" kern="1200" dirty="0">
-                <a:solidFill>
-                  <a:schemeClr val="tx1"/>
-                </a:solidFill>
-                <a:effectLst/>
-                <a:latin typeface="+mn-lt"/>
-                <a:ea typeface="ＭＳ Ｐゴシック" pitchFamily="-106" charset="-128"/>
-                <a:cs typeface="ＭＳ Ｐゴシック" pitchFamily="-106" charset="-128"/>
-              </a:rPr>
-              <a:t>“…according to the command of the eternal God to bring about the obedience of faith.” (Romans 16:26, NET)</a:t>
-            </a:r>
-          </a:p>
-          <a:p>
-            <a:endParaRPr lang="en-US" sz="1200" kern="1200" dirty="0">
-              <a:solidFill>
-                <a:schemeClr val="tx1"/>
-              </a:solidFill>
-              <a:effectLst/>
-              <a:latin typeface="+mn-lt"/>
-              <a:ea typeface="ＭＳ Ｐゴシック" pitchFamily="-106" charset="-128"/>
-              <a:cs typeface="ＭＳ Ｐゴシック" pitchFamily="-106" charset="-128"/>
-            </a:endParaRPr>
-          </a:p>
-          <a:p>
-            <a:r>
-              <a:rPr lang="en-US" sz="1200" i="1" kern="1200" dirty="0">
-                <a:solidFill>
-                  <a:schemeClr val="tx1"/>
-                </a:solidFill>
-                <a:effectLst/>
-                <a:latin typeface="+mn-lt"/>
-                <a:ea typeface="ＭＳ Ｐゴシック" pitchFamily="-106" charset="-128"/>
-                <a:cs typeface="ＭＳ Ｐゴシック" pitchFamily="-106" charset="-128"/>
-              </a:rPr>
-              <a:t>This phrase forms an </a:t>
-            </a:r>
-            <a:r>
-              <a:rPr lang="en-US" sz="1200" i="1" kern="1200" dirty="0" err="1">
-                <a:solidFill>
-                  <a:schemeClr val="tx1"/>
-                </a:solidFill>
-                <a:effectLst/>
-                <a:latin typeface="+mn-lt"/>
-                <a:ea typeface="ＭＳ Ｐゴシック" pitchFamily="-106" charset="-128"/>
-                <a:cs typeface="ＭＳ Ｐゴシック" pitchFamily="-106" charset="-128"/>
-              </a:rPr>
-              <a:t>inclusio</a:t>
-            </a:r>
-            <a:r>
-              <a:rPr lang="en-US" sz="1200" i="1" kern="1200" dirty="0">
-                <a:solidFill>
-                  <a:schemeClr val="tx1"/>
-                </a:solidFill>
-                <a:effectLst/>
-                <a:latin typeface="+mn-lt"/>
-                <a:ea typeface="ＭＳ Ｐゴシック" pitchFamily="-106" charset="-128"/>
-                <a:cs typeface="ＭＳ Ｐゴシック" pitchFamily="-106" charset="-128"/>
-              </a:rPr>
-              <a:t> around the entire epistle. Paul begins and ends Romans with “the obedience of faith.”</a:t>
-            </a:r>
-          </a:p>
-          <a:p>
-            <a:r>
-              <a:rPr lang="en-US" sz="1200" i="1" kern="1200" dirty="0">
-                <a:solidFill>
-                  <a:schemeClr val="tx1"/>
-                </a:solidFill>
-                <a:effectLst/>
-                <a:latin typeface="+mn-lt"/>
-                <a:ea typeface="ＭＳ Ｐゴシック" pitchFamily="-106" charset="-128"/>
-                <a:cs typeface="ＭＳ Ｐゴシック" pitchFamily="-106" charset="-128"/>
-              </a:rPr>
               <a:t>That means Romans itself should probably be read through this lens.</a:t>
             </a:r>
           </a:p>
           <a:p>
-            <a:endParaRPr lang="en-US" dirty="0"/>
-          </a:p>
-          <a:p>
-            <a:endParaRPr lang="en-US" dirty="0"/>
+            <a:endParaRPr lang="en-US" sz="1400" dirty="0"/>
+          </a:p>
+          <a:p>
+            <a:endParaRPr lang="en-US" sz="1400" dirty="0"/>
           </a:p>
           <a:p>
             <a:pPr marL="0" marR="0" lvl="0" indent="0" algn="l" defTabSz="914400" rtl="0" eaLnBrk="0" fontAlgn="base" latinLnBrk="0" hangingPunct="0">
@@ -1229,7 +1123,7 @@
               <a:defRPr/>
             </a:pPr>
             <a:r>
-              <a:rPr lang="en-US" sz="1200" kern="1200" dirty="0">
+              <a:rPr lang="en-US" sz="1400" kern="1200" dirty="0">
                 <a:solidFill>
                   <a:schemeClr val="tx1"/>
                 </a:solidFill>
@@ -1241,7 +1135,7 @@
               <a:t>“Look, the one whose desires are not upright will faint from exhaustion, but the person of integrity will live because of his faithfulness.” (</a:t>
             </a:r>
             <a:r>
-              <a:rPr lang="en-US" sz="1200" b="1" kern="1200" dirty="0">
+              <a:rPr lang="en-US" sz="1400" b="1" kern="1200" dirty="0">
                 <a:solidFill>
                   <a:schemeClr val="tx1"/>
                 </a:solidFill>
@@ -1253,7 +1147,7 @@
               <a:t>Habakkuk 2:4</a:t>
             </a:r>
             <a:r>
-              <a:rPr lang="en-US" sz="1200" kern="1200" dirty="0">
+              <a:rPr lang="en-US" sz="1400" kern="1200" dirty="0">
                 <a:solidFill>
                   <a:schemeClr val="tx1"/>
                 </a:solidFill>
@@ -1283,7 +1177,7 @@
               <a:tabLst/>
               <a:defRPr/>
             </a:pPr>
-            <a:endParaRPr lang="en-US" sz="1200" kern="1200" dirty="0">
+            <a:endParaRPr lang="en-US" sz="1400" kern="1200" dirty="0">
               <a:solidFill>
                 <a:schemeClr val="tx1"/>
               </a:solidFill>
@@ -1312,7 +1206,7 @@
               <a:defRPr/>
             </a:pPr>
             <a:r>
-              <a:rPr lang="en-US" sz="1200" kern="1200" dirty="0">
+              <a:rPr lang="en-US" sz="1400" kern="1200" dirty="0">
                 <a:solidFill>
                   <a:schemeClr val="tx1"/>
                 </a:solidFill>
@@ -1324,7 +1218,7 @@
               <a:t>“For the righteousness of God is revealed in the gospel from faith to faith, just as it is written, “</a:t>
             </a:r>
             <a:r>
-              <a:rPr lang="en-US" sz="1200" b="1" i="1" kern="1200" dirty="0">
+              <a:rPr lang="en-US" sz="1400" b="1" i="1" kern="1200" dirty="0">
                 <a:solidFill>
                   <a:schemeClr val="tx1"/>
                 </a:solidFill>
@@ -1336,7 +1230,7 @@
               <a:t>The righteous by faith will live</a:t>
             </a:r>
             <a:r>
-              <a:rPr lang="en-US" sz="1200" kern="1200" dirty="0">
+              <a:rPr lang="en-US" sz="1400" kern="1200" dirty="0">
                 <a:solidFill>
                   <a:schemeClr val="tx1"/>
                 </a:solidFill>
@@ -1348,7 +1242,7 @@
               <a:t>.”” (</a:t>
             </a:r>
             <a:r>
-              <a:rPr lang="en-US" sz="1200" b="1" kern="1200" dirty="0">
+              <a:rPr lang="en-US" sz="1400" b="1" kern="1200" dirty="0">
                 <a:solidFill>
                   <a:schemeClr val="tx1"/>
                 </a:solidFill>
@@ -1360,7 +1254,7 @@
               <a:t>Romans 1:17</a:t>
             </a:r>
             <a:r>
-              <a:rPr lang="en-US" sz="1200" kern="1200" dirty="0">
+              <a:rPr lang="en-US" sz="1400" kern="1200" dirty="0">
                 <a:solidFill>
                   <a:schemeClr val="tx1"/>
                 </a:solidFill>
@@ -1390,7 +1284,7 @@
               <a:tabLst/>
               <a:defRPr/>
             </a:pPr>
-            <a:endParaRPr lang="en-US" sz="1200" kern="1200" dirty="0">
+            <a:endParaRPr lang="en-US" sz="1400" kern="1200" dirty="0">
               <a:solidFill>
                 <a:schemeClr val="tx1"/>
               </a:solidFill>
@@ -1401,7 +1295,681 @@
             </a:endParaRPr>
           </a:p>
           <a:p>
-            <a:pPr marL="0" marR="0" lvl="0" indent="0" algn="l" defTabSz="914400" rtl="0" eaLnBrk="0" fontAlgn="base" latinLnBrk="0" hangingPunct="0">
+            <a:r>
+              <a:rPr lang="en-US" sz="1400" b="1" kern="1200" dirty="0">
+                <a:solidFill>
+                  <a:schemeClr val="tx1"/>
+                </a:solidFill>
+                <a:effectLst/>
+                <a:latin typeface="+mn-lt"/>
+                <a:ea typeface="ＭＳ Ｐゴシック" pitchFamily="-106" charset="-128"/>
+                <a:cs typeface="ＭＳ Ｐゴシック" pitchFamily="-106" charset="-128"/>
+              </a:rPr>
+              <a:t>What is “the obedience of faith”?</a:t>
+            </a:r>
+          </a:p>
+          <a:p>
+            <a:endParaRPr lang="en-US" sz="1400" kern="1200" dirty="0">
+              <a:solidFill>
+                <a:schemeClr val="tx1"/>
+              </a:solidFill>
+              <a:effectLst/>
+              <a:latin typeface="+mn-lt"/>
+              <a:ea typeface="ＭＳ Ｐゴシック" pitchFamily="-106" charset="-128"/>
+              <a:cs typeface="ＭＳ Ｐゴシック" pitchFamily="-106" charset="-128"/>
+            </a:endParaRPr>
+          </a:p>
+          <a:p>
+            <a:r>
+              <a:rPr lang="en-US" sz="1400" kern="1200" dirty="0">
+                <a:solidFill>
+                  <a:schemeClr val="tx1"/>
+                </a:solidFill>
+                <a:effectLst/>
+                <a:latin typeface="+mn-lt"/>
+                <a:ea typeface="ＭＳ Ｐゴシック" pitchFamily="-106" charset="-128"/>
+                <a:cs typeface="ＭＳ Ｐゴシック" pitchFamily="-106" charset="-128"/>
+              </a:rPr>
+              <a:t>There are several possibilities.</a:t>
+            </a:r>
+          </a:p>
+          <a:p>
+            <a:endParaRPr lang="en-US" sz="1400" kern="1200" dirty="0">
+              <a:solidFill>
+                <a:schemeClr val="tx1"/>
+              </a:solidFill>
+              <a:effectLst/>
+              <a:latin typeface="+mn-lt"/>
+              <a:ea typeface="ＭＳ Ｐゴシック" pitchFamily="-106" charset="-128"/>
+              <a:cs typeface="ＭＳ Ｐゴシック" pitchFamily="-106" charset="-128"/>
+            </a:endParaRPr>
+          </a:p>
+          <a:p>
+            <a:r>
+              <a:rPr lang="en-US" sz="1400" b="1" kern="1200" dirty="0">
+                <a:solidFill>
+                  <a:schemeClr val="tx1"/>
+                </a:solidFill>
+                <a:effectLst/>
+                <a:latin typeface="+mn-lt"/>
+                <a:ea typeface="ＭＳ Ｐゴシック" pitchFamily="-106" charset="-128"/>
+                <a:cs typeface="ＭＳ Ｐゴシック" pitchFamily="-106" charset="-128"/>
+              </a:rPr>
+              <a:t>1. Obedience that comes from faith</a:t>
+            </a:r>
+            <a:endParaRPr lang="en-US" sz="1400" kern="1200" dirty="0">
+              <a:solidFill>
+                <a:schemeClr val="tx1"/>
+              </a:solidFill>
+              <a:effectLst/>
+              <a:latin typeface="+mn-lt"/>
+              <a:ea typeface="ＭＳ Ｐゴシック" pitchFamily="-106" charset="-128"/>
+              <a:cs typeface="ＭＳ Ｐゴシック" pitchFamily="-106" charset="-128"/>
+            </a:endParaRPr>
+          </a:p>
+          <a:p>
+            <a:r>
+              <a:rPr lang="en-US" sz="1400" kern="1200" dirty="0">
+                <a:solidFill>
+                  <a:schemeClr val="tx1"/>
+                </a:solidFill>
+                <a:effectLst/>
+                <a:latin typeface="+mn-lt"/>
+                <a:ea typeface="ＭＳ Ｐゴシック" pitchFamily="-106" charset="-128"/>
+                <a:cs typeface="ＭＳ Ｐゴシック" pitchFamily="-106" charset="-128"/>
+              </a:rPr>
+              <a:t>This is the most common Protestant interpretation.</a:t>
+            </a:r>
+          </a:p>
+          <a:p>
+            <a:pPr marL="285750" indent="-285750">
+              <a:buFont typeface="Arial" panose="020B0604020202020204" pitchFamily="34" charset="0"/>
+              <a:buChar char="•"/>
+            </a:pPr>
+            <a:r>
+              <a:rPr lang="en-US" sz="1400" i="1" kern="1200" dirty="0">
+                <a:solidFill>
+                  <a:schemeClr val="tx1"/>
+                </a:solidFill>
+                <a:effectLst/>
+                <a:latin typeface="+mn-lt"/>
+                <a:ea typeface="ＭＳ Ｐゴシック" pitchFamily="-106" charset="-128"/>
+                <a:cs typeface="ＭＳ Ｐゴシック" pitchFamily="-106" charset="-128"/>
+              </a:rPr>
+              <a:t>Faith is the root.</a:t>
+            </a:r>
+          </a:p>
+          <a:p>
+            <a:pPr marL="285750" indent="-285750">
+              <a:buFont typeface="Arial" panose="020B0604020202020204" pitchFamily="34" charset="0"/>
+              <a:buChar char="•"/>
+            </a:pPr>
+            <a:r>
+              <a:rPr lang="en-US" sz="1400" i="1" kern="1200" dirty="0">
+                <a:solidFill>
+                  <a:schemeClr val="tx1"/>
+                </a:solidFill>
+                <a:effectLst/>
+                <a:latin typeface="+mn-lt"/>
+                <a:ea typeface="ＭＳ Ｐゴシック" pitchFamily="-106" charset="-128"/>
+                <a:cs typeface="ＭＳ Ｐゴシック" pitchFamily="-106" charset="-128"/>
+              </a:rPr>
+              <a:t>Obedience is the fruit.</a:t>
+            </a:r>
+          </a:p>
+          <a:p>
+            <a:r>
+              <a:rPr lang="en-US" sz="1400" kern="1200" dirty="0">
+                <a:solidFill>
+                  <a:schemeClr val="tx1"/>
+                </a:solidFill>
+                <a:effectLst/>
+                <a:latin typeface="+mn-lt"/>
+                <a:ea typeface="ＭＳ Ｐゴシック" pitchFamily="-106" charset="-128"/>
+                <a:cs typeface="ＭＳ Ｐゴシック" pitchFamily="-106" charset="-128"/>
+              </a:rPr>
+              <a:t>The meaning becomes:</a:t>
+            </a:r>
+          </a:p>
+          <a:p>
+            <a:pPr marL="285750" indent="-285750">
+              <a:buFont typeface="Arial" panose="020B0604020202020204" pitchFamily="34" charset="0"/>
+              <a:buChar char="•"/>
+            </a:pPr>
+            <a:r>
+              <a:rPr lang="en-US" sz="1400" kern="1200" dirty="0">
+                <a:solidFill>
+                  <a:schemeClr val="tx1"/>
+                </a:solidFill>
+                <a:effectLst/>
+                <a:latin typeface="+mn-lt"/>
+                <a:ea typeface="ＭＳ Ｐゴシック" pitchFamily="-106" charset="-128"/>
+                <a:cs typeface="ＭＳ Ｐゴシック" pitchFamily="-106" charset="-128"/>
+              </a:rPr>
+              <a:t>“the obedience that faith produces.”</a:t>
+            </a:r>
+          </a:p>
+          <a:p>
+            <a:r>
+              <a:rPr lang="en-US" sz="1400" kern="1200" dirty="0">
+                <a:solidFill>
+                  <a:schemeClr val="tx1"/>
+                </a:solidFill>
+                <a:effectLst/>
+                <a:latin typeface="+mn-lt"/>
+                <a:ea typeface="ＭＳ Ｐゴシック" pitchFamily="-106" charset="-128"/>
+                <a:cs typeface="ＭＳ Ｐゴシック" pitchFamily="-106" charset="-128"/>
+              </a:rPr>
+              <a:t>This is true, but I think Romans says more.</a:t>
+            </a:r>
+          </a:p>
+          <a:p>
+            <a:endParaRPr lang="en-US" sz="1400" b="1" kern="1200" dirty="0">
+              <a:solidFill>
+                <a:schemeClr val="tx1"/>
+              </a:solidFill>
+              <a:effectLst/>
+              <a:latin typeface="+mn-lt"/>
+              <a:ea typeface="ＭＳ Ｐゴシック" pitchFamily="-106" charset="-128"/>
+              <a:cs typeface="ＭＳ Ｐゴシック" pitchFamily="-106" charset="-128"/>
+            </a:endParaRPr>
+          </a:p>
+          <a:p>
+            <a:r>
+              <a:rPr lang="en-US" sz="1400" b="1" kern="1200" dirty="0">
+                <a:solidFill>
+                  <a:schemeClr val="tx1"/>
+                </a:solidFill>
+                <a:effectLst/>
+                <a:latin typeface="+mn-lt"/>
+                <a:ea typeface="ＭＳ Ｐゴシック" pitchFamily="-106" charset="-128"/>
+                <a:cs typeface="ＭＳ Ｐゴシック" pitchFamily="-106" charset="-128"/>
+              </a:rPr>
+              <a:t>2. Obedience which consists of faith</a:t>
+            </a:r>
+            <a:endParaRPr lang="en-US" sz="1400" kern="1200" dirty="0">
+              <a:solidFill>
+                <a:schemeClr val="tx1"/>
+              </a:solidFill>
+              <a:effectLst/>
+              <a:latin typeface="+mn-lt"/>
+              <a:ea typeface="ＭＳ Ｐゴシック" pitchFamily="-106" charset="-128"/>
+              <a:cs typeface="ＭＳ Ｐゴシック" pitchFamily="-106" charset="-128"/>
+            </a:endParaRPr>
+          </a:p>
+          <a:p>
+            <a:r>
+              <a:rPr lang="en-US" sz="1400" kern="1200" dirty="0">
+                <a:solidFill>
+                  <a:schemeClr val="tx1"/>
+                </a:solidFill>
+                <a:effectLst/>
+                <a:latin typeface="+mn-lt"/>
+                <a:ea typeface="ＭＳ Ｐゴシック" pitchFamily="-106" charset="-128"/>
+                <a:cs typeface="ＭＳ Ｐゴシック" pitchFamily="-106" charset="-128"/>
+              </a:rPr>
+              <a:t>Paul sometimes speaks of believing as an act of obedience.</a:t>
+            </a:r>
+          </a:p>
+          <a:p>
+            <a:pPr marL="285750" indent="-285750">
+              <a:buFont typeface="Arial" panose="020B0604020202020204" pitchFamily="34" charset="0"/>
+              <a:buChar char="•"/>
+            </a:pPr>
+            <a:r>
+              <a:rPr lang="en-US" sz="1400" kern="1200" dirty="0">
+                <a:solidFill>
+                  <a:schemeClr val="tx1"/>
+                </a:solidFill>
+                <a:effectLst/>
+                <a:latin typeface="+mn-lt"/>
+                <a:ea typeface="ＭＳ Ｐゴシック" pitchFamily="-106" charset="-128"/>
+                <a:cs typeface="ＭＳ Ｐゴシック" pitchFamily="-106" charset="-128"/>
+              </a:rPr>
+              <a:t>For example:</a:t>
+            </a:r>
+          </a:p>
+          <a:p>
+            <a:pPr marL="285750" indent="-285750">
+              <a:buFont typeface="Arial" panose="020B0604020202020204" pitchFamily="34" charset="0"/>
+              <a:buChar char="•"/>
+            </a:pPr>
+            <a:r>
+              <a:rPr lang="en-US" sz="1400" kern="1200" dirty="0">
+                <a:solidFill>
+                  <a:schemeClr val="tx1"/>
+                </a:solidFill>
+                <a:effectLst/>
+                <a:latin typeface="+mn-lt"/>
+                <a:ea typeface="ＭＳ Ｐゴシック" pitchFamily="-106" charset="-128"/>
+                <a:cs typeface="ＭＳ Ｐゴシック" pitchFamily="-106" charset="-128"/>
+              </a:rPr>
+              <a:t>“But not all have obeyed the good news…” (Romans 10:16)</a:t>
+            </a:r>
+          </a:p>
+          <a:p>
+            <a:r>
+              <a:rPr lang="en-US" sz="1400" kern="1200" dirty="0">
+                <a:solidFill>
+                  <a:schemeClr val="tx1"/>
+                </a:solidFill>
+                <a:effectLst/>
+                <a:latin typeface="+mn-lt"/>
+                <a:ea typeface="ＭＳ Ｐゴシック" pitchFamily="-106" charset="-128"/>
+                <a:cs typeface="ＭＳ Ｐゴシック" pitchFamily="-106" charset="-128"/>
+              </a:rPr>
+              <a:t>Paul then quotes Isaiah:</a:t>
+            </a:r>
+          </a:p>
+          <a:p>
+            <a:pPr marL="285750" indent="-285750">
+              <a:buFont typeface="Arial" panose="020B0604020202020204" pitchFamily="34" charset="0"/>
+              <a:buChar char="•"/>
+            </a:pPr>
+            <a:r>
+              <a:rPr lang="en-US" sz="1400" kern="1200" dirty="0">
+                <a:solidFill>
+                  <a:schemeClr val="tx1"/>
+                </a:solidFill>
+                <a:effectLst/>
+                <a:latin typeface="+mn-lt"/>
+                <a:ea typeface="ＭＳ Ｐゴシック" pitchFamily="-106" charset="-128"/>
+                <a:cs typeface="ＭＳ Ｐゴシック" pitchFamily="-106" charset="-128"/>
+              </a:rPr>
+              <a:t>“Lord, who has believed our report?”</a:t>
+            </a:r>
+          </a:p>
+          <a:p>
+            <a:r>
+              <a:rPr lang="en-US" sz="1400" kern="1200" dirty="0">
+                <a:solidFill>
+                  <a:schemeClr val="tx1"/>
+                </a:solidFill>
+                <a:effectLst/>
+                <a:latin typeface="+mn-lt"/>
+                <a:ea typeface="ＭＳ Ｐゴシック" pitchFamily="-106" charset="-128"/>
+                <a:cs typeface="ＭＳ Ｐゴシック" pitchFamily="-106" charset="-128"/>
+              </a:rPr>
+              <a:t>Notice the parallel:</a:t>
+            </a:r>
+          </a:p>
+          <a:p>
+            <a:pPr marL="285750" indent="-285750" rtl="0" fontAlgn="ctr">
+              <a:buFont typeface="Arial" panose="020B0604020202020204" pitchFamily="34" charset="0"/>
+              <a:buChar char="•"/>
+            </a:pPr>
+            <a:r>
+              <a:rPr lang="en-US" sz="1400" kern="1200" dirty="0">
+                <a:solidFill>
+                  <a:schemeClr val="tx1"/>
+                </a:solidFill>
+                <a:effectLst/>
+                <a:latin typeface="+mn-lt"/>
+                <a:ea typeface="ＭＳ Ｐゴシック" pitchFamily="-106" charset="-128"/>
+                <a:cs typeface="ＭＳ Ｐゴシック" pitchFamily="-106" charset="-128"/>
+              </a:rPr>
+              <a:t>Obeyed the gospel.</a:t>
+            </a:r>
+          </a:p>
+          <a:p>
+            <a:pPr marL="285750" indent="-285750" rtl="0" fontAlgn="ctr">
+              <a:buFont typeface="Arial" panose="020B0604020202020204" pitchFamily="34" charset="0"/>
+              <a:buChar char="•"/>
+            </a:pPr>
+            <a:r>
+              <a:rPr lang="en-US" sz="1400" kern="1200" dirty="0">
+                <a:solidFill>
+                  <a:schemeClr val="tx1"/>
+                </a:solidFill>
+                <a:effectLst/>
+                <a:latin typeface="+mn-lt"/>
+                <a:ea typeface="ＭＳ Ｐゴシック" pitchFamily="-106" charset="-128"/>
+                <a:cs typeface="ＭＳ Ｐゴシック" pitchFamily="-106" charset="-128"/>
+              </a:rPr>
+              <a:t>Believed the message.</a:t>
+            </a:r>
+          </a:p>
+          <a:p>
+            <a:endParaRPr lang="en-US" sz="1400" kern="1200" dirty="0">
+              <a:solidFill>
+                <a:schemeClr val="tx1"/>
+              </a:solidFill>
+              <a:effectLst/>
+              <a:latin typeface="+mn-lt"/>
+              <a:ea typeface="ＭＳ Ｐゴシック" pitchFamily="-106" charset="-128"/>
+              <a:cs typeface="ＭＳ Ｐゴシック" pitchFamily="-106" charset="-128"/>
+            </a:endParaRPr>
+          </a:p>
+          <a:p>
+            <a:r>
+              <a:rPr lang="en-US" sz="1400" kern="1200" dirty="0">
+                <a:solidFill>
+                  <a:schemeClr val="tx1"/>
+                </a:solidFill>
+                <a:effectLst/>
+                <a:latin typeface="+mn-lt"/>
+                <a:ea typeface="ＭＳ Ｐゴシック" pitchFamily="-106" charset="-128"/>
+                <a:cs typeface="ＭＳ Ｐゴシック" pitchFamily="-106" charset="-128"/>
+              </a:rPr>
+              <a:t>To refuse faith is to disobey.</a:t>
+            </a:r>
+          </a:p>
+          <a:p>
+            <a:r>
+              <a:rPr lang="en-US" sz="1400" kern="1200" dirty="0">
+                <a:solidFill>
+                  <a:schemeClr val="tx1"/>
+                </a:solidFill>
+                <a:effectLst/>
+                <a:latin typeface="+mn-lt"/>
+                <a:ea typeface="ＭＳ Ｐゴシック" pitchFamily="-106" charset="-128"/>
+                <a:cs typeface="ＭＳ Ｐゴシック" pitchFamily="-106" charset="-128"/>
+              </a:rPr>
+              <a:t>To believe is to obey.</a:t>
+            </a:r>
+          </a:p>
+          <a:p>
+            <a:r>
+              <a:rPr lang="en-US" sz="1400" kern="1200" dirty="0">
+                <a:solidFill>
+                  <a:schemeClr val="tx1"/>
+                </a:solidFill>
+                <a:effectLst/>
+                <a:latin typeface="+mn-lt"/>
+                <a:ea typeface="ＭＳ Ｐゴシック" pitchFamily="-106" charset="-128"/>
+                <a:cs typeface="ＭＳ Ｐゴシック" pitchFamily="-106" charset="-128"/>
+              </a:rPr>
+              <a:t>In this sense, </a:t>
+            </a:r>
+            <a:r>
+              <a:rPr lang="en-US" sz="1400" i="1" kern="1200" dirty="0">
+                <a:solidFill>
+                  <a:schemeClr val="tx1"/>
+                </a:solidFill>
+                <a:effectLst/>
+                <a:latin typeface="+mn-lt"/>
+                <a:ea typeface="ＭＳ Ｐゴシック" pitchFamily="-106" charset="-128"/>
+                <a:cs typeface="ＭＳ Ｐゴシック" pitchFamily="-106" charset="-128"/>
+              </a:rPr>
+              <a:t>faith itself is an act of submission to God’s testimony</a:t>
+            </a:r>
+            <a:r>
+              <a:rPr lang="en-US" sz="1400" kern="1200" dirty="0">
+                <a:solidFill>
+                  <a:schemeClr val="tx1"/>
+                </a:solidFill>
+                <a:effectLst/>
+                <a:latin typeface="+mn-lt"/>
+                <a:ea typeface="ＭＳ Ｐゴシック" pitchFamily="-106" charset="-128"/>
+                <a:cs typeface="ＭＳ Ｐゴシック" pitchFamily="-106" charset="-128"/>
+              </a:rPr>
+              <a:t>.</a:t>
+            </a:r>
+          </a:p>
+          <a:p>
+            <a:endParaRPr lang="en-US" sz="1400" b="1" kern="1200" dirty="0">
+              <a:solidFill>
+                <a:schemeClr val="tx1"/>
+              </a:solidFill>
+              <a:effectLst/>
+              <a:latin typeface="+mn-lt"/>
+              <a:ea typeface="ＭＳ Ｐゴシック" pitchFamily="-106" charset="-128"/>
+              <a:cs typeface="ＭＳ Ｐゴシック" pitchFamily="-106" charset="-128"/>
+            </a:endParaRPr>
+          </a:p>
+          <a:p>
+            <a:r>
+              <a:rPr lang="en-US" sz="1400" b="1" kern="1200" dirty="0">
+                <a:solidFill>
+                  <a:schemeClr val="tx1"/>
+                </a:solidFill>
+                <a:effectLst/>
+                <a:latin typeface="+mn-lt"/>
+                <a:ea typeface="ＭＳ Ｐゴシック" pitchFamily="-106" charset="-128"/>
+                <a:cs typeface="ＭＳ Ｐゴシック" pitchFamily="-106" charset="-128"/>
+              </a:rPr>
+              <a:t>3. Faithful obedience</a:t>
+            </a:r>
+            <a:endParaRPr lang="en-US" sz="1400" kern="1200" dirty="0">
+              <a:solidFill>
+                <a:schemeClr val="tx1"/>
+              </a:solidFill>
+              <a:effectLst/>
+              <a:latin typeface="+mn-lt"/>
+              <a:ea typeface="ＭＳ Ｐゴシック" pitchFamily="-106" charset="-128"/>
+              <a:cs typeface="ＭＳ Ｐゴシック" pitchFamily="-106" charset="-128"/>
+            </a:endParaRPr>
+          </a:p>
+          <a:p>
+            <a:r>
+              <a:rPr lang="en-US" sz="1400" kern="1200" dirty="0">
+                <a:solidFill>
+                  <a:schemeClr val="tx1"/>
+                </a:solidFill>
+                <a:effectLst/>
+                <a:latin typeface="+mn-lt"/>
+                <a:ea typeface="ＭＳ Ｐゴシック" pitchFamily="-106" charset="-128"/>
+                <a:cs typeface="ＭＳ Ｐゴシック" pitchFamily="-106" charset="-128"/>
+              </a:rPr>
+              <a:t>This may come closest to Habakkuk’s original meaning.</a:t>
+            </a:r>
+          </a:p>
+          <a:p>
+            <a:pPr marL="285750" indent="-285750">
+              <a:buFont typeface="Arial" panose="020B0604020202020204" pitchFamily="34" charset="0"/>
+              <a:buChar char="•"/>
+            </a:pPr>
+            <a:r>
+              <a:rPr lang="en-US" sz="1400" kern="1200" dirty="0">
+                <a:solidFill>
+                  <a:schemeClr val="tx1"/>
+                </a:solidFill>
+                <a:effectLst/>
+                <a:latin typeface="+mn-lt"/>
+                <a:ea typeface="ＭＳ Ｐゴシック" pitchFamily="-106" charset="-128"/>
+                <a:cs typeface="ＭＳ Ｐゴシック" pitchFamily="-106" charset="-128"/>
+              </a:rPr>
+              <a:t>The Hebrew </a:t>
+            </a:r>
+            <a:r>
+              <a:rPr lang="en-US" sz="1400" i="1" kern="1200" dirty="0" err="1">
+                <a:solidFill>
+                  <a:schemeClr val="tx1"/>
+                </a:solidFill>
+                <a:effectLst/>
+                <a:latin typeface="+mn-lt"/>
+                <a:ea typeface="ＭＳ Ｐゴシック" pitchFamily="-106" charset="-128"/>
+                <a:cs typeface="ＭＳ Ｐゴシック" pitchFamily="-106" charset="-128"/>
+              </a:rPr>
+              <a:t>emunah</a:t>
+            </a:r>
+            <a:r>
+              <a:rPr lang="en-US" sz="1400" kern="1200" dirty="0">
+                <a:solidFill>
+                  <a:schemeClr val="tx1"/>
+                </a:solidFill>
+                <a:effectLst/>
+                <a:latin typeface="+mn-lt"/>
+                <a:ea typeface="ＭＳ Ｐゴシック" pitchFamily="-106" charset="-128"/>
+                <a:cs typeface="ＭＳ Ｐゴシック" pitchFamily="-106" charset="-128"/>
+              </a:rPr>
+              <a:t> often means:</a:t>
+            </a:r>
+          </a:p>
+          <a:p>
+            <a:pPr marL="285750" indent="-285750" rtl="0" fontAlgn="ctr">
+              <a:buFont typeface="Arial" panose="020B0604020202020204" pitchFamily="34" charset="0"/>
+              <a:buChar char="•"/>
+            </a:pPr>
+            <a:r>
+              <a:rPr lang="en-US" sz="1400" i="1" kern="1200" dirty="0">
+                <a:solidFill>
+                  <a:schemeClr val="tx1"/>
+                </a:solidFill>
+                <a:effectLst/>
+                <a:latin typeface="+mn-lt"/>
+                <a:ea typeface="ＭＳ Ｐゴシック" pitchFamily="-106" charset="-128"/>
+                <a:cs typeface="ＭＳ Ｐゴシック" pitchFamily="-106" charset="-128"/>
+              </a:rPr>
+              <a:t>faithfulness</a:t>
+            </a:r>
+          </a:p>
+          <a:p>
+            <a:pPr marL="285750" indent="-285750" rtl="0" fontAlgn="ctr">
+              <a:buFont typeface="Arial" panose="020B0604020202020204" pitchFamily="34" charset="0"/>
+              <a:buChar char="•"/>
+            </a:pPr>
+            <a:r>
+              <a:rPr lang="en-US" sz="1400" i="1" kern="1200" dirty="0">
+                <a:solidFill>
+                  <a:schemeClr val="tx1"/>
+                </a:solidFill>
+                <a:effectLst/>
+                <a:latin typeface="+mn-lt"/>
+                <a:ea typeface="ＭＳ Ｐゴシック" pitchFamily="-106" charset="-128"/>
+                <a:cs typeface="ＭＳ Ｐゴシック" pitchFamily="-106" charset="-128"/>
+              </a:rPr>
+              <a:t>fidelity</a:t>
+            </a:r>
+          </a:p>
+          <a:p>
+            <a:pPr marL="285750" indent="-285750" rtl="0" fontAlgn="ctr">
+              <a:buFont typeface="Arial" panose="020B0604020202020204" pitchFamily="34" charset="0"/>
+              <a:buChar char="•"/>
+            </a:pPr>
+            <a:r>
+              <a:rPr lang="en-US" sz="1400" i="1" kern="1200" dirty="0">
+                <a:solidFill>
+                  <a:schemeClr val="tx1"/>
+                </a:solidFill>
+                <a:effectLst/>
+                <a:latin typeface="+mn-lt"/>
+                <a:ea typeface="ＭＳ Ｐゴシック" pitchFamily="-106" charset="-128"/>
+                <a:cs typeface="ＭＳ Ｐゴシック" pitchFamily="-106" charset="-128"/>
+              </a:rPr>
+              <a:t>steadfast loyalty</a:t>
+            </a:r>
+          </a:p>
+          <a:p>
+            <a:endParaRPr lang="en-US" sz="1400" b="1" kern="1200" dirty="0">
+              <a:solidFill>
+                <a:schemeClr val="tx1"/>
+              </a:solidFill>
+              <a:effectLst/>
+              <a:latin typeface="+mn-lt"/>
+              <a:ea typeface="ＭＳ Ｐゴシック" pitchFamily="-106" charset="-128"/>
+              <a:cs typeface="ＭＳ Ｐゴシック" pitchFamily="-106" charset="-128"/>
+            </a:endParaRPr>
+          </a:p>
+          <a:p>
+            <a:r>
+              <a:rPr lang="en-US" sz="1400" b="1" kern="1200" dirty="0">
+                <a:solidFill>
+                  <a:schemeClr val="tx1"/>
+                </a:solidFill>
+                <a:effectLst/>
+                <a:latin typeface="+mn-lt"/>
+                <a:ea typeface="ＭＳ Ｐゴシック" pitchFamily="-106" charset="-128"/>
+                <a:cs typeface="ＭＳ Ｐゴシック" pitchFamily="-106" charset="-128"/>
+              </a:rPr>
+              <a:t>Thus the righteous person is not merely someone who trusts God intellectually.</a:t>
+            </a:r>
+          </a:p>
+          <a:p>
+            <a:r>
+              <a:rPr lang="en-US" sz="1400" b="1" kern="1200" dirty="0">
+                <a:solidFill>
+                  <a:schemeClr val="tx1"/>
+                </a:solidFill>
+                <a:effectLst/>
+                <a:latin typeface="+mn-lt"/>
+                <a:ea typeface="ＭＳ Ｐゴシック" pitchFamily="-106" charset="-128"/>
+                <a:cs typeface="ＭＳ Ｐゴシック" pitchFamily="-106" charset="-128"/>
+              </a:rPr>
+              <a:t>He is someone whose trust expresses itself in faithful allegiance.</a:t>
+            </a:r>
+          </a:p>
+          <a:p>
+            <a:endParaRPr lang="en-US" sz="1400" kern="1200" dirty="0">
+              <a:solidFill>
+                <a:schemeClr val="tx1"/>
+              </a:solidFill>
+              <a:effectLst/>
+              <a:latin typeface="+mn-lt"/>
+              <a:ea typeface="ＭＳ Ｐゴシック" pitchFamily="-106" charset="-128"/>
+              <a:cs typeface="ＭＳ Ｐゴシック" pitchFamily="-106" charset="-128"/>
+            </a:endParaRPr>
+          </a:p>
+          <a:p>
+            <a:r>
+              <a:rPr lang="en-US" sz="1400" kern="1200" dirty="0">
+                <a:solidFill>
+                  <a:schemeClr val="tx1"/>
+                </a:solidFill>
+                <a:effectLst/>
+                <a:latin typeface="+mn-lt"/>
+                <a:ea typeface="ＭＳ Ｐゴシック" pitchFamily="-106" charset="-128"/>
+                <a:cs typeface="ＭＳ Ｐゴシック" pitchFamily="-106" charset="-128"/>
+              </a:rPr>
+              <a:t>The distinction is subtle but important.</a:t>
+            </a:r>
+          </a:p>
+          <a:p>
+            <a:pPr marL="285750" indent="-285750">
+              <a:buFont typeface="Arial" panose="020B0604020202020204" pitchFamily="34" charset="0"/>
+              <a:buChar char="•"/>
+            </a:pPr>
+            <a:r>
+              <a:rPr lang="en-US" sz="1400" kern="1200" dirty="0">
+                <a:solidFill>
+                  <a:schemeClr val="tx1"/>
+                </a:solidFill>
+                <a:effectLst/>
+                <a:latin typeface="+mn-lt"/>
+                <a:ea typeface="ＭＳ Ｐゴシック" pitchFamily="-106" charset="-128"/>
+                <a:cs typeface="ＭＳ Ｐゴシック" pitchFamily="-106" charset="-128"/>
+              </a:rPr>
+              <a:t>Biblical faith is not merely believing that God exists.</a:t>
+            </a:r>
+          </a:p>
+          <a:p>
+            <a:pPr marL="285750" indent="-285750">
+              <a:buFont typeface="Arial" panose="020B0604020202020204" pitchFamily="34" charset="0"/>
+              <a:buChar char="•"/>
+            </a:pPr>
+            <a:r>
+              <a:rPr lang="en-US" sz="1400" kern="1200" dirty="0">
+                <a:solidFill>
+                  <a:schemeClr val="tx1"/>
+                </a:solidFill>
+                <a:effectLst/>
+                <a:latin typeface="+mn-lt"/>
+                <a:ea typeface="ＭＳ Ｐゴシック" pitchFamily="-106" charset="-128"/>
+                <a:cs typeface="ＭＳ Ｐゴシック" pitchFamily="-106" charset="-128"/>
+              </a:rPr>
+              <a:t>It is entrusting oneself to Him.</a:t>
+            </a:r>
+          </a:p>
+          <a:p>
+            <a:pPr marL="285750" indent="-285750">
+              <a:buFont typeface="Arial" panose="020B0604020202020204" pitchFamily="34" charset="0"/>
+              <a:buChar char="•"/>
+            </a:pPr>
+            <a:r>
+              <a:rPr lang="en-US" sz="1400" kern="1200" dirty="0">
+                <a:solidFill>
+                  <a:schemeClr val="tx1"/>
+                </a:solidFill>
+                <a:effectLst/>
+                <a:latin typeface="+mn-lt"/>
+                <a:ea typeface="ＭＳ Ｐゴシック" pitchFamily="-106" charset="-128"/>
+                <a:cs typeface="ＭＳ Ｐゴシック" pitchFamily="-106" charset="-128"/>
+              </a:rPr>
+              <a:t>And entrusting oneself necessarily changes one’s conduct.</a:t>
+            </a:r>
+          </a:p>
+          <a:p>
+            <a:pPr marL="285750" marR="0" lvl="0" indent="-285750" algn="l" defTabSz="914400" rtl="0" eaLnBrk="0" fontAlgn="base" latinLnBrk="0" hangingPunct="0">
               <a:lnSpc>
                 <a:spcPct val="100000"/>
               </a:lnSpc>
@@ -1413,595 +1981,12 @@
               </a:spcAft>
               <a:buClrTx/>
               <a:buSzTx/>
-              <a:buFontTx/>
-              <a:buNone/>
+              <a:buFont typeface="Arial" panose="020B0604020202020204" pitchFamily="34" charset="0"/>
+              <a:buChar char="•"/>
               <a:tabLst/>
               <a:defRPr/>
             </a:pPr>
-            <a:endParaRPr lang="en-US" sz="1200" kern="1200" dirty="0">
-              <a:solidFill>
-                <a:schemeClr val="tx1"/>
-              </a:solidFill>
-              <a:effectLst/>
-              <a:latin typeface="+mn-lt"/>
-              <a:ea typeface="ＭＳ Ｐゴシック" pitchFamily="-106" charset="-128"/>
-              <a:cs typeface="ＭＳ Ｐゴシック" pitchFamily="-106" charset="-128"/>
-            </a:endParaRPr>
-          </a:p>
-          <a:p>
-            <a:pPr marL="0" marR="0" lvl="0" indent="0" algn="l" defTabSz="914400" rtl="0" eaLnBrk="0" fontAlgn="base" latinLnBrk="0" hangingPunct="0">
-              <a:lnSpc>
-                <a:spcPct val="100000"/>
-              </a:lnSpc>
-              <a:spcBef>
-                <a:spcPct val="30000"/>
-              </a:spcBef>
-              <a:spcAft>
-                <a:spcPct val="0"/>
-              </a:spcAft>
-              <a:buClrTx/>
-              <a:buSzTx/>
-              <a:buFontTx/>
-              <a:buNone/>
-              <a:tabLst/>
-              <a:defRPr/>
-            </a:pPr>
-            <a:endParaRPr lang="en-US" sz="1200" kern="1200" dirty="0">
-              <a:solidFill>
-                <a:schemeClr val="tx1"/>
-              </a:solidFill>
-              <a:effectLst/>
-              <a:latin typeface="+mn-lt"/>
-              <a:ea typeface="ＭＳ Ｐゴシック" pitchFamily="-106" charset="-128"/>
-              <a:cs typeface="ＭＳ Ｐゴシック" pitchFamily="-106" charset="-128"/>
-            </a:endParaRPr>
-          </a:p>
-          <a:p>
-            <a:r>
-              <a:rPr lang="en-US" sz="1200" b="1" kern="1200" dirty="0">
-                <a:solidFill>
-                  <a:schemeClr val="tx1"/>
-                </a:solidFill>
-                <a:effectLst/>
-                <a:latin typeface="+mn-lt"/>
-                <a:ea typeface="ＭＳ Ｐゴシック" pitchFamily="-106" charset="-128"/>
-                <a:cs typeface="ＭＳ Ｐゴシック" pitchFamily="-106" charset="-128"/>
-              </a:rPr>
-              <a:t>What is “the obedience of faith”?</a:t>
-            </a:r>
-            <a:endParaRPr lang="en-US" sz="1200" kern="1200" dirty="0">
-              <a:solidFill>
-                <a:schemeClr val="tx1"/>
-              </a:solidFill>
-              <a:effectLst/>
-              <a:latin typeface="+mn-lt"/>
-              <a:ea typeface="ＭＳ Ｐゴシック" pitchFamily="-106" charset="-128"/>
-              <a:cs typeface="ＭＳ Ｐゴシック" pitchFamily="-106" charset="-128"/>
-            </a:endParaRPr>
-          </a:p>
-          <a:p>
-            <a:r>
-              <a:rPr lang="en-US" sz="1200" kern="1200" dirty="0">
-                <a:solidFill>
-                  <a:schemeClr val="tx1"/>
-                </a:solidFill>
-                <a:effectLst/>
-                <a:latin typeface="+mn-lt"/>
-                <a:ea typeface="ＭＳ Ｐゴシック" pitchFamily="-106" charset="-128"/>
-                <a:cs typeface="ＭＳ Ｐゴシック" pitchFamily="-106" charset="-128"/>
-              </a:rPr>
-              <a:t>There are several possibilities.</a:t>
-            </a:r>
-          </a:p>
-          <a:p>
-            <a:r>
-              <a:rPr lang="en-US" sz="1200" b="1" kern="1200" dirty="0">
-                <a:solidFill>
-                  <a:schemeClr val="tx1"/>
-                </a:solidFill>
-                <a:effectLst/>
-                <a:latin typeface="+mn-lt"/>
-                <a:ea typeface="ＭＳ Ｐゴシック" pitchFamily="-106" charset="-128"/>
-                <a:cs typeface="ＭＳ Ｐゴシック" pitchFamily="-106" charset="-128"/>
-              </a:rPr>
-              <a:t>1. Obedience that comes from faith</a:t>
-            </a:r>
-            <a:endParaRPr lang="en-US" sz="1200" kern="1200" dirty="0">
-              <a:solidFill>
-                <a:schemeClr val="tx1"/>
-              </a:solidFill>
-              <a:effectLst/>
-              <a:latin typeface="+mn-lt"/>
-              <a:ea typeface="ＭＳ Ｐゴシック" pitchFamily="-106" charset="-128"/>
-              <a:cs typeface="ＭＳ Ｐゴシック" pitchFamily="-106" charset="-128"/>
-            </a:endParaRPr>
-          </a:p>
-          <a:p>
-            <a:r>
-              <a:rPr lang="en-US" sz="1200" kern="1200" dirty="0">
-                <a:solidFill>
-                  <a:schemeClr val="tx1"/>
-                </a:solidFill>
-                <a:effectLst/>
-                <a:latin typeface="+mn-lt"/>
-                <a:ea typeface="ＭＳ Ｐゴシック" pitchFamily="-106" charset="-128"/>
-                <a:cs typeface="ＭＳ Ｐゴシック" pitchFamily="-106" charset="-128"/>
-              </a:rPr>
-              <a:t>This is the most common Protestant interpretation.</a:t>
-            </a:r>
-          </a:p>
-          <a:p>
-            <a:r>
-              <a:rPr lang="en-US" sz="1200" i="1" kern="1200" dirty="0">
-                <a:solidFill>
-                  <a:schemeClr val="tx1"/>
-                </a:solidFill>
-                <a:effectLst/>
-                <a:latin typeface="+mn-lt"/>
-                <a:ea typeface="ＭＳ Ｐゴシック" pitchFamily="-106" charset="-128"/>
-                <a:cs typeface="ＭＳ Ｐゴシック" pitchFamily="-106" charset="-128"/>
-              </a:rPr>
-              <a:t>Faith is the root.</a:t>
-            </a:r>
-          </a:p>
-          <a:p>
-            <a:r>
-              <a:rPr lang="en-US" sz="1200" i="1" kern="1200" dirty="0">
-                <a:solidFill>
-                  <a:schemeClr val="tx1"/>
-                </a:solidFill>
-                <a:effectLst/>
-                <a:latin typeface="+mn-lt"/>
-                <a:ea typeface="ＭＳ Ｐゴシック" pitchFamily="-106" charset="-128"/>
-                <a:cs typeface="ＭＳ Ｐゴシック" pitchFamily="-106" charset="-128"/>
-              </a:rPr>
-              <a:t>Obedience is the fruit.</a:t>
-            </a:r>
-          </a:p>
-          <a:p>
-            <a:r>
-              <a:rPr lang="en-US" sz="1200" kern="1200" dirty="0">
-                <a:solidFill>
-                  <a:schemeClr val="tx1"/>
-                </a:solidFill>
-                <a:effectLst/>
-                <a:latin typeface="+mn-lt"/>
-                <a:ea typeface="ＭＳ Ｐゴシック" pitchFamily="-106" charset="-128"/>
-                <a:cs typeface="ＭＳ Ｐゴシック" pitchFamily="-106" charset="-128"/>
-              </a:rPr>
-              <a:t>The meaning becomes:</a:t>
-            </a:r>
-          </a:p>
-          <a:p>
-            <a:r>
-              <a:rPr lang="en-US" sz="1200" kern="1200" dirty="0">
-                <a:solidFill>
-                  <a:schemeClr val="tx1"/>
-                </a:solidFill>
-                <a:effectLst/>
-                <a:latin typeface="+mn-lt"/>
-                <a:ea typeface="ＭＳ Ｐゴシック" pitchFamily="-106" charset="-128"/>
-                <a:cs typeface="ＭＳ Ｐゴシック" pitchFamily="-106" charset="-128"/>
-              </a:rPr>
-              <a:t>“the obedience that faith produces.”</a:t>
-            </a:r>
-          </a:p>
-          <a:p>
-            <a:r>
-              <a:rPr lang="en-US" sz="1200" kern="1200" dirty="0">
-                <a:solidFill>
-                  <a:schemeClr val="tx1"/>
-                </a:solidFill>
-                <a:effectLst/>
-                <a:latin typeface="+mn-lt"/>
-                <a:ea typeface="ＭＳ Ｐゴシック" pitchFamily="-106" charset="-128"/>
-                <a:cs typeface="ＭＳ Ｐゴシック" pitchFamily="-106" charset="-128"/>
-              </a:rPr>
-              <a:t>This is true, but I think Romans says more.</a:t>
-            </a:r>
-          </a:p>
-          <a:p>
-            <a:r>
-              <a:rPr lang="en-US" sz="1200" b="1" kern="1200" dirty="0">
-                <a:solidFill>
-                  <a:schemeClr val="tx1"/>
-                </a:solidFill>
-                <a:effectLst/>
-                <a:latin typeface="+mn-lt"/>
-                <a:ea typeface="ＭＳ Ｐゴシック" pitchFamily="-106" charset="-128"/>
-                <a:cs typeface="ＭＳ Ｐゴシック" pitchFamily="-106" charset="-128"/>
-              </a:rPr>
-              <a:t>2. Obedience which consists of faith</a:t>
-            </a:r>
-            <a:endParaRPr lang="en-US" sz="1200" kern="1200" dirty="0">
-              <a:solidFill>
-                <a:schemeClr val="tx1"/>
-              </a:solidFill>
-              <a:effectLst/>
-              <a:latin typeface="+mn-lt"/>
-              <a:ea typeface="ＭＳ Ｐゴシック" pitchFamily="-106" charset="-128"/>
-              <a:cs typeface="ＭＳ Ｐゴシック" pitchFamily="-106" charset="-128"/>
-            </a:endParaRPr>
-          </a:p>
-          <a:p>
-            <a:r>
-              <a:rPr lang="en-US" sz="1200" kern="1200" dirty="0">
-                <a:solidFill>
-                  <a:schemeClr val="tx1"/>
-                </a:solidFill>
-                <a:effectLst/>
-                <a:latin typeface="+mn-lt"/>
-                <a:ea typeface="ＭＳ Ｐゴシック" pitchFamily="-106" charset="-128"/>
-                <a:cs typeface="ＭＳ Ｐゴシック" pitchFamily="-106" charset="-128"/>
-              </a:rPr>
-              <a:t>Paul sometimes speaks of believing as an act of obedience.</a:t>
-            </a:r>
-          </a:p>
-          <a:p>
-            <a:r>
-              <a:rPr lang="en-US" sz="1200" kern="1200" dirty="0">
-                <a:solidFill>
-                  <a:schemeClr val="tx1"/>
-                </a:solidFill>
-                <a:effectLst/>
-                <a:latin typeface="+mn-lt"/>
-                <a:ea typeface="ＭＳ Ｐゴシック" pitchFamily="-106" charset="-128"/>
-                <a:cs typeface="ＭＳ Ｐゴシック" pitchFamily="-106" charset="-128"/>
-              </a:rPr>
-              <a:t>For example:</a:t>
-            </a:r>
-          </a:p>
-          <a:p>
-            <a:r>
-              <a:rPr lang="en-US" sz="1200" kern="1200" dirty="0">
-                <a:solidFill>
-                  <a:schemeClr val="tx1"/>
-                </a:solidFill>
-                <a:effectLst/>
-                <a:latin typeface="+mn-lt"/>
-                <a:ea typeface="ＭＳ Ｐゴシック" pitchFamily="-106" charset="-128"/>
-                <a:cs typeface="ＭＳ Ｐゴシック" pitchFamily="-106" charset="-128"/>
-              </a:rPr>
-              <a:t>“But not all have obeyed the good news…” (Romans 10:16)</a:t>
-            </a:r>
-          </a:p>
-          <a:p>
-            <a:r>
-              <a:rPr lang="en-US" sz="1200" kern="1200" dirty="0">
-                <a:solidFill>
-                  <a:schemeClr val="tx1"/>
-                </a:solidFill>
-                <a:effectLst/>
-                <a:latin typeface="+mn-lt"/>
-                <a:ea typeface="ＭＳ Ｐゴシック" pitchFamily="-106" charset="-128"/>
-                <a:cs typeface="ＭＳ Ｐゴシック" pitchFamily="-106" charset="-128"/>
-              </a:rPr>
-              <a:t>Paul then quotes Isaiah:</a:t>
-            </a:r>
-          </a:p>
-          <a:p>
-            <a:r>
-              <a:rPr lang="en-US" sz="1200" kern="1200" dirty="0">
-                <a:solidFill>
-                  <a:schemeClr val="tx1"/>
-                </a:solidFill>
-                <a:effectLst/>
-                <a:latin typeface="+mn-lt"/>
-                <a:ea typeface="ＭＳ Ｐゴシック" pitchFamily="-106" charset="-128"/>
-                <a:cs typeface="ＭＳ Ｐゴシック" pitchFamily="-106" charset="-128"/>
-              </a:rPr>
-              <a:t>“Lord, who has believed our report?”</a:t>
-            </a:r>
-          </a:p>
-          <a:p>
-            <a:r>
-              <a:rPr lang="en-US" sz="1200" kern="1200" dirty="0">
-                <a:solidFill>
-                  <a:schemeClr val="tx1"/>
-                </a:solidFill>
-                <a:effectLst/>
-                <a:latin typeface="+mn-lt"/>
-                <a:ea typeface="ＭＳ Ｐゴシック" pitchFamily="-106" charset="-128"/>
-                <a:cs typeface="ＭＳ Ｐゴシック" pitchFamily="-106" charset="-128"/>
-              </a:rPr>
-              <a:t>Notice the parallel:</a:t>
-            </a:r>
-          </a:p>
-          <a:p>
-            <a:pPr rtl="0" fontAlgn="ctr"/>
-            <a:r>
-              <a:rPr lang="en-US" sz="1200" kern="1200" dirty="0">
-                <a:solidFill>
-                  <a:schemeClr val="tx1"/>
-                </a:solidFill>
-                <a:effectLst/>
-                <a:latin typeface="+mn-lt"/>
-                <a:ea typeface="ＭＳ Ｐゴシック" pitchFamily="-106" charset="-128"/>
-                <a:cs typeface="ＭＳ Ｐゴシック" pitchFamily="-106" charset="-128"/>
-              </a:rPr>
-              <a:t>Obeyed the gospel.</a:t>
-            </a:r>
-          </a:p>
-          <a:p>
-            <a:pPr rtl="0" fontAlgn="ctr"/>
-            <a:r>
-              <a:rPr lang="en-US" sz="1200" kern="1200" dirty="0">
-                <a:solidFill>
-                  <a:schemeClr val="tx1"/>
-                </a:solidFill>
-                <a:effectLst/>
-                <a:latin typeface="+mn-lt"/>
-                <a:ea typeface="ＭＳ Ｐゴシック" pitchFamily="-106" charset="-128"/>
-                <a:cs typeface="ＭＳ Ｐゴシック" pitchFamily="-106" charset="-128"/>
-              </a:rPr>
-              <a:t>Believed the message.</a:t>
-            </a:r>
-          </a:p>
-          <a:p>
-            <a:r>
-              <a:rPr lang="en-US" sz="1200" kern="1200" dirty="0">
-                <a:solidFill>
-                  <a:schemeClr val="tx1"/>
-                </a:solidFill>
-                <a:effectLst/>
-                <a:latin typeface="+mn-lt"/>
-                <a:ea typeface="ＭＳ Ｐゴシック" pitchFamily="-106" charset="-128"/>
-                <a:cs typeface="ＭＳ Ｐゴシック" pitchFamily="-106" charset="-128"/>
-              </a:rPr>
-              <a:t>To refuse faith is to disobey.</a:t>
-            </a:r>
-          </a:p>
-          <a:p>
-            <a:r>
-              <a:rPr lang="en-US" sz="1200" kern="1200" dirty="0">
-                <a:solidFill>
-                  <a:schemeClr val="tx1"/>
-                </a:solidFill>
-                <a:effectLst/>
-                <a:latin typeface="+mn-lt"/>
-                <a:ea typeface="ＭＳ Ｐゴシック" pitchFamily="-106" charset="-128"/>
-                <a:cs typeface="ＭＳ Ｐゴシック" pitchFamily="-106" charset="-128"/>
-              </a:rPr>
-              <a:t>To believe is to obey.</a:t>
-            </a:r>
-          </a:p>
-          <a:p>
-            <a:r>
-              <a:rPr lang="en-US" sz="1200" kern="1200" dirty="0">
-                <a:solidFill>
-                  <a:schemeClr val="tx1"/>
-                </a:solidFill>
-                <a:effectLst/>
-                <a:latin typeface="+mn-lt"/>
-                <a:ea typeface="ＭＳ Ｐゴシック" pitchFamily="-106" charset="-128"/>
-                <a:cs typeface="ＭＳ Ｐゴシック" pitchFamily="-106" charset="-128"/>
-              </a:rPr>
-              <a:t>In this sense, faith itself is an act of submission to God’s testimony.</a:t>
-            </a:r>
-          </a:p>
-          <a:p>
-            <a:r>
-              <a:rPr lang="en-US" sz="1200" b="1" kern="1200" dirty="0">
-                <a:solidFill>
-                  <a:schemeClr val="tx1"/>
-                </a:solidFill>
-                <a:effectLst/>
-                <a:latin typeface="+mn-lt"/>
-                <a:ea typeface="ＭＳ Ｐゴシック" pitchFamily="-106" charset="-128"/>
-                <a:cs typeface="ＭＳ Ｐゴシック" pitchFamily="-106" charset="-128"/>
-              </a:rPr>
-              <a:t>3. Faithful obedience</a:t>
-            </a:r>
-            <a:endParaRPr lang="en-US" sz="1200" kern="1200" dirty="0">
-              <a:solidFill>
-                <a:schemeClr val="tx1"/>
-              </a:solidFill>
-              <a:effectLst/>
-              <a:latin typeface="+mn-lt"/>
-              <a:ea typeface="ＭＳ Ｐゴシック" pitchFamily="-106" charset="-128"/>
-              <a:cs typeface="ＭＳ Ｐゴシック" pitchFamily="-106" charset="-128"/>
-            </a:endParaRPr>
-          </a:p>
-          <a:p>
-            <a:r>
-              <a:rPr lang="en-US" sz="1200" kern="1200" dirty="0">
-                <a:solidFill>
-                  <a:schemeClr val="tx1"/>
-                </a:solidFill>
-                <a:effectLst/>
-                <a:latin typeface="+mn-lt"/>
-                <a:ea typeface="ＭＳ Ｐゴシック" pitchFamily="-106" charset="-128"/>
-                <a:cs typeface="ＭＳ Ｐゴシック" pitchFamily="-106" charset="-128"/>
-              </a:rPr>
-              <a:t>This may come closest to Habakkuk’s original meaning.</a:t>
-            </a:r>
-          </a:p>
-          <a:p>
-            <a:r>
-              <a:rPr lang="en-US" sz="1200" kern="1200" dirty="0">
-                <a:solidFill>
-                  <a:schemeClr val="tx1"/>
-                </a:solidFill>
-                <a:effectLst/>
-                <a:latin typeface="+mn-lt"/>
-                <a:ea typeface="ＭＳ Ｐゴシック" pitchFamily="-106" charset="-128"/>
-                <a:cs typeface="ＭＳ Ｐゴシック" pitchFamily="-106" charset="-128"/>
-              </a:rPr>
-              <a:t>The Hebrew </a:t>
-            </a:r>
-            <a:r>
-              <a:rPr lang="en-US" sz="1200" i="1" kern="1200" dirty="0" err="1">
-                <a:solidFill>
-                  <a:schemeClr val="tx1"/>
-                </a:solidFill>
-                <a:effectLst/>
-                <a:latin typeface="+mn-lt"/>
-                <a:ea typeface="ＭＳ Ｐゴシック" pitchFamily="-106" charset="-128"/>
-                <a:cs typeface="ＭＳ Ｐゴシック" pitchFamily="-106" charset="-128"/>
-              </a:rPr>
-              <a:t>emunah</a:t>
-            </a:r>
-            <a:r>
-              <a:rPr lang="en-US" sz="1200" kern="1200" dirty="0">
-                <a:solidFill>
-                  <a:schemeClr val="tx1"/>
-                </a:solidFill>
-                <a:effectLst/>
-                <a:latin typeface="+mn-lt"/>
-                <a:ea typeface="ＭＳ Ｐゴシック" pitchFamily="-106" charset="-128"/>
-                <a:cs typeface="ＭＳ Ｐゴシック" pitchFamily="-106" charset="-128"/>
-              </a:rPr>
-              <a:t> often means:</a:t>
-            </a:r>
-          </a:p>
-          <a:p>
-            <a:pPr rtl="0" fontAlgn="ctr"/>
-            <a:r>
-              <a:rPr lang="en-US" sz="1200" i="1" kern="1200" dirty="0">
-                <a:solidFill>
-                  <a:schemeClr val="tx1"/>
-                </a:solidFill>
-                <a:effectLst/>
-                <a:latin typeface="+mn-lt"/>
-                <a:ea typeface="ＭＳ Ｐゴシック" pitchFamily="-106" charset="-128"/>
-                <a:cs typeface="ＭＳ Ｐゴシック" pitchFamily="-106" charset="-128"/>
-              </a:rPr>
-              <a:t>faithfulness</a:t>
-            </a:r>
-          </a:p>
-          <a:p>
-            <a:pPr rtl="0" fontAlgn="ctr"/>
-            <a:r>
-              <a:rPr lang="en-US" sz="1200" i="1" kern="1200" dirty="0">
-                <a:solidFill>
-                  <a:schemeClr val="tx1"/>
-                </a:solidFill>
-                <a:effectLst/>
-                <a:latin typeface="+mn-lt"/>
-                <a:ea typeface="ＭＳ Ｐゴシック" pitchFamily="-106" charset="-128"/>
-                <a:cs typeface="ＭＳ Ｐゴシック" pitchFamily="-106" charset="-128"/>
-              </a:rPr>
-              <a:t>fidelity</a:t>
-            </a:r>
-          </a:p>
-          <a:p>
-            <a:pPr rtl="0" fontAlgn="ctr"/>
-            <a:r>
-              <a:rPr lang="en-US" sz="1200" i="1" kern="1200" dirty="0">
-                <a:solidFill>
-                  <a:schemeClr val="tx1"/>
-                </a:solidFill>
-                <a:effectLst/>
-                <a:latin typeface="+mn-lt"/>
-                <a:ea typeface="ＭＳ Ｐゴシック" pitchFamily="-106" charset="-128"/>
-                <a:cs typeface="ＭＳ Ｐゴシック" pitchFamily="-106" charset="-128"/>
-              </a:rPr>
-              <a:t>steadfast loyalty</a:t>
-            </a:r>
-          </a:p>
-          <a:p>
-            <a:r>
-              <a:rPr lang="en-US" sz="1200" kern="1200" dirty="0">
-                <a:solidFill>
-                  <a:schemeClr val="tx1"/>
-                </a:solidFill>
-                <a:effectLst/>
-                <a:latin typeface="+mn-lt"/>
-                <a:ea typeface="ＭＳ Ｐゴシック" pitchFamily="-106" charset="-128"/>
-                <a:cs typeface="ＭＳ Ｐゴシック" pitchFamily="-106" charset="-128"/>
-              </a:rPr>
-              <a:t>Thus the righteous person is not merely someone who trusts God intellectually.</a:t>
-            </a:r>
-          </a:p>
-          <a:p>
-            <a:r>
-              <a:rPr lang="en-US" sz="1200" kern="1200" dirty="0">
-                <a:solidFill>
-                  <a:schemeClr val="tx1"/>
-                </a:solidFill>
-                <a:effectLst/>
-                <a:latin typeface="+mn-lt"/>
-                <a:ea typeface="ＭＳ Ｐゴシック" pitchFamily="-106" charset="-128"/>
-                <a:cs typeface="ＭＳ Ｐゴシック" pitchFamily="-106" charset="-128"/>
-              </a:rPr>
-              <a:t>He is someone whose trust expresses itself in faithful allegiance.</a:t>
-            </a:r>
-          </a:p>
-          <a:p>
-            <a:r>
-              <a:rPr lang="en-US" sz="1200" kern="1200" dirty="0">
-                <a:solidFill>
-                  <a:schemeClr val="tx1"/>
-                </a:solidFill>
-                <a:effectLst/>
-                <a:latin typeface="+mn-lt"/>
-                <a:ea typeface="ＭＳ Ｐゴシック" pitchFamily="-106" charset="-128"/>
-                <a:cs typeface="ＭＳ Ｐゴシック" pitchFamily="-106" charset="-128"/>
-              </a:rPr>
-              <a:t>The distinction is subtle but important.</a:t>
-            </a:r>
-          </a:p>
-          <a:p>
-            <a:r>
-              <a:rPr lang="en-US" sz="1200" kern="1200" dirty="0">
-                <a:solidFill>
-                  <a:schemeClr val="tx1"/>
-                </a:solidFill>
-                <a:effectLst/>
-                <a:latin typeface="+mn-lt"/>
-                <a:ea typeface="ＭＳ Ｐゴシック" pitchFamily="-106" charset="-128"/>
-                <a:cs typeface="ＭＳ Ｐゴシック" pitchFamily="-106" charset="-128"/>
-              </a:rPr>
-              <a:t>Biblical faith is not merely believing that God exists.</a:t>
-            </a:r>
-          </a:p>
-          <a:p>
-            <a:r>
-              <a:rPr lang="en-US" sz="1200" kern="1200" dirty="0">
-                <a:solidFill>
-                  <a:schemeClr val="tx1"/>
-                </a:solidFill>
-                <a:effectLst/>
-                <a:latin typeface="+mn-lt"/>
-                <a:ea typeface="ＭＳ Ｐゴシック" pitchFamily="-106" charset="-128"/>
-                <a:cs typeface="ＭＳ Ｐゴシック" pitchFamily="-106" charset="-128"/>
-              </a:rPr>
-              <a:t>It is entrusting oneself to Him.</a:t>
-            </a:r>
-          </a:p>
-          <a:p>
-            <a:r>
-              <a:rPr lang="en-US" sz="1200" kern="1200" dirty="0">
-                <a:solidFill>
-                  <a:schemeClr val="tx1"/>
-                </a:solidFill>
-                <a:effectLst/>
-                <a:latin typeface="+mn-lt"/>
-                <a:ea typeface="ＭＳ Ｐゴシック" pitchFamily="-106" charset="-128"/>
-                <a:cs typeface="ＭＳ Ｐゴシック" pitchFamily="-106" charset="-128"/>
-              </a:rPr>
-              <a:t>And entrusting oneself necessarily changes one’s conduct.</a:t>
-            </a:r>
-          </a:p>
-          <a:p>
-            <a:pPr marL="0" marR="0" lvl="0" indent="0" algn="l" defTabSz="914400" rtl="0" eaLnBrk="0" fontAlgn="base" latinLnBrk="0" hangingPunct="0">
-              <a:lnSpc>
-                <a:spcPct val="100000"/>
-              </a:lnSpc>
-              <a:spcBef>
-                <a:spcPct val="30000"/>
-              </a:spcBef>
-              <a:spcAft>
-                <a:spcPct val="0"/>
-              </a:spcAft>
-              <a:buClrTx/>
-              <a:buSzTx/>
-              <a:buFontTx/>
-              <a:buNone/>
-              <a:tabLst/>
-              <a:defRPr/>
-            </a:pPr>
-            <a:endParaRPr lang="en-US" sz="1200" kern="1200" dirty="0">
+            <a:endParaRPr lang="en-US" sz="1400" kern="1200" dirty="0">
               <a:solidFill>
                 <a:schemeClr val="tx1"/>
               </a:solidFill>
@@ -2124,12 +2109,12 @@
         <p:spPr/>
         <p:txBody>
           <a:bodyPr>
-            <a:normAutofit/>
+            <a:normAutofit fontScale="55000" lnSpcReduction="20000"/>
           </a:bodyPr>
           <a:lstStyle/>
           <a:p>
             <a:r>
-              <a:rPr lang="en-US" sz="1200" b="1" i="0" kern="1200" dirty="0">
+              <a:rPr lang="en-US" sz="1400" b="1" i="0" kern="1200" dirty="0">
                 <a:solidFill>
                   <a:schemeClr val="tx1"/>
                 </a:solidFill>
@@ -2140,7 +2125,7 @@
               </a:rPr>
               <a:t>The Just Shall Live by Faith, and the Unjust Chaldeans Will Die (2:4)</a:t>
             </a:r>
-            <a:endParaRPr lang="en-US" sz="1200" b="0" i="0" kern="1200" dirty="0">
+            <a:endParaRPr lang="en-US" sz="1400" b="0" i="0" kern="1200" dirty="0">
               <a:solidFill>
                 <a:schemeClr val="tx1"/>
               </a:solidFill>
@@ -2152,7 +2137,7 @@
           </a:p>
           <a:p>
             <a:r>
-              <a:rPr lang="en-US" sz="1200" b="0" i="0" kern="1200" dirty="0">
+              <a:rPr lang="en-US" sz="1400" b="0" i="0" kern="1200" dirty="0">
                 <a:solidFill>
                   <a:schemeClr val="tx1"/>
                 </a:solidFill>
@@ -2164,7 +2149,7 @@
               <a:t>Because the </a:t>
             </a:r>
             <a:r>
-              <a:rPr lang="en-US" sz="1200" b="1" i="0" kern="1200" dirty="0">
+              <a:rPr lang="en-US" sz="1400" b="1" i="0" kern="1200" dirty="0">
                 <a:solidFill>
                   <a:schemeClr val="tx1"/>
                 </a:solidFill>
@@ -2176,7 +2161,7 @@
               <a:t>soul</a:t>
             </a:r>
             <a:r>
-              <a:rPr lang="en-US" sz="1200" b="0" i="0" kern="1200" dirty="0">
+              <a:rPr lang="en-US" sz="1400" b="0" i="0" kern="1200" dirty="0">
                 <a:solidFill>
                   <a:schemeClr val="tx1"/>
                 </a:solidFill>
@@ -2188,7 +2173,7 @@
               <a:t> of the king of Babylon was lifted up with pride, he would die, but the godly remnant of Israel would </a:t>
             </a:r>
             <a:r>
-              <a:rPr lang="en-US" sz="1200" b="1" i="0" kern="1200" dirty="0">
+              <a:rPr lang="en-US" sz="1400" b="1" i="0" kern="1200" dirty="0">
                 <a:solidFill>
                   <a:schemeClr val="tx1"/>
                 </a:solidFill>
@@ -2200,7 +2185,7 @@
               <a:t>live by . . . faith</a:t>
             </a:r>
             <a:r>
-              <a:rPr lang="en-US" sz="1200" b="0" i="0" kern="1200" dirty="0">
+              <a:rPr lang="en-US" sz="1400" b="0" i="0" kern="1200" dirty="0">
                 <a:solidFill>
                   <a:schemeClr val="tx1"/>
                 </a:solidFill>
@@ -2212,7 +2197,7 @@
               <a:t>. Verse 4c is quoted three times in the NT. The three parts of the verse—the just—shall live—by faith, go well with the emphases of the three contexts where they appear: </a:t>
             </a:r>
             <a:r>
-              <a:rPr lang="en-US" sz="1200" b="0" i="0" u="sng" kern="1200" dirty="0">
+              <a:rPr lang="en-US" sz="1400" b="0" i="0" u="sng" kern="1200" dirty="0">
                 <a:solidFill>
                   <a:schemeClr val="tx1"/>
                 </a:solidFill>
@@ -2225,7 +2210,7 @@
               <a:t>Rom 1:17</a:t>
             </a:r>
             <a:r>
-              <a:rPr lang="en-US" sz="1200" b="0" i="0" kern="1200" dirty="0">
+              <a:rPr lang="en-US" sz="1400" b="0" i="0" kern="1200" dirty="0">
                 <a:solidFill>
                   <a:schemeClr val="tx1"/>
                 </a:solidFill>
@@ -2237,7 +2222,7 @@
               <a:t> emphasizes "the just"; </a:t>
             </a:r>
             <a:r>
-              <a:rPr lang="en-US" sz="1200" b="0" i="0" u="sng" kern="1200" dirty="0">
+              <a:rPr lang="en-US" sz="1400" b="0" i="0" u="sng" kern="1200" dirty="0">
                 <a:solidFill>
                   <a:schemeClr val="tx1"/>
                 </a:solidFill>
@@ -2250,7 +2235,7 @@
               <a:t>Gal 3:11</a:t>
             </a:r>
             <a:r>
-              <a:rPr lang="en-US" sz="1200" b="0" i="0" kern="1200" dirty="0">
+              <a:rPr lang="en-US" sz="1400" b="0" i="0" kern="1200" dirty="0">
                 <a:solidFill>
                   <a:schemeClr val="tx1"/>
                 </a:solidFill>
@@ -2262,7 +2247,7 @@
               <a:t> emphasizes "faith"; </a:t>
             </a:r>
             <a:r>
-              <a:rPr lang="en-US" sz="1200" b="0" i="0" u="sng" kern="1200" dirty="0">
+              <a:rPr lang="en-US" sz="1400" b="0" i="0" u="sng" kern="1200" dirty="0">
                 <a:solidFill>
                   <a:schemeClr val="tx1"/>
                 </a:solidFill>
@@ -2275,7 +2260,7 @@
               <a:t>Heb 10:38</a:t>
             </a:r>
             <a:r>
-              <a:rPr lang="en-US" sz="1200" b="0" i="0" kern="1200" dirty="0">
+              <a:rPr lang="en-US" sz="1400" b="0" i="0" kern="1200" dirty="0">
                 <a:solidFill>
                   <a:schemeClr val="tx1"/>
                 </a:solidFill>
@@ -2289,7 +2274,7 @@
           </a:p>
           <a:p>
             <a:r>
-              <a:rPr lang="en-US" sz="1200" kern="1200" dirty="0">
+              <a:rPr lang="en-US" sz="1400" kern="1200" dirty="0">
                 <a:solidFill>
                   <a:schemeClr val="tx1"/>
                 </a:solidFill>
@@ -2303,7 +2288,7 @@
           </a:p>
           <a:p>
             <a:r>
-              <a:rPr lang="en-US" sz="1200" b="1" kern="1200" dirty="0">
+              <a:rPr lang="en-US" sz="1400" b="1" kern="1200" dirty="0">
                 <a:solidFill>
                   <a:schemeClr val="tx1"/>
                 </a:solidFill>
@@ -2314,7 +2299,7 @@
               </a:rPr>
               <a:t>Reconsidering Habakkuk 2:4</a:t>
             </a:r>
-            <a:endParaRPr lang="en-US" sz="1200" kern="1200" dirty="0">
+            <a:endParaRPr lang="en-US" sz="1400" kern="1200" dirty="0">
               <a:solidFill>
                 <a:schemeClr val="tx1"/>
               </a:solidFill>
@@ -2326,7 +2311,7 @@
           </a:p>
           <a:p>
             <a:r>
-              <a:rPr lang="en-US" sz="1200" kern="1200" dirty="0">
+              <a:rPr lang="en-US" sz="1400" kern="1200" dirty="0">
                 <a:solidFill>
                   <a:schemeClr val="tx1"/>
                 </a:solidFill>
@@ -2340,7 +2325,7 @@
           </a:p>
           <a:p>
             <a:r>
-              <a:rPr lang="en-US" sz="1200" kern="1200" dirty="0">
+              <a:rPr lang="en-US" sz="1400" kern="1200" dirty="0">
                 <a:solidFill>
                   <a:schemeClr val="tx1"/>
                 </a:solidFill>
@@ -2353,8 +2338,12 @@
             </a:r>
           </a:p>
           <a:p>
-            <a:r>
-              <a:rPr lang="en-US" sz="1200" kern="1200" dirty="0">
+            <a:pPr marL="285750" indent="-285750">
+              <a:buFont typeface="Arial" panose="020B0604020202020204" pitchFamily="34" charset="0"/>
+              <a:buChar char="•"/>
+            </a:pPr>
+            <a:r>
+              <a:rPr lang="en-US" sz="1400" kern="1200" dirty="0">
                 <a:solidFill>
                   <a:schemeClr val="tx1"/>
                 </a:solidFill>
@@ -2368,7 +2357,7 @@
           </a:p>
           <a:p>
             <a:r>
-              <a:rPr lang="en-US" sz="1200" kern="1200" dirty="0">
+              <a:rPr lang="en-US" sz="1400" kern="1200" dirty="0">
                 <a:solidFill>
                   <a:schemeClr val="tx1"/>
                 </a:solidFill>
@@ -2381,8 +2370,12 @@
             </a:r>
           </a:p>
           <a:p>
-            <a:r>
-              <a:rPr lang="en-US" sz="1200" kern="1200" dirty="0">
+            <a:pPr marL="285750" indent="-285750">
+              <a:buFont typeface="Arial" panose="020B0604020202020204" pitchFamily="34" charset="0"/>
+              <a:buChar char="•"/>
+            </a:pPr>
+            <a:r>
+              <a:rPr lang="en-US" sz="1400" kern="1200" dirty="0">
                 <a:solidFill>
                   <a:schemeClr val="tx1"/>
                 </a:solidFill>
@@ -2396,7 +2389,7 @@
           </a:p>
           <a:p>
             <a:r>
-              <a:rPr lang="en-US" sz="1200" kern="1200" dirty="0">
+              <a:rPr lang="en-US" sz="1400" kern="1200" dirty="0">
                 <a:solidFill>
                   <a:schemeClr val="tx1"/>
                 </a:solidFill>
@@ -2409,8 +2402,12 @@
             </a:r>
           </a:p>
           <a:p>
-            <a:r>
-              <a:rPr lang="en-US" sz="1200" kern="1200" dirty="0">
+            <a:pPr marL="285750" indent="-285750">
+              <a:buFont typeface="Arial" panose="020B0604020202020204" pitchFamily="34" charset="0"/>
+              <a:buChar char="•"/>
+            </a:pPr>
+            <a:r>
+              <a:rPr lang="en-US" sz="1400" kern="1200" dirty="0">
                 <a:solidFill>
                   <a:schemeClr val="tx1"/>
                 </a:solidFill>
@@ -2424,7 +2421,7 @@
           </a:p>
           <a:p>
             <a:r>
-              <a:rPr lang="en-US" sz="1200" kern="1200" dirty="0">
+              <a:rPr lang="en-US" sz="1400" kern="1200" dirty="0">
                 <a:solidFill>
                   <a:schemeClr val="tx1"/>
                 </a:solidFill>
@@ -2437,9 +2434,12 @@
             </a:r>
           </a:p>
           <a:p>
-            <a:pPr rtl="0" fontAlgn="ctr"/>
-            <a:r>
-              <a:rPr lang="en-US" sz="1200" kern="1200" dirty="0">
+            <a:pPr marL="285750" indent="-285750" rtl="0" fontAlgn="ctr">
+              <a:buFont typeface="Arial" panose="020B0604020202020204" pitchFamily="34" charset="0"/>
+              <a:buChar char="•"/>
+            </a:pPr>
+            <a:r>
+              <a:rPr lang="en-US" sz="1400" kern="1200" dirty="0">
                 <a:solidFill>
                   <a:schemeClr val="tx1"/>
                 </a:solidFill>
@@ -2452,9 +2452,12 @@
             </a:r>
           </a:p>
           <a:p>
-            <a:pPr rtl="0" fontAlgn="ctr"/>
-            <a:r>
-              <a:rPr lang="en-US" sz="1200" kern="1200" dirty="0">
+            <a:pPr marL="285750" indent="-285750" rtl="0" fontAlgn="ctr">
+              <a:buFont typeface="Arial" panose="020B0604020202020204" pitchFamily="34" charset="0"/>
+              <a:buChar char="•"/>
+            </a:pPr>
+            <a:r>
+              <a:rPr lang="en-US" sz="1400" kern="1200" dirty="0">
                 <a:solidFill>
                   <a:schemeClr val="tx1"/>
                 </a:solidFill>
@@ -2468,7 +2471,7 @@
           </a:p>
           <a:p>
             <a:r>
-              <a:rPr lang="en-US" sz="1200" kern="1200" dirty="0">
+              <a:rPr lang="en-US" sz="1400" b="1" kern="1200" dirty="0">
                 <a:solidFill>
                   <a:schemeClr val="tx1"/>
                 </a:solidFill>
@@ -2482,7 +2485,7 @@
           </a:p>
           <a:p>
             <a:r>
-              <a:rPr lang="en-US" sz="1200" kern="1200" dirty="0">
+              <a:rPr lang="en-US" sz="1400" b="1" kern="1200" dirty="0">
                 <a:solidFill>
                   <a:schemeClr val="tx1"/>
                 </a:solidFill>
@@ -2496,7 +2499,7 @@
           </a:p>
           <a:p>
             <a:r>
-              <a:rPr lang="en-US" sz="1200" kern="1200" dirty="0">
+              <a:rPr lang="en-US" sz="1400" kern="1200" dirty="0">
                 <a:solidFill>
                   <a:schemeClr val="tx1"/>
                 </a:solidFill>
@@ -2510,7 +2513,7 @@
           </a:p>
           <a:p>
             <a:r>
-              <a:rPr lang="en-US" sz="1200" kern="1200" dirty="0">
+              <a:rPr lang="en-US" sz="1400" kern="1200" dirty="0">
                 <a:solidFill>
                   <a:schemeClr val="tx1"/>
                 </a:solidFill>
@@ -2523,11 +2526,11 @@
             </a:r>
           </a:p>
           <a:p>
-            <a:endParaRPr lang="en-US" dirty="0"/>
-          </a:p>
-          <a:p>
-            <a:r>
-              <a:rPr lang="en-US" sz="1200" b="1" kern="1200" dirty="0">
+            <a:endParaRPr lang="en-US" sz="1400" dirty="0"/>
+          </a:p>
+          <a:p>
+            <a:r>
+              <a:rPr lang="en-US" sz="1400" b="1" kern="1200" dirty="0">
                 <a:solidFill>
                   <a:schemeClr val="tx1"/>
                 </a:solidFill>
@@ -2538,7 +2541,7 @@
               </a:rPr>
               <a:t>3. Faithful obedience</a:t>
             </a:r>
-            <a:endParaRPr lang="en-US" sz="1200" kern="1200" dirty="0">
+            <a:endParaRPr lang="en-US" sz="1400" kern="1200" dirty="0">
               <a:solidFill>
                 <a:schemeClr val="tx1"/>
               </a:solidFill>
@@ -2550,7 +2553,7 @@
           </a:p>
           <a:p>
             <a:r>
-              <a:rPr lang="en-US" sz="1200" kern="1200" dirty="0">
+              <a:rPr lang="en-US" sz="1400" kern="1200" dirty="0">
                 <a:solidFill>
                   <a:schemeClr val="tx1"/>
                 </a:solidFill>
@@ -2564,7 +2567,7 @@
           </a:p>
           <a:p>
             <a:r>
-              <a:rPr lang="en-US" sz="1200" kern="1200" dirty="0">
+              <a:rPr lang="en-US" sz="1400" kern="1200" dirty="0">
                 <a:solidFill>
                   <a:schemeClr val="tx1"/>
                 </a:solidFill>
@@ -2576,7 +2579,7 @@
               <a:t>The Hebrew </a:t>
             </a:r>
             <a:r>
-              <a:rPr lang="en-US" sz="1200" i="1" kern="1200" dirty="0" err="1">
+              <a:rPr lang="en-US" sz="1400" i="1" kern="1200" dirty="0" err="1">
                 <a:solidFill>
                   <a:schemeClr val="tx1"/>
                 </a:solidFill>
@@ -2588,7 +2591,7 @@
               <a:t>emunah</a:t>
             </a:r>
             <a:r>
-              <a:rPr lang="en-US" sz="1200" kern="1200" dirty="0">
+              <a:rPr lang="en-US" sz="1400" kern="1200" dirty="0">
                 <a:solidFill>
                   <a:schemeClr val="tx1"/>
                 </a:solidFill>
@@ -2601,9 +2604,12 @@
             </a:r>
           </a:p>
           <a:p>
-            <a:pPr rtl="0" fontAlgn="ctr"/>
-            <a:r>
-              <a:rPr lang="en-US" sz="1200" kern="1200" dirty="0">
+            <a:pPr marL="285750" indent="-285750" rtl="0" fontAlgn="ctr">
+              <a:buFont typeface="Arial" panose="020B0604020202020204" pitchFamily="34" charset="0"/>
+              <a:buChar char="•"/>
+            </a:pPr>
+            <a:r>
+              <a:rPr lang="en-US" sz="1400" kern="1200" dirty="0">
                 <a:solidFill>
                   <a:schemeClr val="tx1"/>
                 </a:solidFill>
@@ -2616,9 +2622,12 @@
             </a:r>
           </a:p>
           <a:p>
-            <a:pPr rtl="0" fontAlgn="ctr"/>
-            <a:r>
-              <a:rPr lang="en-US" sz="1200" kern="1200" dirty="0">
+            <a:pPr marL="285750" indent="-285750" rtl="0" fontAlgn="ctr">
+              <a:buFont typeface="Arial" panose="020B0604020202020204" pitchFamily="34" charset="0"/>
+              <a:buChar char="•"/>
+            </a:pPr>
+            <a:r>
+              <a:rPr lang="en-US" sz="1400" kern="1200" dirty="0">
                 <a:solidFill>
                   <a:schemeClr val="tx1"/>
                 </a:solidFill>
@@ -2631,9 +2640,12 @@
             </a:r>
           </a:p>
           <a:p>
-            <a:pPr rtl="0" fontAlgn="ctr"/>
-            <a:r>
-              <a:rPr lang="en-US" sz="1200" kern="1200" dirty="0">
+            <a:pPr marL="285750" indent="-285750" rtl="0" fontAlgn="ctr">
+              <a:buFont typeface="Arial" panose="020B0604020202020204" pitchFamily="34" charset="0"/>
+              <a:buChar char="•"/>
+            </a:pPr>
+            <a:r>
+              <a:rPr lang="en-US" sz="1400" kern="1200" dirty="0">
                 <a:solidFill>
                   <a:schemeClr val="tx1"/>
                 </a:solidFill>
@@ -2646,8 +2658,19 @@
             </a:r>
           </a:p>
           <a:p>
-            <a:r>
-              <a:rPr lang="en-US" sz="1200" kern="1200" dirty="0">
+            <a:endParaRPr lang="en-US" sz="1400" kern="1200" dirty="0">
+              <a:solidFill>
+                <a:schemeClr val="tx1"/>
+              </a:solidFill>
+              <a:effectLst/>
+              <a:latin typeface="+mn-lt"/>
+              <a:ea typeface="ＭＳ Ｐゴシック" pitchFamily="-106" charset="-128"/>
+              <a:cs typeface="ＭＳ Ｐゴシック" pitchFamily="-106" charset="-128"/>
+            </a:endParaRPr>
+          </a:p>
+          <a:p>
+            <a:r>
+              <a:rPr lang="en-US" sz="1400" b="1" kern="1200" dirty="0">
                 <a:solidFill>
                   <a:schemeClr val="tx1"/>
                 </a:solidFill>
@@ -2661,7 +2684,7 @@
           </a:p>
           <a:p>
             <a:r>
-              <a:rPr lang="en-US" sz="1200" kern="1200" dirty="0">
+              <a:rPr lang="en-US" sz="1400" b="1" kern="1200" dirty="0">
                 <a:solidFill>
                   <a:schemeClr val="tx1"/>
                 </a:solidFill>
@@ -2674,8 +2697,19 @@
             </a:r>
           </a:p>
           <a:p>
-            <a:r>
-              <a:rPr lang="en-US" sz="1200" kern="1200" dirty="0">
+            <a:endParaRPr lang="en-US" sz="1400" kern="1200" dirty="0">
+              <a:solidFill>
+                <a:schemeClr val="tx1"/>
+              </a:solidFill>
+              <a:effectLst/>
+              <a:latin typeface="+mn-lt"/>
+              <a:ea typeface="ＭＳ Ｐゴシック" pitchFamily="-106" charset="-128"/>
+              <a:cs typeface="ＭＳ Ｐゴシック" pitchFamily="-106" charset="-128"/>
+            </a:endParaRPr>
+          </a:p>
+          <a:p>
+            <a:r>
+              <a:rPr lang="en-US" sz="1400" kern="1200" dirty="0">
                 <a:solidFill>
                   <a:schemeClr val="tx1"/>
                 </a:solidFill>
@@ -2688,8 +2722,12 @@
             </a:r>
           </a:p>
           <a:p>
-            <a:r>
-              <a:rPr lang="en-US" sz="1200" kern="1200" dirty="0">
+            <a:pPr marL="285750" indent="-285750">
+              <a:buFont typeface="Arial" panose="020B0604020202020204" pitchFamily="34" charset="0"/>
+              <a:buChar char="•"/>
+            </a:pPr>
+            <a:r>
+              <a:rPr lang="en-US" sz="1400" kern="1200" dirty="0">
                 <a:solidFill>
                   <a:schemeClr val="tx1"/>
                 </a:solidFill>
@@ -2702,8 +2740,12 @@
             </a:r>
           </a:p>
           <a:p>
-            <a:r>
-              <a:rPr lang="en-US" sz="1200" kern="1200" dirty="0">
+            <a:pPr marL="285750" indent="-285750">
+              <a:buFont typeface="Arial" panose="020B0604020202020204" pitchFamily="34" charset="0"/>
+              <a:buChar char="•"/>
+            </a:pPr>
+            <a:r>
+              <a:rPr lang="en-US" sz="1400" kern="1200" dirty="0">
                 <a:solidFill>
                   <a:schemeClr val="tx1"/>
                 </a:solidFill>
@@ -2716,8 +2758,12 @@
             </a:r>
           </a:p>
           <a:p>
-            <a:r>
-              <a:rPr lang="en-US" sz="1200" kern="1200" dirty="0">
+            <a:pPr marL="285750" indent="-285750">
+              <a:buFont typeface="Arial" panose="020B0604020202020204" pitchFamily="34" charset="0"/>
+              <a:buChar char="•"/>
+            </a:pPr>
+            <a:r>
+              <a:rPr lang="en-US" sz="1400" kern="1200" dirty="0">
                 <a:solidFill>
                   <a:schemeClr val="tx1"/>
                 </a:solidFill>
@@ -2842,511 +2888,9 @@
         <p:spPr/>
         <p:txBody>
           <a:bodyPr>
-            <a:normAutofit fontScale="55000" lnSpcReduction="20000"/>
+            <a:normAutofit/>
           </a:bodyPr>
           <a:lstStyle/>
-          <a:p>
-            <a:r>
-              <a:rPr lang="en-US" sz="1200" b="1" kern="1200" dirty="0">
-                <a:solidFill>
-                  <a:schemeClr val="tx1"/>
-                </a:solidFill>
-                <a:effectLst/>
-                <a:latin typeface="+mn-lt"/>
-                <a:ea typeface="ＭＳ Ｐゴシック" pitchFamily="-106" charset="-128"/>
-                <a:cs typeface="ＭＳ Ｐゴシック" pitchFamily="-106" charset="-128"/>
-              </a:rPr>
-              <a:t>Reconsidering Romans 12-16</a:t>
-            </a:r>
-            <a:endParaRPr lang="en-US" sz="1200" kern="1200" dirty="0">
-              <a:solidFill>
-                <a:schemeClr val="tx1"/>
-              </a:solidFill>
-              <a:effectLst/>
-              <a:latin typeface="+mn-lt"/>
-              <a:ea typeface="ＭＳ Ｐゴシック" pitchFamily="-106" charset="-128"/>
-              <a:cs typeface="ＭＳ Ｐゴシック" pitchFamily="-106" charset="-128"/>
-            </a:endParaRPr>
-          </a:p>
-          <a:p>
-            <a:r>
-              <a:rPr lang="en-US" sz="1200" kern="1200" dirty="0">
-                <a:solidFill>
-                  <a:schemeClr val="tx1"/>
-                </a:solidFill>
-                <a:effectLst/>
-                <a:latin typeface="+mn-lt"/>
-                <a:ea typeface="ＭＳ Ｐゴシック" pitchFamily="-106" charset="-128"/>
-                <a:cs typeface="ＭＳ Ｐゴシック" pitchFamily="-106" charset="-128"/>
-              </a:rPr>
-              <a:t>Instead of asking:</a:t>
-            </a:r>
-          </a:p>
-          <a:p>
-            <a:r>
-              <a:rPr lang="en-US" sz="1200" kern="1200" dirty="0">
-                <a:solidFill>
-                  <a:schemeClr val="tx1"/>
-                </a:solidFill>
-                <a:effectLst/>
-                <a:latin typeface="+mn-lt"/>
-                <a:ea typeface="ＭＳ Ｐゴシック" pitchFamily="-106" charset="-128"/>
-                <a:cs typeface="ＭＳ Ｐゴシック" pitchFamily="-106" charset="-128"/>
-              </a:rPr>
-              <a:t>What does faith produce?</a:t>
-            </a:r>
-          </a:p>
-          <a:p>
-            <a:r>
-              <a:rPr lang="en-US" sz="1200" kern="1200" dirty="0">
-                <a:solidFill>
-                  <a:schemeClr val="tx1"/>
-                </a:solidFill>
-                <a:effectLst/>
-                <a:latin typeface="+mn-lt"/>
-                <a:ea typeface="ＭＳ Ｐゴシック" pitchFamily="-106" charset="-128"/>
-                <a:cs typeface="ＭＳ Ｐゴシック" pitchFamily="-106" charset="-128"/>
-              </a:rPr>
-              <a:t>Paul may be asking:</a:t>
-            </a:r>
-          </a:p>
-          <a:p>
-            <a:r>
-              <a:rPr lang="en-US" sz="1200" kern="1200" dirty="0">
-                <a:solidFill>
-                  <a:schemeClr val="tx1"/>
-                </a:solidFill>
-                <a:effectLst/>
-                <a:latin typeface="+mn-lt"/>
-                <a:ea typeface="ＭＳ Ｐゴシック" pitchFamily="-106" charset="-128"/>
-                <a:cs typeface="ＭＳ Ｐゴシック" pitchFamily="-106" charset="-128"/>
-              </a:rPr>
-              <a:t>What does faith look like when lived?</a:t>
-            </a:r>
-          </a:p>
-          <a:p>
-            <a:r>
-              <a:rPr lang="en-US" sz="1200" kern="1200" dirty="0">
-                <a:solidFill>
-                  <a:schemeClr val="tx1"/>
-                </a:solidFill>
-                <a:effectLst/>
-                <a:latin typeface="+mn-lt"/>
-                <a:ea typeface="ＭＳ Ｐゴシック" pitchFamily="-106" charset="-128"/>
-                <a:cs typeface="ＭＳ Ｐゴシック" pitchFamily="-106" charset="-128"/>
-              </a:rPr>
-              <a:t>Romans 12-16 is not merely a list of consequences that happen after faith.</a:t>
-            </a:r>
-          </a:p>
-          <a:p>
-            <a:r>
-              <a:rPr lang="en-US" sz="1200" kern="1200" dirty="0">
-                <a:solidFill>
-                  <a:schemeClr val="tx1"/>
-                </a:solidFill>
-                <a:effectLst/>
-                <a:latin typeface="+mn-lt"/>
-                <a:ea typeface="ＭＳ Ｐゴシック" pitchFamily="-106" charset="-128"/>
-                <a:cs typeface="ＭＳ Ｐゴシック" pitchFamily="-106" charset="-128"/>
-              </a:rPr>
-              <a:t>It is a description of faith itself in action.</a:t>
-            </a:r>
-          </a:p>
-          <a:p>
-            <a:r>
-              <a:rPr lang="en-US" sz="1200" b="1" kern="1200" dirty="0">
-                <a:solidFill>
-                  <a:schemeClr val="tx1"/>
-                </a:solidFill>
-                <a:effectLst/>
-                <a:latin typeface="+mn-lt"/>
-                <a:ea typeface="ＭＳ Ｐゴシック" pitchFamily="-106" charset="-128"/>
-                <a:cs typeface="ＭＳ Ｐゴシック" pitchFamily="-106" charset="-128"/>
-              </a:rPr>
-              <a:t>Romans 12</a:t>
-            </a:r>
-            <a:endParaRPr lang="en-US" sz="1200" kern="1200" dirty="0">
-              <a:solidFill>
-                <a:schemeClr val="tx1"/>
-              </a:solidFill>
-              <a:effectLst/>
-              <a:latin typeface="+mn-lt"/>
-              <a:ea typeface="ＭＳ Ｐゴシック" pitchFamily="-106" charset="-128"/>
-              <a:cs typeface="ＭＳ Ｐゴシック" pitchFamily="-106" charset="-128"/>
-            </a:endParaRPr>
-          </a:p>
-          <a:p>
-            <a:r>
-              <a:rPr lang="en-US" sz="1200" kern="1200" dirty="0">
-                <a:solidFill>
-                  <a:schemeClr val="tx1"/>
-                </a:solidFill>
-                <a:effectLst/>
-                <a:latin typeface="+mn-lt"/>
-                <a:ea typeface="ＭＳ Ｐゴシック" pitchFamily="-106" charset="-128"/>
-                <a:cs typeface="ＭＳ Ｐゴシック" pitchFamily="-106" charset="-128"/>
-              </a:rPr>
-              <a:t>Faith presents itself as a living sacrifice.</a:t>
-            </a:r>
-          </a:p>
-          <a:p>
-            <a:r>
-              <a:rPr lang="en-US" sz="1200" kern="1200" dirty="0">
-                <a:solidFill>
-                  <a:schemeClr val="tx1"/>
-                </a:solidFill>
-                <a:effectLst/>
-                <a:latin typeface="+mn-lt"/>
-                <a:ea typeface="ＭＳ Ｐゴシック" pitchFamily="-106" charset="-128"/>
-                <a:cs typeface="ＭＳ Ｐゴシック" pitchFamily="-106" charset="-128"/>
-              </a:rPr>
-              <a:t>Faith serves.</a:t>
-            </a:r>
-          </a:p>
-          <a:p>
-            <a:r>
-              <a:rPr lang="en-US" sz="1200" kern="1200" dirty="0">
-                <a:solidFill>
-                  <a:schemeClr val="tx1"/>
-                </a:solidFill>
-                <a:effectLst/>
-                <a:latin typeface="+mn-lt"/>
-                <a:ea typeface="ＭＳ Ｐゴシック" pitchFamily="-106" charset="-128"/>
-                <a:cs typeface="ＭＳ Ｐゴシック" pitchFamily="-106" charset="-128"/>
-              </a:rPr>
-              <a:t>Faith loves.</a:t>
-            </a:r>
-          </a:p>
-          <a:p>
-            <a:r>
-              <a:rPr lang="en-US" sz="1200" kern="1200" dirty="0">
-                <a:solidFill>
-                  <a:schemeClr val="tx1"/>
-                </a:solidFill>
-                <a:effectLst/>
-                <a:latin typeface="+mn-lt"/>
-                <a:ea typeface="ＭＳ Ｐゴシック" pitchFamily="-106" charset="-128"/>
-                <a:cs typeface="ＭＳ Ｐゴシック" pitchFamily="-106" charset="-128"/>
-              </a:rPr>
-              <a:t>Faith blesses enemies.</a:t>
-            </a:r>
-          </a:p>
-          <a:p>
-            <a:r>
-              <a:rPr lang="en-US" sz="1200" kern="1200" dirty="0">
-                <a:solidFill>
-                  <a:schemeClr val="tx1"/>
-                </a:solidFill>
-                <a:effectLst/>
-                <a:latin typeface="+mn-lt"/>
-                <a:ea typeface="ＭＳ Ｐゴシック" pitchFamily="-106" charset="-128"/>
-                <a:cs typeface="ＭＳ Ｐゴシック" pitchFamily="-106" charset="-128"/>
-              </a:rPr>
-              <a:t>These are not additions to faith.</a:t>
-            </a:r>
-          </a:p>
-          <a:p>
-            <a:r>
-              <a:rPr lang="en-US" sz="1200" kern="1200" dirty="0">
-                <a:solidFill>
-                  <a:schemeClr val="tx1"/>
-                </a:solidFill>
-                <a:effectLst/>
-                <a:latin typeface="+mn-lt"/>
-                <a:ea typeface="ＭＳ Ｐゴシック" pitchFamily="-106" charset="-128"/>
-                <a:cs typeface="ＭＳ Ｐゴシック" pitchFamily="-106" charset="-128"/>
-              </a:rPr>
-              <a:t>They are faith embodied.</a:t>
-            </a:r>
-          </a:p>
-          <a:p>
-            <a:r>
-              <a:rPr lang="en-US" sz="1200" b="1" kern="1200" dirty="0">
-                <a:solidFill>
-                  <a:schemeClr val="tx1"/>
-                </a:solidFill>
-                <a:effectLst/>
-                <a:latin typeface="+mn-lt"/>
-                <a:ea typeface="ＭＳ Ｐゴシック" pitchFamily="-106" charset="-128"/>
-                <a:cs typeface="ＭＳ Ｐゴシック" pitchFamily="-106" charset="-128"/>
-              </a:rPr>
-              <a:t>Romans 13</a:t>
-            </a:r>
-            <a:endParaRPr lang="en-US" sz="1200" kern="1200" dirty="0">
-              <a:solidFill>
-                <a:schemeClr val="tx1"/>
-              </a:solidFill>
-              <a:effectLst/>
-              <a:latin typeface="+mn-lt"/>
-              <a:ea typeface="ＭＳ Ｐゴシック" pitchFamily="-106" charset="-128"/>
-              <a:cs typeface="ＭＳ Ｐゴシック" pitchFamily="-106" charset="-128"/>
-            </a:endParaRPr>
-          </a:p>
-          <a:p>
-            <a:r>
-              <a:rPr lang="en-US" sz="1200" kern="1200" dirty="0">
-                <a:solidFill>
-                  <a:schemeClr val="tx1"/>
-                </a:solidFill>
-                <a:effectLst/>
-                <a:latin typeface="+mn-lt"/>
-                <a:ea typeface="ＭＳ Ｐゴシック" pitchFamily="-106" charset="-128"/>
-                <a:cs typeface="ＭＳ Ｐゴシック" pitchFamily="-106" charset="-128"/>
-              </a:rPr>
-              <a:t>Faith submits to God’s ordained authority.</a:t>
-            </a:r>
-          </a:p>
-          <a:p>
-            <a:r>
-              <a:rPr lang="en-US" sz="1200" kern="1200" dirty="0">
-                <a:solidFill>
-                  <a:schemeClr val="tx1"/>
-                </a:solidFill>
-                <a:effectLst/>
-                <a:latin typeface="+mn-lt"/>
-                <a:ea typeface="ＭＳ Ｐゴシック" pitchFamily="-106" charset="-128"/>
-                <a:cs typeface="ＭＳ Ｐゴシック" pitchFamily="-106" charset="-128"/>
-              </a:rPr>
-              <a:t>Faith pays its obligations.</a:t>
-            </a:r>
-          </a:p>
-          <a:p>
-            <a:r>
-              <a:rPr lang="en-US" sz="1200" kern="1200" dirty="0">
-                <a:solidFill>
-                  <a:schemeClr val="tx1"/>
-                </a:solidFill>
-                <a:effectLst/>
-                <a:latin typeface="+mn-lt"/>
-                <a:ea typeface="ＭＳ Ｐゴシック" pitchFamily="-106" charset="-128"/>
-                <a:cs typeface="ＭＳ Ｐゴシック" pitchFamily="-106" charset="-128"/>
-              </a:rPr>
-              <a:t>Faith loves its neighbor.</a:t>
-            </a:r>
-          </a:p>
-          <a:p>
-            <a:r>
-              <a:rPr lang="en-US" sz="1200" kern="1200" dirty="0">
-                <a:solidFill>
-                  <a:schemeClr val="tx1"/>
-                </a:solidFill>
-                <a:effectLst/>
-                <a:latin typeface="+mn-lt"/>
-                <a:ea typeface="ＭＳ Ｐゴシック" pitchFamily="-106" charset="-128"/>
-                <a:cs typeface="ＭＳ Ｐゴシック" pitchFamily="-106" charset="-128"/>
-              </a:rPr>
-              <a:t>Again, this is not faith plus obedience.</a:t>
-            </a:r>
-          </a:p>
-          <a:p>
-            <a:r>
-              <a:rPr lang="en-US" sz="1200" kern="1200" dirty="0">
-                <a:solidFill>
-                  <a:schemeClr val="tx1"/>
-                </a:solidFill>
-                <a:effectLst/>
-                <a:latin typeface="+mn-lt"/>
-                <a:ea typeface="ＭＳ Ｐゴシック" pitchFamily="-106" charset="-128"/>
-                <a:cs typeface="ＭＳ Ｐゴシック" pitchFamily="-106" charset="-128"/>
-              </a:rPr>
-              <a:t>This is faith expressing its true nature.</a:t>
-            </a:r>
-          </a:p>
-          <a:p>
-            <a:r>
-              <a:rPr lang="en-US" sz="1200" b="1" kern="1200" dirty="0">
-                <a:solidFill>
-                  <a:schemeClr val="tx1"/>
-                </a:solidFill>
-                <a:effectLst/>
-                <a:latin typeface="+mn-lt"/>
-                <a:ea typeface="ＭＳ Ｐゴシック" pitchFamily="-106" charset="-128"/>
-                <a:cs typeface="ＭＳ Ｐゴシック" pitchFamily="-106" charset="-128"/>
-              </a:rPr>
-              <a:t>Romans 14</a:t>
-            </a:r>
-            <a:endParaRPr lang="en-US" sz="1200" kern="1200" dirty="0">
-              <a:solidFill>
-                <a:schemeClr val="tx1"/>
-              </a:solidFill>
-              <a:effectLst/>
-              <a:latin typeface="+mn-lt"/>
-              <a:ea typeface="ＭＳ Ｐゴシック" pitchFamily="-106" charset="-128"/>
-              <a:cs typeface="ＭＳ Ｐゴシック" pitchFamily="-106" charset="-128"/>
-            </a:endParaRPr>
-          </a:p>
-          <a:p>
-            <a:r>
-              <a:rPr lang="en-US" sz="1200" kern="1200" dirty="0">
-                <a:solidFill>
-                  <a:schemeClr val="tx1"/>
-                </a:solidFill>
-                <a:effectLst/>
-                <a:latin typeface="+mn-lt"/>
-                <a:ea typeface="ＭＳ Ｐゴシック" pitchFamily="-106" charset="-128"/>
-                <a:cs typeface="ＭＳ Ｐゴシック" pitchFamily="-106" charset="-128"/>
-              </a:rPr>
-              <a:t>Faith respects conscience.</a:t>
-            </a:r>
-          </a:p>
-          <a:p>
-            <a:r>
-              <a:rPr lang="en-US" sz="1200" kern="1200" dirty="0">
-                <a:solidFill>
-                  <a:schemeClr val="tx1"/>
-                </a:solidFill>
-                <a:effectLst/>
-                <a:latin typeface="+mn-lt"/>
-                <a:ea typeface="ＭＳ Ｐゴシック" pitchFamily="-106" charset="-128"/>
-                <a:cs typeface="ＭＳ Ｐゴシック" pitchFamily="-106" charset="-128"/>
-              </a:rPr>
-              <a:t>Faith refuses to judge fellow servants of God.</a:t>
-            </a:r>
-          </a:p>
-          <a:p>
-            <a:r>
-              <a:rPr lang="en-US" sz="1200" kern="1200" dirty="0">
-                <a:solidFill>
-                  <a:schemeClr val="tx1"/>
-                </a:solidFill>
-                <a:effectLst/>
-                <a:latin typeface="+mn-lt"/>
-                <a:ea typeface="ＭＳ Ｐゴシック" pitchFamily="-106" charset="-128"/>
-                <a:cs typeface="ＭＳ Ｐゴシック" pitchFamily="-106" charset="-128"/>
-              </a:rPr>
-              <a:t>Faith trusts God enough to leave judgment in His hands.</a:t>
-            </a:r>
-          </a:p>
-          <a:p>
-            <a:r>
-              <a:rPr lang="en-US" sz="1200" b="1" kern="1200" dirty="0">
-                <a:solidFill>
-                  <a:schemeClr val="tx1"/>
-                </a:solidFill>
-                <a:effectLst/>
-                <a:latin typeface="+mn-lt"/>
-                <a:ea typeface="ＭＳ Ｐゴシック" pitchFamily="-106" charset="-128"/>
-                <a:cs typeface="ＭＳ Ｐゴシック" pitchFamily="-106" charset="-128"/>
-              </a:rPr>
-              <a:t>Romans 15</a:t>
-            </a:r>
-            <a:endParaRPr lang="en-US" sz="1200" kern="1200" dirty="0">
-              <a:solidFill>
-                <a:schemeClr val="tx1"/>
-              </a:solidFill>
-              <a:effectLst/>
-              <a:latin typeface="+mn-lt"/>
-              <a:ea typeface="ＭＳ Ｐゴシック" pitchFamily="-106" charset="-128"/>
-              <a:cs typeface="ＭＳ Ｐゴシック" pitchFamily="-106" charset="-128"/>
-            </a:endParaRPr>
-          </a:p>
-          <a:p>
-            <a:r>
-              <a:rPr lang="en-US" sz="1200" kern="1200" dirty="0">
-                <a:solidFill>
-                  <a:schemeClr val="tx1"/>
-                </a:solidFill>
-                <a:effectLst/>
-                <a:latin typeface="+mn-lt"/>
-                <a:ea typeface="ＭＳ Ｐゴシック" pitchFamily="-106" charset="-128"/>
-                <a:cs typeface="ＭＳ Ｐゴシック" pitchFamily="-106" charset="-128"/>
-              </a:rPr>
-              <a:t>Faith bears the weak.</a:t>
-            </a:r>
-          </a:p>
-          <a:p>
-            <a:r>
-              <a:rPr lang="en-US" sz="1200" kern="1200" dirty="0">
-                <a:solidFill>
-                  <a:schemeClr val="tx1"/>
-                </a:solidFill>
-                <a:effectLst/>
-                <a:latin typeface="+mn-lt"/>
-                <a:ea typeface="ＭＳ Ｐゴシック" pitchFamily="-106" charset="-128"/>
-                <a:cs typeface="ＭＳ Ｐゴシック" pitchFamily="-106" charset="-128"/>
-              </a:rPr>
-              <a:t>Faith sacrifices personal rights.</a:t>
-            </a:r>
-          </a:p>
-          <a:p>
-            <a:r>
-              <a:rPr lang="en-US" sz="1200" kern="1200" dirty="0">
-                <a:solidFill>
-                  <a:schemeClr val="tx1"/>
-                </a:solidFill>
-                <a:effectLst/>
-                <a:latin typeface="+mn-lt"/>
-                <a:ea typeface="ＭＳ Ｐゴシック" pitchFamily="-106" charset="-128"/>
-                <a:cs typeface="ＭＳ Ｐゴシック" pitchFamily="-106" charset="-128"/>
-              </a:rPr>
-              <a:t>Faith seeks unity.</a:t>
-            </a:r>
-          </a:p>
-          <a:p>
-            <a:r>
-              <a:rPr lang="en-US" sz="1200" b="1" kern="1200" dirty="0">
-                <a:solidFill>
-                  <a:schemeClr val="tx1"/>
-                </a:solidFill>
-                <a:effectLst/>
-                <a:latin typeface="+mn-lt"/>
-                <a:ea typeface="ＭＳ Ｐゴシック" pitchFamily="-106" charset="-128"/>
-                <a:cs typeface="ＭＳ Ｐゴシック" pitchFamily="-106" charset="-128"/>
-              </a:rPr>
-              <a:t>Romans 16</a:t>
-            </a:r>
-            <a:endParaRPr lang="en-US" sz="1200" kern="1200" dirty="0">
-              <a:solidFill>
-                <a:schemeClr val="tx1"/>
-              </a:solidFill>
-              <a:effectLst/>
-              <a:latin typeface="+mn-lt"/>
-              <a:ea typeface="ＭＳ Ｐゴシック" pitchFamily="-106" charset="-128"/>
-              <a:cs typeface="ＭＳ Ｐゴシック" pitchFamily="-106" charset="-128"/>
-            </a:endParaRPr>
-          </a:p>
-          <a:p>
-            <a:r>
-              <a:rPr lang="en-US" sz="1200" kern="1200" dirty="0">
-                <a:solidFill>
-                  <a:schemeClr val="tx1"/>
-                </a:solidFill>
-                <a:effectLst/>
-                <a:latin typeface="+mn-lt"/>
-                <a:ea typeface="ＭＳ Ｐゴシック" pitchFamily="-106" charset="-128"/>
-                <a:cs typeface="ＭＳ Ｐゴシック" pitchFamily="-106" charset="-128"/>
-              </a:rPr>
-              <a:t>Faith remains loyal to apostolic truth.</a:t>
-            </a:r>
-          </a:p>
-          <a:p>
-            <a:r>
-              <a:rPr lang="en-US" sz="1200" kern="1200" dirty="0">
-                <a:solidFill>
-                  <a:schemeClr val="tx1"/>
-                </a:solidFill>
-                <a:effectLst/>
-                <a:latin typeface="+mn-lt"/>
-                <a:ea typeface="ＭＳ Ｐゴシック" pitchFamily="-106" charset="-128"/>
-                <a:cs typeface="ＭＳ Ｐゴシック" pitchFamily="-106" charset="-128"/>
-              </a:rPr>
-              <a:t>Faith recognizes faithful laborers.</a:t>
-            </a:r>
-          </a:p>
-          <a:p>
-            <a:r>
-              <a:rPr lang="en-US" sz="1200" kern="1200" dirty="0">
-                <a:solidFill>
-                  <a:schemeClr val="tx1"/>
-                </a:solidFill>
-                <a:effectLst/>
-                <a:latin typeface="+mn-lt"/>
-                <a:ea typeface="ＭＳ Ｐゴシック" pitchFamily="-106" charset="-128"/>
-                <a:cs typeface="ＭＳ Ｐゴシック" pitchFamily="-106" charset="-128"/>
-              </a:rPr>
-              <a:t>Faith rejects false teaching.</a:t>
-            </a:r>
-          </a:p>
           <a:p>
             <a:endParaRPr lang="en-US" dirty="0"/>
           </a:p>
@@ -3401,6 +2945,122 @@
 </file>
 
 <file path=ppt/notesSlides/notesSlide6.xml><?xml version="1.0" encoding="utf-8"?>
+<p:notes xmlns:a="http://schemas.openxmlformats.org/drawingml/2006/main" xmlns:r="http://schemas.openxmlformats.org/officeDocument/2006/relationships" xmlns:p="http://schemas.openxmlformats.org/presentationml/2006/main">
+  <p:cSld>
+    <p:spTree>
+      <p:nvGrpSpPr>
+        <p:cNvPr id="1" name="">
+          <a:extLst>
+            <a:ext uri="{FF2B5EF4-FFF2-40B4-BE49-F238E27FC236}">
+              <a16:creationId xmlns:a16="http://schemas.microsoft.com/office/drawing/2014/main" id="{5BFBB867-0FE7-3A44-82F8-6AF753D07185}"/>
+            </a:ext>
+          </a:extLst>
+        </p:cNvPr>
+        <p:cNvGrpSpPr/>
+        <p:nvPr/>
+      </p:nvGrpSpPr>
+      <p:grpSpPr>
+        <a:xfrm>
+          <a:off x="0" y="0"/>
+          <a:ext cx="0" cy="0"/>
+          <a:chOff x="0" y="0"/>
+          <a:chExt cx="0" cy="0"/>
+        </a:xfrm>
+      </p:grpSpPr>
+      <p:sp>
+        <p:nvSpPr>
+          <p:cNvPr id="2" name="Slide Image Placeholder 1">
+            <a:extLst>
+              <a:ext uri="{FF2B5EF4-FFF2-40B4-BE49-F238E27FC236}">
+                <a16:creationId xmlns:a16="http://schemas.microsoft.com/office/drawing/2014/main" id="{03FA1B12-39CF-0BFF-791F-EF6BEA097184}"/>
+              </a:ext>
+            </a:extLst>
+          </p:cNvPr>
+          <p:cNvSpPr>
+            <a:spLocks noGrp="1" noRot="1" noChangeAspect="1"/>
+          </p:cNvSpPr>
+          <p:nvPr>
+            <p:ph type="sldImg"/>
+          </p:nvPr>
+        </p:nvSpPr>
+        <p:spPr/>
+      </p:sp>
+      <p:sp>
+        <p:nvSpPr>
+          <p:cNvPr id="3" name="Notes Placeholder 2">
+            <a:extLst>
+              <a:ext uri="{FF2B5EF4-FFF2-40B4-BE49-F238E27FC236}">
+                <a16:creationId xmlns:a16="http://schemas.microsoft.com/office/drawing/2014/main" id="{C0FC4D52-FAD7-9481-1253-3123E96781AA}"/>
+              </a:ext>
+            </a:extLst>
+          </p:cNvPr>
+          <p:cNvSpPr>
+            <a:spLocks noGrp="1"/>
+          </p:cNvSpPr>
+          <p:nvPr>
+            <p:ph type="body" idx="1"/>
+          </p:nvPr>
+        </p:nvSpPr>
+        <p:spPr/>
+        <p:txBody>
+          <a:bodyPr>
+            <a:normAutofit/>
+          </a:bodyPr>
+          <a:lstStyle/>
+          <a:p>
+            <a:endParaRPr lang="en-US" dirty="0"/>
+          </a:p>
+        </p:txBody>
+      </p:sp>
+      <p:sp>
+        <p:nvSpPr>
+          <p:cNvPr id="4" name="Slide Number Placeholder 3">
+            <a:extLst>
+              <a:ext uri="{FF2B5EF4-FFF2-40B4-BE49-F238E27FC236}">
+                <a16:creationId xmlns:a16="http://schemas.microsoft.com/office/drawing/2014/main" id="{06F0639D-CD15-C2B7-6607-88E4F32EAFBA}"/>
+              </a:ext>
+            </a:extLst>
+          </p:cNvPr>
+          <p:cNvSpPr>
+            <a:spLocks noGrp="1"/>
+          </p:cNvSpPr>
+          <p:nvPr>
+            <p:ph type="sldNum" sz="quarter" idx="10"/>
+          </p:nvPr>
+        </p:nvSpPr>
+        <p:spPr/>
+        <p:txBody>
+          <a:bodyPr/>
+          <a:lstStyle/>
+          <a:p>
+            <a:pPr>
+              <a:defRPr/>
+            </a:pPr>
+            <a:fld id="{07776858-791E-4C8D-8FA3-473B3AFECFAC}" type="slidenum">
+              <a:rPr lang="en-US" smtClean="0"/>
+              <a:pPr>
+                <a:defRPr/>
+              </a:pPr>
+              <a:t>6</a:t>
+            </a:fld>
+            <a:endParaRPr lang="en-US"/>
+          </a:p>
+        </p:txBody>
+      </p:sp>
+    </p:spTree>
+    <p:extLst>
+      <p:ext uri="{BB962C8B-B14F-4D97-AF65-F5344CB8AC3E}">
+        <p14:creationId xmlns:p14="http://schemas.microsoft.com/office/powerpoint/2010/main" val="2956988486"/>
+      </p:ext>
+    </p:extLst>
+  </p:cSld>
+  <p:clrMapOvr>
+    <a:masterClrMapping/>
+  </p:clrMapOvr>
+</p:notes>
+</file>
+
+<file path=ppt/notesSlides/notesSlide7.xml><?xml version="1.0" encoding="utf-8"?>
 <p:notes xmlns:a="http://schemas.openxmlformats.org/drawingml/2006/main" xmlns:r="http://schemas.openxmlformats.org/officeDocument/2006/relationships" xmlns:p="http://schemas.openxmlformats.org/presentationml/2006/main">
   <p:cSld>
     <p:spTree>
@@ -3460,12 +3120,12 @@
         <p:spPr/>
         <p:txBody>
           <a:bodyPr>
-            <a:normAutofit fontScale="92500" lnSpcReduction="10000"/>
+            <a:normAutofit fontScale="70000" lnSpcReduction="20000"/>
           </a:bodyPr>
           <a:lstStyle/>
           <a:p>
             <a:r>
-              <a:rPr lang="en-US" sz="1200" b="1" kern="1200" dirty="0">
+              <a:rPr lang="en-US" sz="1400" b="1" kern="1200" dirty="0">
                 <a:solidFill>
                   <a:schemeClr val="tx1"/>
                 </a:solidFill>
@@ -3476,7 +3136,7 @@
               </a:rPr>
               <a:t>Israel’s Failure Revisited</a:t>
             </a:r>
-            <a:endParaRPr lang="en-US" sz="1200" kern="1200" dirty="0">
+            <a:endParaRPr lang="en-US" sz="1400" kern="1200" dirty="0">
               <a:solidFill>
                 <a:schemeClr val="tx1"/>
               </a:solidFill>
@@ -3488,7 +3148,7 @@
           </a:p>
           <a:p>
             <a:r>
-              <a:rPr lang="en-US" sz="1200" kern="1200" dirty="0">
+              <a:rPr lang="en-US" sz="1400" kern="1200" dirty="0">
                 <a:solidFill>
                   <a:schemeClr val="tx1"/>
                 </a:solidFill>
@@ -3501,189 +3161,7 @@
             </a:r>
           </a:p>
           <a:p>
-            <a:r>
-              <a:rPr lang="en-US" sz="1200" kern="1200" dirty="0">
-                <a:solidFill>
-                  <a:schemeClr val="tx1"/>
-                </a:solidFill>
-                <a:effectLst/>
-                <a:latin typeface="+mn-lt"/>
-                <a:ea typeface="ＭＳ Ｐゴシック" pitchFamily="-106" charset="-128"/>
-                <a:cs typeface="ＭＳ Ｐゴシック" pitchFamily="-106" charset="-128"/>
-              </a:rPr>
-              <a:t>Many readers frame the issue as:</a:t>
-            </a:r>
-          </a:p>
-          <a:p>
-            <a:pPr rtl="0" fontAlgn="ctr"/>
-            <a:r>
-              <a:rPr lang="en-US" sz="1200" kern="1200" dirty="0">
-                <a:solidFill>
-                  <a:schemeClr val="tx1"/>
-                </a:solidFill>
-                <a:effectLst/>
-                <a:latin typeface="+mn-lt"/>
-                <a:ea typeface="ＭＳ Ｐゴシック" pitchFamily="-106" charset="-128"/>
-                <a:cs typeface="ＭＳ Ｐゴシック" pitchFamily="-106" charset="-128"/>
-              </a:rPr>
-              <a:t>Israel pursued works.</a:t>
-            </a:r>
-          </a:p>
-          <a:p>
-            <a:pPr rtl="0" fontAlgn="ctr"/>
-            <a:r>
-              <a:rPr lang="en-US" sz="1200" kern="1200" dirty="0">
-                <a:solidFill>
-                  <a:schemeClr val="tx1"/>
-                </a:solidFill>
-                <a:effectLst/>
-                <a:latin typeface="+mn-lt"/>
-                <a:ea typeface="ＭＳ Ｐゴシック" pitchFamily="-106" charset="-128"/>
-                <a:cs typeface="ＭＳ Ｐゴシック" pitchFamily="-106" charset="-128"/>
-              </a:rPr>
-              <a:t>Gentiles pursued faith.</a:t>
-            </a:r>
-          </a:p>
-          <a:p>
-            <a:r>
-              <a:rPr lang="en-US" sz="1200" kern="1200" dirty="0">
-                <a:solidFill>
-                  <a:schemeClr val="tx1"/>
-                </a:solidFill>
-                <a:effectLst/>
-                <a:latin typeface="+mn-lt"/>
-                <a:ea typeface="ＭＳ Ｐゴシック" pitchFamily="-106" charset="-128"/>
-                <a:cs typeface="ＭＳ Ｐゴシック" pitchFamily="-106" charset="-128"/>
-              </a:rPr>
-              <a:t>Paul’s point seems deeper.</a:t>
-            </a:r>
-          </a:p>
-          <a:p>
-            <a:r>
-              <a:rPr lang="en-US" sz="1200" kern="1200" dirty="0">
-                <a:solidFill>
-                  <a:schemeClr val="tx1"/>
-                </a:solidFill>
-                <a:effectLst/>
-                <a:latin typeface="+mn-lt"/>
-                <a:ea typeface="ＭＳ Ｐゴシック" pitchFamily="-106" charset="-128"/>
-                <a:cs typeface="ＭＳ Ｐゴシック" pitchFamily="-106" charset="-128"/>
-              </a:rPr>
-              <a:t>Israel often sought covenant blessing while resisting God’s word.</a:t>
-            </a:r>
-          </a:p>
-          <a:p>
-            <a:r>
-              <a:rPr lang="en-US" sz="1200" kern="1200" dirty="0">
-                <a:solidFill>
-                  <a:schemeClr val="tx1"/>
-                </a:solidFill>
-                <a:effectLst/>
-                <a:latin typeface="+mn-lt"/>
-                <a:ea typeface="ＭＳ Ｐゴシック" pitchFamily="-106" charset="-128"/>
-                <a:cs typeface="ＭＳ Ｐゴシック" pitchFamily="-106" charset="-128"/>
-              </a:rPr>
-              <a:t>Consider Romans 10:16:</a:t>
-            </a:r>
-          </a:p>
-          <a:p>
-            <a:r>
-              <a:rPr lang="en-US" sz="1200" kern="1200" dirty="0">
-                <a:solidFill>
-                  <a:schemeClr val="tx1"/>
-                </a:solidFill>
-                <a:effectLst/>
-                <a:latin typeface="+mn-lt"/>
-                <a:ea typeface="ＭＳ Ｐゴシック" pitchFamily="-106" charset="-128"/>
-                <a:cs typeface="ＭＳ Ｐゴシック" pitchFamily="-106" charset="-128"/>
-              </a:rPr>
-              <a:t>“But not all have obeyed the good news.”</a:t>
-            </a:r>
-          </a:p>
-          <a:p>
-            <a:r>
-              <a:rPr lang="en-US" sz="1200" kern="1200" dirty="0">
-                <a:solidFill>
-                  <a:schemeClr val="tx1"/>
-                </a:solidFill>
-                <a:effectLst/>
-                <a:latin typeface="+mn-lt"/>
-                <a:ea typeface="ＭＳ Ｐゴシック" pitchFamily="-106" charset="-128"/>
-                <a:cs typeface="ＭＳ Ｐゴシック" pitchFamily="-106" charset="-128"/>
-              </a:rPr>
-              <a:t>Again Paul equates believing and obeying.</a:t>
-            </a:r>
-          </a:p>
-          <a:p>
-            <a:r>
-              <a:rPr lang="en-US" sz="1200" kern="1200" dirty="0">
-                <a:solidFill>
-                  <a:schemeClr val="tx1"/>
-                </a:solidFill>
-                <a:effectLst/>
-                <a:latin typeface="+mn-lt"/>
-                <a:ea typeface="ＭＳ Ｐゴシック" pitchFamily="-106" charset="-128"/>
-                <a:cs typeface="ＭＳ Ｐゴシック" pitchFamily="-106" charset="-128"/>
-              </a:rPr>
-              <a:t>The fundamental issue was not merely a lack of intellectual faith.</a:t>
-            </a:r>
-          </a:p>
-          <a:p>
-            <a:r>
-              <a:rPr lang="en-US" sz="1200" kern="1200" dirty="0">
-                <a:solidFill>
-                  <a:schemeClr val="tx1"/>
-                </a:solidFill>
-                <a:effectLst/>
-                <a:latin typeface="+mn-lt"/>
-                <a:ea typeface="ＭＳ Ｐゴシック" pitchFamily="-106" charset="-128"/>
-                <a:cs typeface="ＭＳ Ｐゴシック" pitchFamily="-106" charset="-128"/>
-              </a:rPr>
-              <a:t>It was a refusal to submit to God’s righteousness.</a:t>
-            </a:r>
-          </a:p>
-          <a:p>
-            <a:r>
-              <a:rPr lang="en-US" sz="1200" kern="1200" dirty="0">
-                <a:solidFill>
-                  <a:schemeClr val="tx1"/>
-                </a:solidFill>
-                <a:effectLst/>
-                <a:latin typeface="+mn-lt"/>
-                <a:ea typeface="ＭＳ Ｐゴシック" pitchFamily="-106" charset="-128"/>
-                <a:cs typeface="ＭＳ Ｐゴシック" pitchFamily="-106" charset="-128"/>
-              </a:rPr>
-              <a:t>“For ignoring the righteousness that comes from God, and seeking instead to establish their own righteousness, they did not submit to God’s righteousness.” (Romans 10:3, NET)</a:t>
-            </a:r>
-          </a:p>
-          <a:p>
-            <a:r>
-              <a:rPr lang="en-US" sz="1200" kern="1200" dirty="0">
-                <a:solidFill>
-                  <a:schemeClr val="tx1"/>
-                </a:solidFill>
-                <a:effectLst/>
-                <a:latin typeface="+mn-lt"/>
-                <a:ea typeface="ＭＳ Ｐゴシック" pitchFamily="-106" charset="-128"/>
-                <a:cs typeface="ＭＳ Ｐゴシック" pitchFamily="-106" charset="-128"/>
-              </a:rPr>
-              <a:t>Notice the key word:</a:t>
-            </a:r>
-          </a:p>
-          <a:p>
-            <a:r>
-              <a:rPr lang="en-US" sz="1200" b="1" kern="1200" dirty="0">
-                <a:solidFill>
-                  <a:schemeClr val="tx1"/>
-                </a:solidFill>
-                <a:effectLst/>
-                <a:latin typeface="+mn-lt"/>
-                <a:ea typeface="ＭＳ Ｐゴシック" pitchFamily="-106" charset="-128"/>
-                <a:cs typeface="ＭＳ Ｐゴシック" pitchFamily="-106" charset="-128"/>
-              </a:rPr>
-              <a:t>submit.</a:t>
-            </a:r>
-            <a:endParaRPr lang="en-US" sz="1200" kern="1200" dirty="0">
+            <a:endParaRPr lang="en-US" sz="1400" kern="1200" dirty="0">
               <a:solidFill>
                 <a:schemeClr val="tx1"/>
               </a:solidFill>
@@ -3695,7 +3173,7 @@
           </a:p>
           <a:p>
             <a:r>
-              <a:rPr lang="en-US" sz="1200" kern="1200" dirty="0">
+              <a:rPr lang="en-US" sz="1400" kern="1200" dirty="0">
                 <a:solidFill>
                   <a:schemeClr val="tx1"/>
                 </a:solidFill>
@@ -3704,12 +3182,16 @@
                 <a:ea typeface="ＭＳ Ｐゴシック" pitchFamily="-106" charset="-128"/>
                 <a:cs typeface="ＭＳ Ｐゴシック" pitchFamily="-106" charset="-128"/>
               </a:rPr>
-              <a:t>The opposite of faith is not merely unbelief.</a:t>
-            </a:r>
-          </a:p>
-          <a:p>
-            <a:r>
-              <a:rPr lang="en-US" sz="1200" kern="1200" dirty="0">
+              <a:t>Many readers frame the issue as:</a:t>
+            </a:r>
+          </a:p>
+          <a:p>
+            <a:pPr marL="171450" indent="-171450" rtl="0" fontAlgn="ctr">
+              <a:buFont typeface="Arial" panose="020B0604020202020204" pitchFamily="34" charset="0"/>
+              <a:buChar char="•"/>
+            </a:pPr>
+            <a:r>
+              <a:rPr lang="en-US" sz="1400" kern="1200" dirty="0">
                 <a:solidFill>
                   <a:schemeClr val="tx1"/>
                 </a:solidFill>
@@ -3718,12 +3200,16 @@
                 <a:ea typeface="ＭＳ Ｐゴシック" pitchFamily="-106" charset="-128"/>
                 <a:cs typeface="ＭＳ Ｐゴシック" pitchFamily="-106" charset="-128"/>
               </a:rPr>
-              <a:t>The opposite of faith is self-rule.</a:t>
-            </a:r>
-          </a:p>
-          <a:p>
-            <a:r>
-              <a:rPr lang="en-US" sz="1200" kern="1200" dirty="0">
+              <a:t>Israel pursued works.</a:t>
+            </a:r>
+          </a:p>
+          <a:p>
+            <a:pPr marL="171450" indent="-171450" rtl="0" fontAlgn="ctr">
+              <a:buFont typeface="Arial" panose="020B0604020202020204" pitchFamily="34" charset="0"/>
+              <a:buChar char="•"/>
+            </a:pPr>
+            <a:r>
+              <a:rPr lang="en-US" sz="1400" kern="1200" dirty="0">
                 <a:solidFill>
                   <a:schemeClr val="tx1"/>
                 </a:solidFill>
@@ -3732,12 +3218,12 @@
                 <a:ea typeface="ＭＳ Ｐゴシック" pitchFamily="-106" charset="-128"/>
                 <a:cs typeface="ＭＳ Ｐゴシック" pitchFamily="-106" charset="-128"/>
               </a:rPr>
-              <a:t>This fits Habakkuk perfectly.</a:t>
-            </a:r>
-          </a:p>
-          <a:p>
-            <a:r>
-              <a:rPr lang="en-US" sz="1200" kern="1200" dirty="0">
+              <a:t>Gentiles pursued faith.</a:t>
+            </a:r>
+          </a:p>
+          <a:p>
+            <a:r>
+              <a:rPr lang="en-US" sz="1400" kern="1200" dirty="0">
                 <a:solidFill>
                   <a:schemeClr val="tx1"/>
                 </a:solidFill>
@@ -3746,12 +3232,287 @@
                 <a:ea typeface="ＭＳ Ｐゴシック" pitchFamily="-106" charset="-128"/>
                 <a:cs typeface="ＭＳ Ｐゴシック" pitchFamily="-106" charset="-128"/>
               </a:rPr>
+              <a:t>Paul’s point seems deeper.</a:t>
+            </a:r>
+          </a:p>
+          <a:p>
+            <a:pPr marL="171450" indent="-171450">
+              <a:buFont typeface="Arial" panose="020B0604020202020204" pitchFamily="34" charset="0"/>
+              <a:buChar char="•"/>
+            </a:pPr>
+            <a:r>
+              <a:rPr lang="en-US" sz="1400" kern="1200" dirty="0">
+                <a:solidFill>
+                  <a:schemeClr val="tx1"/>
+                </a:solidFill>
+                <a:effectLst/>
+                <a:latin typeface="+mn-lt"/>
+                <a:ea typeface="ＭＳ Ｐゴシック" pitchFamily="-106" charset="-128"/>
+                <a:cs typeface="ＭＳ Ｐゴシック" pitchFamily="-106" charset="-128"/>
+              </a:rPr>
+              <a:t>Israel often sought covenant blessing while resisting God’s word.</a:t>
+            </a:r>
+          </a:p>
+          <a:p>
+            <a:r>
+              <a:rPr lang="en-US" sz="1400" kern="1200" dirty="0">
+                <a:solidFill>
+                  <a:schemeClr val="tx1"/>
+                </a:solidFill>
+                <a:effectLst/>
+                <a:latin typeface="+mn-lt"/>
+                <a:ea typeface="ＭＳ Ｐゴシック" pitchFamily="-106" charset="-128"/>
+                <a:cs typeface="ＭＳ Ｐゴシック" pitchFamily="-106" charset="-128"/>
+              </a:rPr>
+              <a:t>Consider Romans 10:16:</a:t>
+            </a:r>
+          </a:p>
+          <a:p>
+            <a:pPr marL="171450" indent="-171450">
+              <a:buFont typeface="Arial" panose="020B0604020202020204" pitchFamily="34" charset="0"/>
+              <a:buChar char="•"/>
+            </a:pPr>
+            <a:r>
+              <a:rPr lang="en-US" sz="1400" kern="1200" dirty="0">
+                <a:solidFill>
+                  <a:schemeClr val="tx1"/>
+                </a:solidFill>
+                <a:effectLst/>
+                <a:latin typeface="+mn-lt"/>
+                <a:ea typeface="ＭＳ Ｐゴシック" pitchFamily="-106" charset="-128"/>
+                <a:cs typeface="ＭＳ Ｐゴシック" pitchFamily="-106" charset="-128"/>
+              </a:rPr>
+              <a:t>“But not all have obeyed the good news.”</a:t>
+            </a:r>
+          </a:p>
+          <a:p>
+            <a:endParaRPr lang="en-US" sz="1400" kern="1200" dirty="0">
+              <a:solidFill>
+                <a:schemeClr val="tx1"/>
+              </a:solidFill>
+              <a:effectLst/>
+              <a:latin typeface="+mn-lt"/>
+              <a:ea typeface="ＭＳ Ｐゴシック" pitchFamily="-106" charset="-128"/>
+              <a:cs typeface="ＭＳ Ｐゴシック" pitchFamily="-106" charset="-128"/>
+            </a:endParaRPr>
+          </a:p>
+          <a:p>
+            <a:r>
+              <a:rPr lang="en-US" sz="1400" kern="1200" dirty="0">
+                <a:solidFill>
+                  <a:schemeClr val="tx1"/>
+                </a:solidFill>
+                <a:effectLst/>
+                <a:latin typeface="+mn-lt"/>
+                <a:ea typeface="ＭＳ Ｐゴシック" pitchFamily="-106" charset="-128"/>
+                <a:cs typeface="ＭＳ Ｐゴシック" pitchFamily="-106" charset="-128"/>
+              </a:rPr>
+              <a:t>Again Paul equates believing and obeying.</a:t>
+            </a:r>
+          </a:p>
+          <a:p>
+            <a:pPr marL="171450" indent="-171450">
+              <a:buFont typeface="Arial" panose="020B0604020202020204" pitchFamily="34" charset="0"/>
+              <a:buChar char="•"/>
+            </a:pPr>
+            <a:r>
+              <a:rPr lang="en-US" sz="1400" kern="1200" dirty="0">
+                <a:solidFill>
+                  <a:schemeClr val="tx1"/>
+                </a:solidFill>
+                <a:effectLst/>
+                <a:latin typeface="+mn-lt"/>
+                <a:ea typeface="ＭＳ Ｐゴシック" pitchFamily="-106" charset="-128"/>
+                <a:cs typeface="ＭＳ Ｐゴシック" pitchFamily="-106" charset="-128"/>
+              </a:rPr>
+              <a:t>The fundamental issue was not merely a lack of intellectual faith.</a:t>
+            </a:r>
+          </a:p>
+          <a:p>
+            <a:pPr marL="171450" indent="-171450">
+              <a:buFont typeface="Arial" panose="020B0604020202020204" pitchFamily="34" charset="0"/>
+              <a:buChar char="•"/>
+            </a:pPr>
+            <a:r>
+              <a:rPr lang="en-US" sz="1400" kern="1200" dirty="0">
+                <a:solidFill>
+                  <a:schemeClr val="tx1"/>
+                </a:solidFill>
+                <a:effectLst/>
+                <a:latin typeface="+mn-lt"/>
+                <a:ea typeface="ＭＳ Ｐゴシック" pitchFamily="-106" charset="-128"/>
+                <a:cs typeface="ＭＳ Ｐゴシック" pitchFamily="-106" charset="-128"/>
+              </a:rPr>
+              <a:t>It was a refusal to submit to God’s righteousness.</a:t>
+            </a:r>
+          </a:p>
+          <a:p>
+            <a:pPr marL="171450" indent="-171450">
+              <a:buFont typeface="Arial" panose="020B0604020202020204" pitchFamily="34" charset="0"/>
+              <a:buChar char="•"/>
+            </a:pPr>
+            <a:r>
+              <a:rPr lang="en-US" sz="1400" kern="1200" dirty="0">
+                <a:solidFill>
+                  <a:schemeClr val="tx1"/>
+                </a:solidFill>
+                <a:effectLst/>
+                <a:latin typeface="+mn-lt"/>
+                <a:ea typeface="ＭＳ Ｐゴシック" pitchFamily="-106" charset="-128"/>
+                <a:cs typeface="ＭＳ Ｐゴシック" pitchFamily="-106" charset="-128"/>
+              </a:rPr>
+              <a:t>“For ignoring the righteousness that comes from God, and seeking instead to establish their own righteousness, they did not submit to God’s righteousness.” (Romans 10:3, NET)</a:t>
+            </a:r>
+          </a:p>
+          <a:p>
+            <a:endParaRPr lang="en-US" sz="1400" kern="1200" dirty="0">
+              <a:solidFill>
+                <a:schemeClr val="tx1"/>
+              </a:solidFill>
+              <a:effectLst/>
+              <a:latin typeface="+mn-lt"/>
+              <a:ea typeface="ＭＳ Ｐゴシック" pitchFamily="-106" charset="-128"/>
+              <a:cs typeface="ＭＳ Ｐゴシック" pitchFamily="-106" charset="-128"/>
+            </a:endParaRPr>
+          </a:p>
+          <a:p>
+            <a:r>
+              <a:rPr lang="en-US" sz="1400" kern="1200" dirty="0">
+                <a:solidFill>
+                  <a:schemeClr val="tx1"/>
+                </a:solidFill>
+                <a:effectLst/>
+                <a:latin typeface="+mn-lt"/>
+                <a:ea typeface="ＭＳ Ｐゴシック" pitchFamily="-106" charset="-128"/>
+                <a:cs typeface="ＭＳ Ｐゴシック" pitchFamily="-106" charset="-128"/>
+              </a:rPr>
+              <a:t>Notice the key word:  </a:t>
+            </a:r>
+            <a:r>
+              <a:rPr lang="en-US" sz="1400" b="1" kern="1200" dirty="0">
+                <a:solidFill>
+                  <a:schemeClr val="tx1"/>
+                </a:solidFill>
+                <a:effectLst/>
+                <a:latin typeface="+mn-lt"/>
+                <a:ea typeface="ＭＳ Ｐゴシック" pitchFamily="-106" charset="-128"/>
+                <a:cs typeface="ＭＳ Ｐゴシック" pitchFamily="-106" charset="-128"/>
+              </a:rPr>
+              <a:t>submit.</a:t>
+            </a:r>
+            <a:endParaRPr lang="en-US" sz="1400" kern="1200" dirty="0">
+              <a:solidFill>
+                <a:schemeClr val="tx1"/>
+              </a:solidFill>
+              <a:effectLst/>
+              <a:latin typeface="+mn-lt"/>
+              <a:ea typeface="ＭＳ Ｐゴシック" pitchFamily="-106" charset="-128"/>
+              <a:cs typeface="ＭＳ Ｐゴシック" pitchFamily="-106" charset="-128"/>
+            </a:endParaRPr>
+          </a:p>
+          <a:p>
+            <a:pPr marL="171450" indent="-171450">
+              <a:buFont typeface="Arial" panose="020B0604020202020204" pitchFamily="34" charset="0"/>
+              <a:buChar char="•"/>
+            </a:pPr>
+            <a:r>
+              <a:rPr lang="en-US" sz="1400" kern="1200" dirty="0">
+                <a:solidFill>
+                  <a:schemeClr val="tx1"/>
+                </a:solidFill>
+                <a:effectLst/>
+                <a:latin typeface="+mn-lt"/>
+                <a:ea typeface="ＭＳ Ｐゴシック" pitchFamily="-106" charset="-128"/>
+                <a:cs typeface="ＭＳ Ｐゴシック" pitchFamily="-106" charset="-128"/>
+              </a:rPr>
+              <a:t>The opposite of faith is not merely unbelief.</a:t>
+            </a:r>
+          </a:p>
+          <a:p>
+            <a:pPr marL="171450" indent="-171450">
+              <a:buFont typeface="Arial" panose="020B0604020202020204" pitchFamily="34" charset="0"/>
+              <a:buChar char="•"/>
+            </a:pPr>
+            <a:r>
+              <a:rPr lang="en-US" sz="1400" u="sng" kern="1200" dirty="0">
+                <a:solidFill>
+                  <a:schemeClr val="tx1"/>
+                </a:solidFill>
+                <a:effectLst/>
+                <a:latin typeface="+mn-lt"/>
+                <a:ea typeface="ＭＳ Ｐゴシック" pitchFamily="-106" charset="-128"/>
+                <a:cs typeface="ＭＳ Ｐゴシック" pitchFamily="-106" charset="-128"/>
+              </a:rPr>
+              <a:t>The opposite of faith is self-rule.</a:t>
+            </a:r>
+          </a:p>
+          <a:p>
+            <a:pPr marL="171450" indent="-171450">
+              <a:buFont typeface="Arial" panose="020B0604020202020204" pitchFamily="34" charset="0"/>
+              <a:buChar char="•"/>
+            </a:pPr>
+            <a:r>
+              <a:rPr lang="en-US" sz="1400" kern="1200" dirty="0">
+                <a:solidFill>
+                  <a:schemeClr val="tx1"/>
+                </a:solidFill>
+                <a:effectLst/>
+                <a:latin typeface="+mn-lt"/>
+                <a:ea typeface="ＭＳ Ｐゴシック" pitchFamily="-106" charset="-128"/>
+                <a:cs typeface="ＭＳ Ｐゴシック" pitchFamily="-106" charset="-128"/>
+              </a:rPr>
+              <a:t>This fits </a:t>
+            </a:r>
+            <a:r>
+              <a:rPr lang="en-US" sz="1400" b="1" kern="1200" dirty="0">
+                <a:solidFill>
+                  <a:schemeClr val="tx1"/>
+                </a:solidFill>
+                <a:effectLst/>
+                <a:latin typeface="+mn-lt"/>
+                <a:ea typeface="ＭＳ Ｐゴシック" pitchFamily="-106" charset="-128"/>
+                <a:cs typeface="ＭＳ Ｐゴシック" pitchFamily="-106" charset="-128"/>
+              </a:rPr>
+              <a:t>Habakkuk</a:t>
+            </a:r>
+            <a:r>
+              <a:rPr lang="en-US" sz="1400" kern="1200" dirty="0">
+                <a:solidFill>
+                  <a:schemeClr val="tx1"/>
+                </a:solidFill>
+                <a:effectLst/>
+                <a:latin typeface="+mn-lt"/>
+                <a:ea typeface="ＭＳ Ｐゴシック" pitchFamily="-106" charset="-128"/>
+                <a:cs typeface="ＭＳ Ｐゴシック" pitchFamily="-106" charset="-128"/>
+              </a:rPr>
+              <a:t> perfectly.</a:t>
+            </a:r>
+          </a:p>
+          <a:p>
+            <a:pPr marL="171450" indent="-171450">
+              <a:buFont typeface="Arial" panose="020B0604020202020204" pitchFamily="34" charset="0"/>
+              <a:buChar char="•"/>
+            </a:pPr>
+            <a:r>
+              <a:rPr lang="en-US" sz="1400" i="1" kern="1200" dirty="0">
+                <a:solidFill>
+                  <a:schemeClr val="tx1"/>
+                </a:solidFill>
+                <a:effectLst/>
+                <a:latin typeface="+mn-lt"/>
+                <a:ea typeface="ＭＳ Ｐゴシック" pitchFamily="-106" charset="-128"/>
+                <a:cs typeface="ＭＳ Ｐゴシック" pitchFamily="-106" charset="-128"/>
+              </a:rPr>
               <a:t>The proud man trusts himself.</a:t>
             </a:r>
           </a:p>
           <a:p>
-            <a:r>
-              <a:rPr lang="en-US" sz="1200" kern="1200" dirty="0">
+            <a:pPr marL="171450" indent="-171450">
+              <a:buFont typeface="Arial" panose="020B0604020202020204" pitchFamily="34" charset="0"/>
+              <a:buChar char="•"/>
+            </a:pPr>
+            <a:r>
+              <a:rPr lang="en-US" sz="1400" i="1" kern="1200" dirty="0">
                 <a:solidFill>
                   <a:schemeClr val="tx1"/>
                 </a:solidFill>
@@ -3797,7 +3558,7 @@
               <a:pPr>
                 <a:defRPr/>
               </a:pPr>
-              <a:t>6</a:t>
+              <a:t>7</a:t>
             </a:fld>
             <a:endParaRPr lang="en-US"/>
           </a:p>
@@ -3816,7 +3577,7 @@
 </p:notes>
 </file>
 
-<file path=ppt/notesSlides/notesSlide7.xml><?xml version="1.0" encoding="utf-8"?>
+<file path=ppt/notesSlides/notesSlide8.xml><?xml version="1.0" encoding="utf-8"?>
 <p:notes xmlns:a="http://schemas.openxmlformats.org/drawingml/2006/main" xmlns:r="http://schemas.openxmlformats.org/officeDocument/2006/relationships" xmlns:p="http://schemas.openxmlformats.org/presentationml/2006/main">
   <p:cSld>
     <p:spTree>
@@ -3876,12 +3637,12 @@
         <p:spPr/>
         <p:txBody>
           <a:bodyPr>
-            <a:normAutofit fontScale="92500" lnSpcReduction="20000"/>
+            <a:normAutofit fontScale="62500" lnSpcReduction="20000"/>
           </a:bodyPr>
           <a:lstStyle/>
           <a:p>
             <a:r>
-              <a:rPr lang="en-US" sz="1200" b="1" kern="1200" dirty="0">
+              <a:rPr lang="en-US" sz="1400" b="1" kern="1200" dirty="0">
                 <a:solidFill>
                   <a:schemeClr val="tx1"/>
                 </a:solidFill>
@@ -3892,7 +3653,7 @@
               </a:rPr>
               <a:t>Romans, Galatians, and Hebrews Revisited</a:t>
             </a:r>
-            <a:endParaRPr lang="en-US" sz="1200" kern="1200" dirty="0">
+            <a:endParaRPr lang="en-US" sz="1400" kern="1200" dirty="0">
               <a:solidFill>
                 <a:schemeClr val="tx1"/>
               </a:solidFill>
@@ -3904,7 +3665,7 @@
           </a:p>
           <a:p>
             <a:r>
-              <a:rPr lang="en-US" sz="1200" kern="1200" dirty="0">
+              <a:rPr lang="en-US" sz="1400" kern="1200" dirty="0">
                 <a:solidFill>
                   <a:schemeClr val="tx1"/>
                 </a:solidFill>
@@ -3917,19 +3678,7 @@
             </a:r>
           </a:p>
           <a:p>
-            <a:r>
-              <a:rPr lang="en-US" sz="1200" b="1" kern="1200" dirty="0">
-                <a:solidFill>
-                  <a:schemeClr val="tx1"/>
-                </a:solidFill>
-                <a:effectLst/>
-                <a:latin typeface="+mn-lt"/>
-                <a:ea typeface="ＭＳ Ｐゴシック" pitchFamily="-106" charset="-128"/>
-                <a:cs typeface="ＭＳ Ｐゴシック" pitchFamily="-106" charset="-128"/>
-              </a:rPr>
-              <a:t>Romans</a:t>
-            </a:r>
-            <a:endParaRPr lang="en-US" sz="1200" kern="1200" dirty="0">
+            <a:endParaRPr lang="en-US" sz="1400" b="1" kern="1200" dirty="0">
               <a:solidFill>
                 <a:schemeClr val="tx1"/>
               </a:solidFill>
@@ -3941,7 +3690,7 @@
           </a:p>
           <a:p>
             <a:r>
-              <a:rPr lang="en-US" sz="1200" kern="1200" dirty="0">
+              <a:rPr lang="en-US" sz="1400" b="1" kern="1200" dirty="0">
                 <a:solidFill>
                   <a:schemeClr val="tx1"/>
                 </a:solidFill>
@@ -3950,37 +3699,9 @@
                 <a:ea typeface="ＭＳ Ｐゴシック" pitchFamily="-106" charset="-128"/>
                 <a:cs typeface="ＭＳ Ｐゴシック" pitchFamily="-106" charset="-128"/>
               </a:rPr>
-              <a:t>Who are the righteous?</a:t>
-            </a:r>
-          </a:p>
-          <a:p>
-            <a:r>
-              <a:rPr lang="en-US" sz="1200" kern="1200" dirty="0">
-                <a:solidFill>
-                  <a:schemeClr val="tx1"/>
-                </a:solidFill>
-                <a:effectLst/>
-                <a:latin typeface="+mn-lt"/>
-                <a:ea typeface="ＭＳ Ｐゴシック" pitchFamily="-106" charset="-128"/>
-                <a:cs typeface="ＭＳ Ｐゴシック" pitchFamily="-106" charset="-128"/>
-              </a:rPr>
-              <a:t>Those who have submitted to God’s righteousness through faithful trust.</a:t>
-            </a:r>
-          </a:p>
-          <a:p>
-            <a:r>
-              <a:rPr lang="en-US" sz="1200" b="1" kern="1200" dirty="0">
-                <a:solidFill>
-                  <a:schemeClr val="tx1"/>
-                </a:solidFill>
-                <a:effectLst/>
-                <a:latin typeface="+mn-lt"/>
-                <a:ea typeface="ＭＳ Ｐゴシック" pitchFamily="-106" charset="-128"/>
-                <a:cs typeface="ＭＳ Ｐゴシック" pitchFamily="-106" charset="-128"/>
-              </a:rPr>
-              <a:t>Galatians</a:t>
-            </a:r>
-            <a:endParaRPr lang="en-US" sz="1200" kern="1200" dirty="0">
+              <a:t>Romans</a:t>
+            </a:r>
+            <a:endParaRPr lang="en-US" sz="1400" kern="1200" dirty="0">
               <a:solidFill>
                 <a:schemeClr val="tx1"/>
               </a:solidFill>
@@ -3992,7 +3713,7 @@
           </a:p>
           <a:p>
             <a:r>
-              <a:rPr lang="en-US" sz="1200" kern="1200" dirty="0">
+              <a:rPr lang="en-US" sz="1400" kern="1200" dirty="0">
                 <a:solidFill>
                   <a:schemeClr val="tx1"/>
                 </a:solidFill>
@@ -4001,12 +3722,12 @@
                 <a:ea typeface="ＭＳ Ｐゴシック" pitchFamily="-106" charset="-128"/>
                 <a:cs typeface="ＭＳ Ｐゴシック" pitchFamily="-106" charset="-128"/>
               </a:rPr>
-              <a:t>What is faith?</a:t>
-            </a:r>
-          </a:p>
-          <a:p>
-            <a:r>
-              <a:rPr lang="en-US" sz="1200" kern="1200" dirty="0">
+              <a:t>Who are the righteous?</a:t>
+            </a:r>
+          </a:p>
+          <a:p>
+            <a:r>
+              <a:rPr lang="en-US" sz="1400" kern="1200" dirty="0">
                 <a:solidFill>
                   <a:schemeClr val="tx1"/>
                 </a:solidFill>
@@ -4015,51 +3736,11 @@
                 <a:ea typeface="ＭＳ Ｐゴシック" pitchFamily="-106" charset="-128"/>
                 <a:cs typeface="ＭＳ Ｐゴシック" pitchFamily="-106" charset="-128"/>
               </a:rPr>
-              <a:t>Not merely belief.</a:t>
-            </a:r>
-          </a:p>
-          <a:p>
-            <a:r>
-              <a:rPr lang="en-US" sz="1200" kern="1200" dirty="0">
-                <a:solidFill>
-                  <a:schemeClr val="tx1"/>
-                </a:solidFill>
-                <a:effectLst/>
-                <a:latin typeface="+mn-lt"/>
-                <a:ea typeface="ＭＳ Ｐゴシック" pitchFamily="-106" charset="-128"/>
-                <a:cs typeface="ＭＳ Ｐゴシック" pitchFamily="-106" charset="-128"/>
-              </a:rPr>
-              <a:t>Faith working through love (Galatians 5:6).</a:t>
-            </a:r>
-          </a:p>
-          <a:p>
-            <a:r>
-              <a:rPr lang="en-US" sz="1200" kern="1200" dirty="0">
-                <a:solidFill>
-                  <a:schemeClr val="tx1"/>
-                </a:solidFill>
-                <a:effectLst/>
-                <a:latin typeface="+mn-lt"/>
-                <a:ea typeface="ＭＳ Ｐゴシック" pitchFamily="-106" charset="-128"/>
-                <a:cs typeface="ＭＳ Ｐゴシック" pitchFamily="-106" charset="-128"/>
-              </a:rPr>
-              <a:t>Faithful allegiance to Christ rather than reliance on fleshly achievement.</a:t>
-            </a:r>
-          </a:p>
-          <a:p>
-            <a:r>
-              <a:rPr lang="en-US" sz="1200" b="1" kern="1200" dirty="0">
-                <a:solidFill>
-                  <a:schemeClr val="tx1"/>
-                </a:solidFill>
-                <a:effectLst/>
-                <a:latin typeface="+mn-lt"/>
-                <a:ea typeface="ＭＳ Ｐゴシック" pitchFamily="-106" charset="-128"/>
-                <a:cs typeface="ＭＳ Ｐゴシック" pitchFamily="-106" charset="-128"/>
-              </a:rPr>
-              <a:t>Hebrews</a:t>
-            </a:r>
-            <a:endParaRPr lang="en-US" sz="1200" kern="1200" dirty="0">
+              <a:t>Those who have submitted to God’s righteousness through faithful trust.</a:t>
+            </a:r>
+          </a:p>
+          <a:p>
+            <a:endParaRPr lang="en-US" sz="1400" b="1" kern="1200" dirty="0">
               <a:solidFill>
                 <a:schemeClr val="tx1"/>
               </a:solidFill>
@@ -4071,7 +3752,7 @@
           </a:p>
           <a:p>
             <a:r>
-              <a:rPr lang="en-US" sz="1200" kern="1200" dirty="0">
+              <a:rPr lang="en-US" sz="1400" b="1" kern="1200" dirty="0">
                 <a:solidFill>
                   <a:schemeClr val="tx1"/>
                 </a:solidFill>
@@ -4080,12 +3761,21 @@
                 <a:ea typeface="ＭＳ Ｐゴシック" pitchFamily="-106" charset="-128"/>
                 <a:cs typeface="ＭＳ Ｐゴシック" pitchFamily="-106" charset="-128"/>
               </a:rPr>
-              <a:t>What does it mean to live by faith?</a:t>
-            </a:r>
-          </a:p>
-          <a:p>
-            <a:r>
-              <a:rPr lang="en-US" sz="1200" kern="1200" dirty="0">
+              <a:t>Galatians</a:t>
+            </a:r>
+            <a:endParaRPr lang="en-US" sz="1400" kern="1200" dirty="0">
+              <a:solidFill>
+                <a:schemeClr val="tx1"/>
+              </a:solidFill>
+              <a:effectLst/>
+              <a:latin typeface="+mn-lt"/>
+              <a:ea typeface="ＭＳ Ｐゴシック" pitchFamily="-106" charset="-128"/>
+              <a:cs typeface="ＭＳ Ｐゴシック" pitchFamily="-106" charset="-128"/>
+            </a:endParaRPr>
+          </a:p>
+          <a:p>
+            <a:r>
+              <a:rPr lang="en-US" sz="1400" kern="1200" dirty="0">
                 <a:solidFill>
                   <a:schemeClr val="tx1"/>
                 </a:solidFill>
@@ -4094,12 +3784,12 @@
                 <a:ea typeface="ＭＳ Ｐゴシック" pitchFamily="-106" charset="-128"/>
                 <a:cs typeface="ＭＳ Ｐゴシック" pitchFamily="-106" charset="-128"/>
               </a:rPr>
-              <a:t>Persevering loyalty.</a:t>
-            </a:r>
-          </a:p>
-          <a:p>
-            <a:r>
-              <a:rPr lang="en-US" sz="1200" kern="1200" dirty="0">
+              <a:t>What is faith?</a:t>
+            </a:r>
+          </a:p>
+          <a:p>
+            <a:r>
+              <a:rPr lang="en-US" sz="1400" kern="1200" dirty="0">
                 <a:solidFill>
                   <a:schemeClr val="tx1"/>
                 </a:solidFill>
@@ -4108,12 +3798,12 @@
                 <a:ea typeface="ＭＳ Ｐゴシック" pitchFamily="-106" charset="-128"/>
                 <a:cs typeface="ＭＳ Ｐゴシック" pitchFamily="-106" charset="-128"/>
               </a:rPr>
-              <a:t>The heroes of Hebrews 11 did not merely hold correct beliefs.</a:t>
-            </a:r>
-          </a:p>
-          <a:p>
-            <a:r>
-              <a:rPr lang="en-US" sz="1200" kern="1200" dirty="0">
+              <a:t>Not merely belief.</a:t>
+            </a:r>
+          </a:p>
+          <a:p>
+            <a:r>
+              <a:rPr lang="en-US" sz="1400" kern="1200" dirty="0">
                 <a:solidFill>
                   <a:schemeClr val="tx1"/>
                 </a:solidFill>
@@ -4122,13 +3812,12 @@
                 <a:ea typeface="ＭＳ Ｐゴシック" pitchFamily="-106" charset="-128"/>
                 <a:cs typeface="ＭＳ Ｐゴシック" pitchFamily="-106" charset="-128"/>
               </a:rPr>
-              <a:t>They obeyed.</a:t>
-            </a:r>
-          </a:p>
-          <a:p>
-            <a:pPr rtl="0" fontAlgn="ctr"/>
-            <a:r>
-              <a:rPr lang="en-US" sz="1200" kern="1200" dirty="0">
+              <a:t>Faith working through love (Galatians 5:6).</a:t>
+            </a:r>
+          </a:p>
+          <a:p>
+            <a:r>
+              <a:rPr lang="en-US" sz="1400" kern="1200" dirty="0">
                 <a:solidFill>
                   <a:schemeClr val="tx1"/>
                 </a:solidFill>
@@ -4137,13 +3826,23 @@
                 <a:ea typeface="ＭＳ Ｐゴシック" pitchFamily="-106" charset="-128"/>
                 <a:cs typeface="ＭＳ Ｐゴシック" pitchFamily="-106" charset="-128"/>
               </a:rPr>
-              <a:t>Noah built.</a:t>
-            </a:r>
-          </a:p>
-          <a:p>
-            <a:pPr rtl="0" fontAlgn="ctr"/>
-            <a:r>
-              <a:rPr lang="en-US" sz="1200" kern="1200" dirty="0">
+              <a:t>Faithful allegiance to Christ rather than reliance on fleshly achievement.</a:t>
+            </a:r>
+          </a:p>
+          <a:p>
+            <a:endParaRPr lang="en-US" sz="1400" b="1" kern="1200" dirty="0">
+              <a:solidFill>
+                <a:schemeClr val="tx1"/>
+              </a:solidFill>
+              <a:effectLst/>
+              <a:latin typeface="+mn-lt"/>
+              <a:ea typeface="ＭＳ Ｐゴシック" pitchFamily="-106" charset="-128"/>
+              <a:cs typeface="ＭＳ Ｐゴシック" pitchFamily="-106" charset="-128"/>
+            </a:endParaRPr>
+          </a:p>
+          <a:p>
+            <a:r>
+              <a:rPr lang="en-US" sz="1400" b="1" kern="1200" dirty="0">
                 <a:solidFill>
                   <a:schemeClr val="tx1"/>
                 </a:solidFill>
@@ -4152,13 +3851,21 @@
                 <a:ea typeface="ＭＳ Ｐゴシック" pitchFamily="-106" charset="-128"/>
                 <a:cs typeface="ＭＳ Ｐゴシック" pitchFamily="-106" charset="-128"/>
               </a:rPr>
-              <a:t>Abraham left.</a:t>
-            </a:r>
-          </a:p>
-          <a:p>
-            <a:pPr rtl="0" fontAlgn="ctr"/>
-            <a:r>
-              <a:rPr lang="en-US" sz="1200" kern="1200" dirty="0">
+              <a:t>Hebrews</a:t>
+            </a:r>
+            <a:endParaRPr lang="en-US" sz="1400" kern="1200" dirty="0">
+              <a:solidFill>
+                <a:schemeClr val="tx1"/>
+              </a:solidFill>
+              <a:effectLst/>
+              <a:latin typeface="+mn-lt"/>
+              <a:ea typeface="ＭＳ Ｐゴシック" pitchFamily="-106" charset="-128"/>
+              <a:cs typeface="ＭＳ Ｐゴシック" pitchFamily="-106" charset="-128"/>
+            </a:endParaRPr>
+          </a:p>
+          <a:p>
+            <a:r>
+              <a:rPr lang="en-US" sz="1400" kern="1200" dirty="0">
                 <a:solidFill>
                   <a:schemeClr val="tx1"/>
                 </a:solidFill>
@@ -4167,13 +3874,16 @@
                 <a:ea typeface="ＭＳ Ｐゴシック" pitchFamily="-106" charset="-128"/>
                 <a:cs typeface="ＭＳ Ｐゴシック" pitchFamily="-106" charset="-128"/>
               </a:rPr>
-              <a:t>Moses chose.</a:t>
-            </a:r>
-          </a:p>
-          <a:p>
-            <a:pPr rtl="0" fontAlgn="ctr"/>
-            <a:r>
-              <a:rPr lang="en-US" sz="1200" kern="1200" dirty="0">
+              <a:t>What does it mean to live by faith?</a:t>
+            </a:r>
+          </a:p>
+          <a:p>
+            <a:pPr marL="171450" indent="-171450">
+              <a:buFont typeface="Arial" panose="020B0604020202020204" pitchFamily="34" charset="0"/>
+              <a:buChar char="•"/>
+            </a:pPr>
+            <a:r>
+              <a:rPr lang="en-US" sz="1400" kern="1200" dirty="0">
                 <a:solidFill>
                   <a:schemeClr val="tx1"/>
                 </a:solidFill>
@@ -4182,13 +3892,12 @@
                 <a:ea typeface="ＭＳ Ｐゴシック" pitchFamily="-106" charset="-128"/>
                 <a:cs typeface="ＭＳ Ｐゴシック" pitchFamily="-106" charset="-128"/>
               </a:rPr>
-              <a:t>Israel crossed.</a:t>
-            </a:r>
-          </a:p>
-          <a:p>
-            <a:pPr rtl="0" fontAlgn="ctr"/>
-            <a:r>
-              <a:rPr lang="en-US" sz="1200" kern="1200" dirty="0">
+              <a:t>Persevering loyalty.</a:t>
+            </a:r>
+          </a:p>
+          <a:p>
+            <a:r>
+              <a:rPr lang="en-US" sz="1400" kern="1200" dirty="0">
                 <a:solidFill>
                   <a:schemeClr val="tx1"/>
                 </a:solidFill>
@@ -4197,12 +3906,12 @@
                 <a:ea typeface="ＭＳ Ｐゴシック" pitchFamily="-106" charset="-128"/>
                 <a:cs typeface="ＭＳ Ｐゴシック" pitchFamily="-106" charset="-128"/>
               </a:rPr>
-              <a:t>Rahab received.</a:t>
-            </a:r>
-          </a:p>
-          <a:p>
-            <a:r>
-              <a:rPr lang="en-US" sz="1200" kern="1200" dirty="0">
+              <a:t>The heroes of Hebrews 11 did not merely hold correct beliefs.</a:t>
+            </a:r>
+          </a:p>
+          <a:p>
+            <a:r>
+              <a:rPr lang="en-US" sz="1400" kern="1200" dirty="0">
                 <a:solidFill>
                   <a:schemeClr val="tx1"/>
                 </a:solidFill>
@@ -4211,12 +3920,116 @@
                 <a:ea typeface="ＭＳ Ｐゴシック" pitchFamily="-106" charset="-128"/>
                 <a:cs typeface="ＭＳ Ｐゴシック" pitchFamily="-106" charset="-128"/>
               </a:rPr>
+              <a:t>They obeyed.</a:t>
+            </a:r>
+          </a:p>
+          <a:p>
+            <a:pPr marL="171450" indent="-171450" rtl="0" fontAlgn="ctr">
+              <a:buFont typeface="Arial" panose="020B0604020202020204" pitchFamily="34" charset="0"/>
+              <a:buChar char="•"/>
+            </a:pPr>
+            <a:r>
+              <a:rPr lang="en-US" sz="1400" kern="1200" dirty="0">
+                <a:solidFill>
+                  <a:schemeClr val="tx1"/>
+                </a:solidFill>
+                <a:effectLst/>
+                <a:latin typeface="+mn-lt"/>
+                <a:ea typeface="ＭＳ Ｐゴシック" pitchFamily="-106" charset="-128"/>
+                <a:cs typeface="ＭＳ Ｐゴシック" pitchFamily="-106" charset="-128"/>
+              </a:rPr>
+              <a:t>Noah built.</a:t>
+            </a:r>
+          </a:p>
+          <a:p>
+            <a:pPr marL="171450" indent="-171450" rtl="0" fontAlgn="ctr">
+              <a:buFont typeface="Arial" panose="020B0604020202020204" pitchFamily="34" charset="0"/>
+              <a:buChar char="•"/>
+            </a:pPr>
+            <a:r>
+              <a:rPr lang="en-US" sz="1400" kern="1200" dirty="0">
+                <a:solidFill>
+                  <a:schemeClr val="tx1"/>
+                </a:solidFill>
+                <a:effectLst/>
+                <a:latin typeface="+mn-lt"/>
+                <a:ea typeface="ＭＳ Ｐゴシック" pitchFamily="-106" charset="-128"/>
+                <a:cs typeface="ＭＳ Ｐゴシック" pitchFamily="-106" charset="-128"/>
+              </a:rPr>
+              <a:t>Abraham left.</a:t>
+            </a:r>
+          </a:p>
+          <a:p>
+            <a:pPr marL="171450" indent="-171450" rtl="0" fontAlgn="ctr">
+              <a:buFont typeface="Arial" panose="020B0604020202020204" pitchFamily="34" charset="0"/>
+              <a:buChar char="•"/>
+            </a:pPr>
+            <a:r>
+              <a:rPr lang="en-US" sz="1400" kern="1200" dirty="0">
+                <a:solidFill>
+                  <a:schemeClr val="tx1"/>
+                </a:solidFill>
+                <a:effectLst/>
+                <a:latin typeface="+mn-lt"/>
+                <a:ea typeface="ＭＳ Ｐゴシック" pitchFamily="-106" charset="-128"/>
+                <a:cs typeface="ＭＳ Ｐゴシック" pitchFamily="-106" charset="-128"/>
+              </a:rPr>
+              <a:t>Moses chose.</a:t>
+            </a:r>
+          </a:p>
+          <a:p>
+            <a:pPr marL="171450" indent="-171450" rtl="0" fontAlgn="ctr">
+              <a:buFont typeface="Arial" panose="020B0604020202020204" pitchFamily="34" charset="0"/>
+              <a:buChar char="•"/>
+            </a:pPr>
+            <a:r>
+              <a:rPr lang="en-US" sz="1400" kern="1200" dirty="0">
+                <a:solidFill>
+                  <a:schemeClr val="tx1"/>
+                </a:solidFill>
+                <a:effectLst/>
+                <a:latin typeface="+mn-lt"/>
+                <a:ea typeface="ＭＳ Ｐゴシック" pitchFamily="-106" charset="-128"/>
+                <a:cs typeface="ＭＳ Ｐゴシック" pitchFamily="-106" charset="-128"/>
+              </a:rPr>
+              <a:t>Israel crossed.</a:t>
+            </a:r>
+          </a:p>
+          <a:p>
+            <a:pPr marL="171450" indent="-171450" rtl="0" fontAlgn="ctr">
+              <a:buFont typeface="Arial" panose="020B0604020202020204" pitchFamily="34" charset="0"/>
+              <a:buChar char="•"/>
+            </a:pPr>
+            <a:r>
+              <a:rPr lang="en-US" sz="1400" kern="1200" dirty="0">
+                <a:solidFill>
+                  <a:schemeClr val="tx1"/>
+                </a:solidFill>
+                <a:effectLst/>
+                <a:latin typeface="+mn-lt"/>
+                <a:ea typeface="ＭＳ Ｐゴシック" pitchFamily="-106" charset="-128"/>
+                <a:cs typeface="ＭＳ Ｐゴシック" pitchFamily="-106" charset="-128"/>
+              </a:rPr>
+              <a:t>Rahab received.</a:t>
+            </a:r>
+          </a:p>
+          <a:p>
+            <a:r>
+              <a:rPr lang="en-US" sz="1400" kern="1200" dirty="0">
+                <a:solidFill>
+                  <a:schemeClr val="tx1"/>
+                </a:solidFill>
+                <a:effectLst/>
+                <a:latin typeface="+mn-lt"/>
+                <a:ea typeface="ＭＳ Ｐゴシック" pitchFamily="-106" charset="-128"/>
+                <a:cs typeface="ＭＳ Ｐゴシック" pitchFamily="-106" charset="-128"/>
+              </a:rPr>
               <a:t>Their faith was visible because it acted.</a:t>
             </a:r>
           </a:p>
           <a:p>
             <a:r>
-              <a:rPr lang="en-US" sz="1200" kern="1200" dirty="0">
+              <a:rPr lang="en-US" sz="1400" kern="1200" dirty="0">
                 <a:solidFill>
                   <a:schemeClr val="tx1"/>
                 </a:solidFill>
@@ -4262,7 +4075,7 @@
               <a:pPr>
                 <a:defRPr/>
               </a:pPr>
-              <a:t>7</a:t>
+              <a:t>8</a:t>
             </a:fld>
             <a:endParaRPr lang="en-US"/>
           </a:p>
@@ -4281,7 +4094,7 @@
 </p:notes>
 </file>
 
-<file path=ppt/notesSlides/notesSlide8.xml><?xml version="1.0" encoding="utf-8"?>
+<file path=ppt/notesSlides/notesSlide9.xml><?xml version="1.0" encoding="utf-8"?>
 <p:notes xmlns:a="http://schemas.openxmlformats.org/drawingml/2006/main" xmlns:r="http://schemas.openxmlformats.org/officeDocument/2006/relationships" xmlns:p="http://schemas.openxmlformats.org/presentationml/2006/main">
   <p:cSld>
     <p:spTree>
@@ -4345,155 +4158,6 @@
           </a:bodyPr>
           <a:lstStyle/>
           <a:p>
-            <a:r>
-              <a:rPr lang="en-US" sz="1200" b="1" kern="1200" dirty="0">
-                <a:solidFill>
-                  <a:schemeClr val="tx1"/>
-                </a:solidFill>
-                <a:effectLst/>
-                <a:latin typeface="+mn-lt"/>
-                <a:ea typeface="ＭＳ Ｐゴシック" pitchFamily="-106" charset="-128"/>
-                <a:cs typeface="ＭＳ Ｐゴシック" pitchFamily="-106" charset="-128"/>
-              </a:rPr>
-              <a:t>Conclusion</a:t>
-            </a:r>
-            <a:endParaRPr lang="en-US" sz="1200" kern="1200" dirty="0">
-              <a:solidFill>
-                <a:schemeClr val="tx1"/>
-              </a:solidFill>
-              <a:effectLst/>
-              <a:latin typeface="+mn-lt"/>
-              <a:ea typeface="ＭＳ Ｐゴシック" pitchFamily="-106" charset="-128"/>
-              <a:cs typeface="ＭＳ Ｐゴシック" pitchFamily="-106" charset="-128"/>
-            </a:endParaRPr>
-          </a:p>
-          <a:p>
-            <a:r>
-              <a:rPr lang="en-US" sz="1200" kern="1200" dirty="0">
-                <a:solidFill>
-                  <a:schemeClr val="tx1"/>
-                </a:solidFill>
-                <a:effectLst/>
-                <a:latin typeface="+mn-lt"/>
-                <a:ea typeface="ＭＳ Ｐゴシック" pitchFamily="-106" charset="-128"/>
-                <a:cs typeface="ＭＳ Ｐゴシック" pitchFamily="-106" charset="-128"/>
-              </a:rPr>
-              <a:t>If Romans is framed by “the obedience of faith” (1:5; 16:26), then Romans 12-16 should not primarily be viewed as a section on works that follow faith.</a:t>
-            </a:r>
-          </a:p>
-          <a:p>
-            <a:r>
-              <a:rPr lang="en-US" sz="1200" kern="1200" dirty="0">
-                <a:solidFill>
-                  <a:schemeClr val="tx1"/>
-                </a:solidFill>
-                <a:effectLst/>
-                <a:latin typeface="+mn-lt"/>
-                <a:ea typeface="ＭＳ Ｐゴシック" pitchFamily="-106" charset="-128"/>
-                <a:cs typeface="ＭＳ Ｐゴシック" pitchFamily="-106" charset="-128"/>
-              </a:rPr>
-              <a:t>Rather, it is Paul’s portrait of what faith actually is.</a:t>
-            </a:r>
-          </a:p>
-          <a:p>
-            <a:r>
-              <a:rPr lang="en-US" sz="1200" kern="1200" dirty="0">
-                <a:solidFill>
-                  <a:schemeClr val="tx1"/>
-                </a:solidFill>
-                <a:effectLst/>
-                <a:latin typeface="+mn-lt"/>
-                <a:ea typeface="ＭＳ Ｐゴシック" pitchFamily="-106" charset="-128"/>
-                <a:cs typeface="ＭＳ Ｐゴシック" pitchFamily="-106" charset="-128"/>
-              </a:rPr>
-              <a:t>The faith that justifies is not mere mental assent.</a:t>
-            </a:r>
-          </a:p>
-          <a:p>
-            <a:r>
-              <a:rPr lang="en-US" sz="1200" kern="1200" dirty="0">
-                <a:solidFill>
-                  <a:schemeClr val="tx1"/>
-                </a:solidFill>
-                <a:effectLst/>
-                <a:latin typeface="+mn-lt"/>
-                <a:ea typeface="ＭＳ Ｐゴシック" pitchFamily="-106" charset="-128"/>
-                <a:cs typeface="ＭＳ Ｐゴシック" pitchFamily="-106" charset="-128"/>
-              </a:rPr>
-              <a:t>It is trusting submission to God.</a:t>
-            </a:r>
-          </a:p>
-          <a:p>
-            <a:r>
-              <a:rPr lang="en-US" sz="1200" kern="1200" dirty="0">
-                <a:solidFill>
-                  <a:schemeClr val="tx1"/>
-                </a:solidFill>
-                <a:effectLst/>
-                <a:latin typeface="+mn-lt"/>
-                <a:ea typeface="ＭＳ Ｐゴシック" pitchFamily="-106" charset="-128"/>
-                <a:cs typeface="ＭＳ Ｐゴシック" pitchFamily="-106" charset="-128"/>
-              </a:rPr>
-              <a:t>It is believing allegiance to Christ.</a:t>
-            </a:r>
-          </a:p>
-          <a:p>
-            <a:r>
-              <a:rPr lang="en-US" sz="1200" kern="1200" dirty="0">
-                <a:solidFill>
-                  <a:schemeClr val="tx1"/>
-                </a:solidFill>
-                <a:effectLst/>
-                <a:latin typeface="+mn-lt"/>
-                <a:ea typeface="ＭＳ Ｐゴシック" pitchFamily="-106" charset="-128"/>
-                <a:cs typeface="ＭＳ Ｐゴシック" pitchFamily="-106" charset="-128"/>
-              </a:rPr>
-              <a:t>It is the kind of faith that offers the body as a living sacrifice, loves enemies, submits to God-ordained authority, serves fellow believers, bears the weak, preserves unity, and remains faithful to the gospel.</a:t>
-            </a:r>
-          </a:p>
-          <a:p>
-            <a:r>
-              <a:rPr lang="en-US" sz="1200" kern="1200" dirty="0">
-                <a:solidFill>
-                  <a:schemeClr val="tx1"/>
-                </a:solidFill>
-                <a:effectLst/>
-                <a:latin typeface="+mn-lt"/>
-                <a:ea typeface="ＭＳ Ｐゴシック" pitchFamily="-106" charset="-128"/>
-                <a:cs typeface="ＭＳ Ｐゴシック" pitchFamily="-106" charset="-128"/>
-              </a:rPr>
-              <a:t>In that sense, Habakkuk 2:4, Romans 1:5, and Romans 12-16 all converge on a single idea:</a:t>
-            </a:r>
-          </a:p>
-          <a:p>
-            <a:r>
-              <a:rPr lang="en-US" sz="1200" kern="1200" dirty="0">
-                <a:solidFill>
-                  <a:schemeClr val="tx1"/>
-                </a:solidFill>
-                <a:effectLst/>
-                <a:latin typeface="+mn-lt"/>
-                <a:ea typeface="ＭＳ Ｐゴシック" pitchFamily="-106" charset="-128"/>
-                <a:cs typeface="ＭＳ Ｐゴシック" pitchFamily="-106" charset="-128"/>
-              </a:rPr>
-              <a:t>The righteous person lives by a faith that obeys because it trusts, and trusts because it has surrendered itself to God. Faith and obedience are not rivals in Paul’s thought; they are inseparable expressions of covenant loyalty to the God who saves.</a:t>
-            </a:r>
-          </a:p>
-          <a:p>
-            <a:r>
-              <a:rPr lang="en-US" sz="1200" kern="1200" dirty="0">
-                <a:solidFill>
-                  <a:schemeClr val="tx1"/>
-                </a:solidFill>
-                <a:effectLst/>
-                <a:latin typeface="+mn-lt"/>
-                <a:ea typeface="ＭＳ Ｐゴシック" pitchFamily="-106" charset="-128"/>
-                <a:cs typeface="ＭＳ Ｐゴシック" pitchFamily="-106" charset="-128"/>
-              </a:rPr>
-              <a:t> </a:t>
-            </a:r>
-          </a:p>
-          <a:p>
             <a:endParaRPr lang="en-US" dirty="0"/>
           </a:p>
         </p:txBody>
@@ -4527,7 +4191,7 @@
               <a:pPr>
                 <a:defRPr/>
               </a:pPr>
-              <a:t>8</a:t>
+              <a:t>9</a:t>
             </a:fld>
             <a:endParaRPr lang="en-US"/>
           </a:p>
@@ -6832,6 +6496,684 @@
           </a:p>
         </p:txBody>
       </p:sp>
+      <p:grpSp>
+        <p:nvGrpSpPr>
+          <p:cNvPr id="9" name="Group 8">
+            <a:extLst>
+              <a:ext uri="{FF2B5EF4-FFF2-40B4-BE49-F238E27FC236}">
+                <a16:creationId xmlns:a16="http://schemas.microsoft.com/office/drawing/2014/main" id="{3A039C72-3526-BF94-5A4E-4F289EFBC4D7}"/>
+              </a:ext>
+            </a:extLst>
+          </p:cNvPr>
+          <p:cNvGrpSpPr/>
+          <p:nvPr/>
+        </p:nvGrpSpPr>
+        <p:grpSpPr>
+          <a:xfrm>
+            <a:off x="1371600" y="1143000"/>
+            <a:ext cx="7391400" cy="5486400"/>
+            <a:chOff x="1828800" y="1143000"/>
+            <a:chExt cx="6934200" cy="5486400"/>
+          </a:xfrm>
+        </p:grpSpPr>
+        <p:sp>
+          <p:nvSpPr>
+            <p:cNvPr id="3" name="Round Diagonal Corner Rectangle 2">
+              <a:extLst>
+                <a:ext uri="{FF2B5EF4-FFF2-40B4-BE49-F238E27FC236}">
+                  <a16:creationId xmlns:a16="http://schemas.microsoft.com/office/drawing/2014/main" id="{CFF77C9A-6EE1-C799-0600-E91C5A3EA250}"/>
+                </a:ext>
+              </a:extLst>
+            </p:cNvPr>
+            <p:cNvSpPr/>
+            <p:nvPr/>
+          </p:nvSpPr>
+          <p:spPr>
+            <a:xfrm>
+              <a:off x="1828800" y="1143000"/>
+              <a:ext cx="6934200" cy="5486400"/>
+            </a:xfrm>
+            <a:prstGeom prst="round2DiagRect">
+              <a:avLst/>
+            </a:prstGeom>
+          </p:spPr>
+          <p:style>
+            <a:lnRef idx="2">
+              <a:schemeClr val="accent1">
+                <a:shade val="15000"/>
+              </a:schemeClr>
+            </a:lnRef>
+            <a:fillRef idx="1">
+              <a:schemeClr val="accent1"/>
+            </a:fillRef>
+            <a:effectRef idx="0">
+              <a:schemeClr val="accent1"/>
+            </a:effectRef>
+            <a:fontRef idx="minor">
+              <a:schemeClr val="lt1"/>
+            </a:fontRef>
+          </p:style>
+          <p:txBody>
+            <a:bodyPr rtlCol="0" anchor="ctr"/>
+            <a:lstStyle/>
+            <a:p>
+              <a:pPr marL="0" indent="0">
+                <a:buNone/>
+              </a:pPr>
+              <a:endParaRPr lang="en-US" sz="3600" dirty="0"/>
+            </a:p>
+            <a:p>
+              <a:pPr marL="0" indent="0">
+                <a:buNone/>
+              </a:pPr>
+              <a:r>
+                <a:rPr lang="en-US" sz="3600" dirty="0"/>
+                <a:t>A</a:t>
+              </a:r>
+            </a:p>
+            <a:p>
+              <a:pPr marL="0" indent="0">
+                <a:buNone/>
+              </a:pPr>
+              <a:r>
+                <a:rPr lang="en-US" sz="3600" dirty="0"/>
+                <a:t>    B</a:t>
+              </a:r>
+            </a:p>
+            <a:p>
+              <a:pPr marL="0" indent="0">
+                <a:buNone/>
+              </a:pPr>
+              <a:r>
+                <a:rPr lang="en-US" sz="3600" dirty="0"/>
+                <a:t>        C</a:t>
+              </a:r>
+            </a:p>
+            <a:p>
+              <a:pPr marL="0" indent="0">
+                <a:buNone/>
+              </a:pPr>
+              <a:r>
+                <a:rPr lang="en-US" sz="3600" dirty="0"/>
+                <a:t>            D</a:t>
+              </a:r>
+            </a:p>
+            <a:p>
+              <a:pPr marL="0" indent="0">
+                <a:buNone/>
+              </a:pPr>
+              <a:r>
+                <a:rPr lang="en-US" sz="3600" dirty="0"/>
+                <a:t>        C′</a:t>
+              </a:r>
+            </a:p>
+            <a:p>
+              <a:pPr marL="0" indent="0">
+                <a:buNone/>
+              </a:pPr>
+              <a:r>
+                <a:rPr lang="en-US" sz="3600" dirty="0"/>
+                <a:t>    B′</a:t>
+              </a:r>
+            </a:p>
+            <a:p>
+              <a:pPr marL="0" indent="0">
+                <a:buNone/>
+              </a:pPr>
+              <a:r>
+                <a:rPr lang="en-US" sz="3600" dirty="0"/>
+                <a:t>A′</a:t>
+              </a:r>
+              <a:endParaRPr lang="en-US" dirty="0"/>
+            </a:p>
+          </p:txBody>
+        </p:sp>
+        <p:sp>
+          <p:nvSpPr>
+            <p:cNvPr id="4" name="TextBox 3">
+              <a:extLst>
+                <a:ext uri="{FF2B5EF4-FFF2-40B4-BE49-F238E27FC236}">
+                  <a16:creationId xmlns:a16="http://schemas.microsoft.com/office/drawing/2014/main" id="{F659C91D-7EB0-20EB-8511-8897390E2F08}"/>
+                </a:ext>
+              </a:extLst>
+            </p:cNvPr>
+            <p:cNvSpPr txBox="1"/>
+            <p:nvPr/>
+          </p:nvSpPr>
+          <p:spPr>
+            <a:xfrm>
+              <a:off x="2514600" y="1462585"/>
+              <a:ext cx="5791200" cy="400110"/>
+            </a:xfrm>
+            <a:prstGeom prst="rect">
+              <a:avLst/>
+            </a:prstGeom>
+            <a:noFill/>
+          </p:spPr>
+          <p:txBody>
+            <a:bodyPr wrap="square" rtlCol="0">
+              <a:spAutoFit/>
+            </a:bodyPr>
+            <a:lstStyle/>
+            <a:p>
+              <a:r>
+                <a:rPr lang="en-US" sz="2000" b="1" u="sng" dirty="0">
+                  <a:solidFill>
+                    <a:schemeClr val="bg1"/>
+                  </a:solidFill>
+                </a:rPr>
+                <a:t>Concentric Concept Development in Scripture</a:t>
+              </a:r>
+            </a:p>
+          </p:txBody>
+        </p:sp>
+      </p:grpSp>
+      <p:grpSp>
+        <p:nvGrpSpPr>
+          <p:cNvPr id="10" name="Group 9">
+            <a:extLst>
+              <a:ext uri="{FF2B5EF4-FFF2-40B4-BE49-F238E27FC236}">
+                <a16:creationId xmlns:a16="http://schemas.microsoft.com/office/drawing/2014/main" id="{D015118B-8CF2-CB1B-EFCF-587D93E9B7D1}"/>
+              </a:ext>
+            </a:extLst>
+          </p:cNvPr>
+          <p:cNvGrpSpPr/>
+          <p:nvPr/>
+        </p:nvGrpSpPr>
+        <p:grpSpPr>
+          <a:xfrm>
+            <a:off x="1371600" y="1153886"/>
+            <a:ext cx="7391400" cy="5486400"/>
+            <a:chOff x="1371600" y="1143000"/>
+            <a:chExt cx="7391400" cy="5486400"/>
+          </a:xfrm>
+        </p:grpSpPr>
+        <p:sp>
+          <p:nvSpPr>
+            <p:cNvPr id="11" name="Round Diagonal Corner Rectangle 10">
+              <a:extLst>
+                <a:ext uri="{FF2B5EF4-FFF2-40B4-BE49-F238E27FC236}">
+                  <a16:creationId xmlns:a16="http://schemas.microsoft.com/office/drawing/2014/main" id="{34B19F3E-A65C-FF59-14FB-015F2AAD548D}"/>
+                </a:ext>
+              </a:extLst>
+            </p:cNvPr>
+            <p:cNvSpPr/>
+            <p:nvPr/>
+          </p:nvSpPr>
+          <p:spPr>
+            <a:xfrm>
+              <a:off x="1371600" y="1143000"/>
+              <a:ext cx="7391400" cy="5486400"/>
+            </a:xfrm>
+            <a:prstGeom prst="round2DiagRect">
+              <a:avLst/>
+            </a:prstGeom>
+          </p:spPr>
+          <p:style>
+            <a:lnRef idx="2">
+              <a:schemeClr val="accent1">
+                <a:shade val="15000"/>
+              </a:schemeClr>
+            </a:lnRef>
+            <a:fillRef idx="1">
+              <a:schemeClr val="accent1"/>
+            </a:fillRef>
+            <a:effectRef idx="0">
+              <a:schemeClr val="accent1"/>
+            </a:effectRef>
+            <a:fontRef idx="minor">
+              <a:schemeClr val="lt1"/>
+            </a:fontRef>
+          </p:style>
+          <p:txBody>
+            <a:bodyPr rtlCol="0" anchor="ctr"/>
+            <a:lstStyle/>
+            <a:p>
+              <a:pPr marL="0" indent="0">
+                <a:buNone/>
+              </a:pPr>
+              <a:endParaRPr lang="en-US" sz="3600" dirty="0"/>
+            </a:p>
+            <a:p>
+              <a:pPr marL="0" indent="0">
+                <a:buNone/>
+              </a:pPr>
+              <a:r>
+                <a:rPr lang="en-US" sz="3600" dirty="0"/>
+                <a:t>A   Introduction</a:t>
+              </a:r>
+            </a:p>
+            <a:p>
+              <a:pPr marL="0" indent="0">
+                <a:buNone/>
+              </a:pPr>
+              <a:r>
+                <a:rPr lang="en-US" sz="3600" dirty="0"/>
+                <a:t>    B   Theme introduced</a:t>
+              </a:r>
+            </a:p>
+            <a:p>
+              <a:pPr marL="0" indent="0">
+                <a:buNone/>
+              </a:pPr>
+              <a:r>
+                <a:rPr lang="en-US" sz="3600" dirty="0"/>
+                <a:t>        C   Development</a:t>
+              </a:r>
+            </a:p>
+            <a:p>
+              <a:pPr marL="0" indent="0">
+                <a:buNone/>
+              </a:pPr>
+              <a:r>
+                <a:rPr lang="en-US" sz="3600" dirty="0"/>
+                <a:t>            D   Central point</a:t>
+              </a:r>
+            </a:p>
+            <a:p>
+              <a:pPr marL="0" indent="0">
+                <a:buNone/>
+              </a:pPr>
+              <a:r>
+                <a:rPr lang="en-US" sz="3600" dirty="0"/>
+                <a:t>        C′  Development answered</a:t>
+              </a:r>
+            </a:p>
+            <a:p>
+              <a:pPr marL="0" indent="0">
+                <a:buNone/>
+              </a:pPr>
+              <a:r>
+                <a:rPr lang="en-US" sz="3600" dirty="0"/>
+                <a:t>    B′  Theme concluded</a:t>
+              </a:r>
+            </a:p>
+            <a:p>
+              <a:pPr marL="0" indent="0">
+                <a:buNone/>
+              </a:pPr>
+              <a:r>
+                <a:rPr lang="en-US" sz="3600" dirty="0"/>
+                <a:t>A′  Conclusion</a:t>
+              </a:r>
+              <a:endParaRPr lang="en-US" dirty="0"/>
+            </a:p>
+          </p:txBody>
+        </p:sp>
+        <p:sp>
+          <p:nvSpPr>
+            <p:cNvPr id="12" name="TextBox 11">
+              <a:extLst>
+                <a:ext uri="{FF2B5EF4-FFF2-40B4-BE49-F238E27FC236}">
+                  <a16:creationId xmlns:a16="http://schemas.microsoft.com/office/drawing/2014/main" id="{5383E8F2-CC4C-D1AC-030C-45528F816682}"/>
+                </a:ext>
+              </a:extLst>
+            </p:cNvPr>
+            <p:cNvSpPr txBox="1"/>
+            <p:nvPr/>
+          </p:nvSpPr>
+          <p:spPr>
+            <a:xfrm>
+              <a:off x="2102618" y="1462585"/>
+              <a:ext cx="6173037" cy="400110"/>
+            </a:xfrm>
+            <a:prstGeom prst="rect">
+              <a:avLst/>
+            </a:prstGeom>
+            <a:noFill/>
+          </p:spPr>
+          <p:txBody>
+            <a:bodyPr wrap="square" rtlCol="0">
+              <a:spAutoFit/>
+            </a:bodyPr>
+            <a:lstStyle/>
+            <a:p>
+              <a:r>
+                <a:rPr lang="en-US" sz="2000" b="1" u="sng" dirty="0">
+                  <a:solidFill>
+                    <a:schemeClr val="bg1"/>
+                  </a:solidFill>
+                </a:rPr>
+                <a:t>Concentric Concept Development in Scripture</a:t>
+              </a:r>
+            </a:p>
+          </p:txBody>
+        </p:sp>
+      </p:grpSp>
+      <p:grpSp>
+        <p:nvGrpSpPr>
+          <p:cNvPr id="13" name="Group 12">
+            <a:extLst>
+              <a:ext uri="{FF2B5EF4-FFF2-40B4-BE49-F238E27FC236}">
+                <a16:creationId xmlns:a16="http://schemas.microsoft.com/office/drawing/2014/main" id="{E984FB7A-A252-6C8B-CD4B-2B6914904BD6}"/>
+              </a:ext>
+            </a:extLst>
+          </p:cNvPr>
+          <p:cNvGrpSpPr/>
+          <p:nvPr/>
+        </p:nvGrpSpPr>
+        <p:grpSpPr>
+          <a:xfrm>
+            <a:off x="1371600" y="1164772"/>
+            <a:ext cx="7391400" cy="5486400"/>
+            <a:chOff x="1371600" y="1143000"/>
+            <a:chExt cx="7391400" cy="5486400"/>
+          </a:xfrm>
+        </p:grpSpPr>
+        <p:sp>
+          <p:nvSpPr>
+            <p:cNvPr id="14" name="Round Diagonal Corner Rectangle 13">
+              <a:extLst>
+                <a:ext uri="{FF2B5EF4-FFF2-40B4-BE49-F238E27FC236}">
+                  <a16:creationId xmlns:a16="http://schemas.microsoft.com/office/drawing/2014/main" id="{CF445AC1-3432-2826-1FED-4C907E5A0938}"/>
+                </a:ext>
+              </a:extLst>
+            </p:cNvPr>
+            <p:cNvSpPr/>
+            <p:nvPr/>
+          </p:nvSpPr>
+          <p:spPr>
+            <a:xfrm>
+              <a:off x="1371600" y="1143000"/>
+              <a:ext cx="7391400" cy="5486400"/>
+            </a:xfrm>
+            <a:prstGeom prst="round2DiagRect">
+              <a:avLst/>
+            </a:prstGeom>
+          </p:spPr>
+          <p:style>
+            <a:lnRef idx="2">
+              <a:schemeClr val="accent1">
+                <a:shade val="15000"/>
+              </a:schemeClr>
+            </a:lnRef>
+            <a:fillRef idx="1">
+              <a:schemeClr val="accent1"/>
+            </a:fillRef>
+            <a:effectRef idx="0">
+              <a:schemeClr val="accent1"/>
+            </a:effectRef>
+            <a:fontRef idx="minor">
+              <a:schemeClr val="lt1"/>
+            </a:fontRef>
+          </p:style>
+          <p:txBody>
+            <a:bodyPr rtlCol="0" anchor="ctr"/>
+            <a:lstStyle/>
+            <a:p>
+              <a:pPr marL="0" indent="0">
+                <a:buNone/>
+              </a:pPr>
+              <a:endParaRPr lang="en-US" sz="2400" dirty="0"/>
+            </a:p>
+            <a:p>
+              <a:pPr marL="0" indent="0">
+                <a:buNone/>
+              </a:pPr>
+              <a:r>
+                <a:rPr lang="en-US" sz="2800" dirty="0"/>
+                <a:t>A   God's blessing (vv.1-2)</a:t>
+              </a:r>
+            </a:p>
+            <a:p>
+              <a:pPr marL="0" indent="0">
+                <a:buNone/>
+              </a:pPr>
+              <a:endParaRPr lang="en-US" sz="2800" dirty="0"/>
+            </a:p>
+            <a:p>
+              <a:pPr marL="0" indent="0">
+                <a:buNone/>
+              </a:pPr>
+              <a:r>
+                <a:rPr lang="en-US" sz="2800" dirty="0"/>
+                <a:t>    B   Let the peoples praise You (v.3)</a:t>
+              </a:r>
+            </a:p>
+            <a:p>
+              <a:pPr marL="0" indent="0">
+                <a:buNone/>
+              </a:pPr>
+              <a:endParaRPr lang="en-US" sz="2800" dirty="0"/>
+            </a:p>
+            <a:p>
+              <a:pPr marL="0" indent="0">
+                <a:buNone/>
+              </a:pPr>
+              <a:r>
+                <a:rPr lang="en-US" sz="2800" dirty="0"/>
+                <a:t>        C   Let the nations rejoice (v.4)</a:t>
+              </a:r>
+            </a:p>
+            <a:p>
+              <a:pPr marL="0" indent="0">
+                <a:buNone/>
+              </a:pPr>
+              <a:endParaRPr lang="en-US" sz="2800" dirty="0"/>
+            </a:p>
+            <a:p>
+              <a:pPr marL="0" indent="0">
+                <a:buNone/>
+              </a:pPr>
+              <a:r>
+                <a:rPr lang="en-US" sz="2800" dirty="0"/>
+                <a:t>    B’  Let the peoples praise You (v.5)</a:t>
+              </a:r>
+            </a:p>
+            <a:p>
+              <a:pPr marL="0" indent="0">
+                <a:buNone/>
+              </a:pPr>
+              <a:endParaRPr lang="en-US" sz="2800" dirty="0"/>
+            </a:p>
+            <a:p>
+              <a:pPr marL="0" indent="0">
+                <a:buNone/>
+              </a:pPr>
+              <a:r>
+                <a:rPr lang="en-US" sz="2800" dirty="0"/>
+                <a:t>A’  God's blessing (vv.6-7)</a:t>
+              </a:r>
+              <a:endParaRPr lang="en-US" sz="1400" dirty="0"/>
+            </a:p>
+          </p:txBody>
+        </p:sp>
+        <p:sp>
+          <p:nvSpPr>
+            <p:cNvPr id="15" name="TextBox 14">
+              <a:extLst>
+                <a:ext uri="{FF2B5EF4-FFF2-40B4-BE49-F238E27FC236}">
+                  <a16:creationId xmlns:a16="http://schemas.microsoft.com/office/drawing/2014/main" id="{51008D80-DA93-E869-B721-E12DD73F8E42}"/>
+                </a:ext>
+              </a:extLst>
+            </p:cNvPr>
+            <p:cNvSpPr txBox="1"/>
+            <p:nvPr/>
+          </p:nvSpPr>
+          <p:spPr>
+            <a:xfrm>
+              <a:off x="2102618" y="1462585"/>
+              <a:ext cx="6173037" cy="400110"/>
+            </a:xfrm>
+            <a:prstGeom prst="rect">
+              <a:avLst/>
+            </a:prstGeom>
+            <a:noFill/>
+          </p:spPr>
+          <p:txBody>
+            <a:bodyPr wrap="square" rtlCol="0">
+              <a:spAutoFit/>
+            </a:bodyPr>
+            <a:lstStyle/>
+            <a:p>
+              <a:r>
+                <a:rPr lang="en-US" sz="2000" b="1" u="sng" dirty="0">
+                  <a:solidFill>
+                    <a:schemeClr val="bg1"/>
+                  </a:solidFill>
+                </a:rPr>
+                <a:t>Example – Psalm 67</a:t>
+              </a:r>
+            </a:p>
+          </p:txBody>
+        </p:sp>
+      </p:grpSp>
+      <p:grpSp>
+        <p:nvGrpSpPr>
+          <p:cNvPr id="21" name="Group 20">
+            <a:extLst>
+              <a:ext uri="{FF2B5EF4-FFF2-40B4-BE49-F238E27FC236}">
+                <a16:creationId xmlns:a16="http://schemas.microsoft.com/office/drawing/2014/main" id="{CFA0B668-AEA0-470B-773A-74DF411BC3BA}"/>
+              </a:ext>
+            </a:extLst>
+          </p:cNvPr>
+          <p:cNvGrpSpPr/>
+          <p:nvPr/>
+        </p:nvGrpSpPr>
+        <p:grpSpPr>
+          <a:xfrm>
+            <a:off x="457200" y="1164772"/>
+            <a:ext cx="8305800" cy="5486400"/>
+            <a:chOff x="457200" y="1143000"/>
+            <a:chExt cx="8305800" cy="5486400"/>
+          </a:xfrm>
+        </p:grpSpPr>
+        <p:sp>
+          <p:nvSpPr>
+            <p:cNvPr id="22" name="Round Diagonal Corner Rectangle 21">
+              <a:extLst>
+                <a:ext uri="{FF2B5EF4-FFF2-40B4-BE49-F238E27FC236}">
+                  <a16:creationId xmlns:a16="http://schemas.microsoft.com/office/drawing/2014/main" id="{D38B235B-E40D-139A-766A-19627611B6C7}"/>
+                </a:ext>
+              </a:extLst>
+            </p:cNvPr>
+            <p:cNvSpPr/>
+            <p:nvPr/>
+          </p:nvSpPr>
+          <p:spPr>
+            <a:xfrm>
+              <a:off x="457200" y="1143000"/>
+              <a:ext cx="8305800" cy="5486400"/>
+            </a:xfrm>
+            <a:prstGeom prst="round2DiagRect">
+              <a:avLst/>
+            </a:prstGeom>
+          </p:spPr>
+          <p:style>
+            <a:lnRef idx="2">
+              <a:schemeClr val="accent1">
+                <a:shade val="15000"/>
+              </a:schemeClr>
+            </a:lnRef>
+            <a:fillRef idx="1">
+              <a:schemeClr val="accent1"/>
+            </a:fillRef>
+            <a:effectRef idx="0">
+              <a:schemeClr val="accent1"/>
+            </a:effectRef>
+            <a:fontRef idx="minor">
+              <a:schemeClr val="lt1"/>
+            </a:fontRef>
+          </p:style>
+          <p:txBody>
+            <a:bodyPr rtlCol="0" anchor="ctr"/>
+            <a:lstStyle/>
+            <a:p>
+              <a:r>
+                <a:rPr lang="en-US" sz="2800" dirty="0"/>
+                <a:t>A     1:1–17 Gospel (Obedience of Faith)</a:t>
+              </a:r>
+            </a:p>
+            <a:p>
+              <a:r>
+                <a:rPr lang="en-US" sz="2800" dirty="0"/>
+                <a:t>    B    1:18–3:20 Humanity under sin</a:t>
+              </a:r>
+            </a:p>
+            <a:p>
+              <a:r>
+                <a:rPr lang="en-US" sz="2800" dirty="0"/>
+                <a:t>        C    3:21–5:21 Justification</a:t>
+              </a:r>
+            </a:p>
+            <a:p>
+              <a:r>
+                <a:rPr lang="en-US" sz="2800" dirty="0"/>
+                <a:t>            D    6–8 New life in Christ</a:t>
+              </a:r>
+            </a:p>
+            <a:p>
+              <a:r>
+                <a:rPr lang="en-US" sz="2800" dirty="0"/>
+                <a:t>                E    9–11 Israel and God's purposes</a:t>
+              </a:r>
+            </a:p>
+            <a:p>
+              <a:r>
+                <a:rPr lang="en-US" sz="2800" dirty="0"/>
+                <a:t>            D′    12–13 New life practiced</a:t>
+              </a:r>
+            </a:p>
+            <a:p>
+              <a:r>
+                <a:rPr lang="en-US" sz="2800" dirty="0"/>
+                <a:t>        C′    14–15 Justification lived in community</a:t>
+              </a:r>
+            </a:p>
+            <a:p>
+              <a:r>
+                <a:rPr lang="en-US" sz="2800" dirty="0"/>
+                <a:t>    B′    15:14–33 Gospel ministry of Grace</a:t>
+              </a:r>
+            </a:p>
+            <a:p>
+              <a:r>
+                <a:rPr lang="en-US" sz="2800" dirty="0"/>
+                <a:t>A′    16 Doxology (Obedience of Faith)</a:t>
+              </a:r>
+            </a:p>
+          </p:txBody>
+        </p:sp>
+        <p:sp>
+          <p:nvSpPr>
+            <p:cNvPr id="23" name="TextBox 22">
+              <a:extLst>
+                <a:ext uri="{FF2B5EF4-FFF2-40B4-BE49-F238E27FC236}">
+                  <a16:creationId xmlns:a16="http://schemas.microsoft.com/office/drawing/2014/main" id="{806D91A3-1B39-2F2F-05E2-58D448FB4AE1}"/>
+                </a:ext>
+              </a:extLst>
+            </p:cNvPr>
+            <p:cNvSpPr txBox="1"/>
+            <p:nvPr/>
+          </p:nvSpPr>
+          <p:spPr>
+            <a:xfrm>
+              <a:off x="2667000" y="1466484"/>
+              <a:ext cx="3902030" cy="400110"/>
+            </a:xfrm>
+            <a:prstGeom prst="rect">
+              <a:avLst/>
+            </a:prstGeom>
+            <a:noFill/>
+          </p:spPr>
+          <p:txBody>
+            <a:bodyPr wrap="none" rtlCol="0">
+              <a:spAutoFit/>
+            </a:bodyPr>
+            <a:lstStyle/>
+            <a:p>
+              <a:r>
+                <a:rPr lang="en-US" sz="2000" b="1" u="sng" dirty="0">
+                  <a:solidFill>
+                    <a:schemeClr val="bg1"/>
+                  </a:solidFill>
+                </a:rPr>
+                <a:t>ROMANS – Concentric Outline</a:t>
+              </a:r>
+            </a:p>
+          </p:txBody>
+        </p:sp>
+      </p:grpSp>
     </p:spTree>
     <p:extLst>
       <p:ext uri="{BB962C8B-B14F-4D97-AF65-F5344CB8AC3E}">
@@ -6842,6 +7184,432 @@
   <p:clrMapOvr>
     <a:masterClrMapping/>
   </p:clrMapOvr>
+  <p:timing>
+    <p:tnLst>
+      <p:par>
+        <p:cTn id="1" dur="indefinite" restart="never" nodeType="tmRoot">
+          <p:childTnLst>
+            <p:seq concurrent="1" nextAc="seek">
+              <p:cTn id="2" dur="indefinite" nodeType="mainSeq">
+                <p:childTnLst>
+                  <p:par>
+                    <p:cTn id="3" fill="hold">
+                      <p:stCondLst>
+                        <p:cond delay="indefinite"/>
+                      </p:stCondLst>
+                      <p:childTnLst>
+                        <p:par>
+                          <p:cTn id="4" fill="hold">
+                            <p:stCondLst>
+                              <p:cond delay="0"/>
+                            </p:stCondLst>
+                            <p:childTnLst>
+                              <p:par>
+                                <p:cTn id="5" presetID="42" presetClass="entr" presetSubtype="0" fill="hold" nodeType="clickEffect">
+                                  <p:stCondLst>
+                                    <p:cond delay="0"/>
+                                  </p:stCondLst>
+                                  <p:childTnLst>
+                                    <p:set>
+                                      <p:cBhvr>
+                                        <p:cTn id="6" dur="1" fill="hold">
+                                          <p:stCondLst>
+                                            <p:cond delay="0"/>
+                                          </p:stCondLst>
+                                        </p:cTn>
+                                        <p:tgtEl>
+                                          <p:spTgt spid="9"/>
+                                        </p:tgtEl>
+                                        <p:attrNameLst>
+                                          <p:attrName>style.visibility</p:attrName>
+                                        </p:attrNameLst>
+                                      </p:cBhvr>
+                                      <p:to>
+                                        <p:strVal val="visible"/>
+                                      </p:to>
+                                    </p:set>
+                                    <p:animEffect transition="in" filter="fade">
+                                      <p:cBhvr>
+                                        <p:cTn id="7" dur="1000"/>
+                                        <p:tgtEl>
+                                          <p:spTgt spid="9"/>
+                                        </p:tgtEl>
+                                      </p:cBhvr>
+                                    </p:animEffect>
+                                    <p:anim calcmode="lin" valueType="num">
+                                      <p:cBhvr>
+                                        <p:cTn id="8" dur="1000" fill="hold"/>
+                                        <p:tgtEl>
+                                          <p:spTgt spid="9"/>
+                                        </p:tgtEl>
+                                        <p:attrNameLst>
+                                          <p:attrName>ppt_x</p:attrName>
+                                        </p:attrNameLst>
+                                      </p:cBhvr>
+                                      <p:tavLst>
+                                        <p:tav tm="0">
+                                          <p:val>
+                                            <p:strVal val="#ppt_x"/>
+                                          </p:val>
+                                        </p:tav>
+                                        <p:tav tm="100000">
+                                          <p:val>
+                                            <p:strVal val="#ppt_x"/>
+                                          </p:val>
+                                        </p:tav>
+                                      </p:tavLst>
+                                    </p:anim>
+                                    <p:anim calcmode="lin" valueType="num">
+                                      <p:cBhvr>
+                                        <p:cTn id="9" dur="1000" fill="hold"/>
+                                        <p:tgtEl>
+                                          <p:spTgt spid="9"/>
+                                        </p:tgtEl>
+                                        <p:attrNameLst>
+                                          <p:attrName>ppt_y</p:attrName>
+                                        </p:attrNameLst>
+                                      </p:cBhvr>
+                                      <p:tavLst>
+                                        <p:tav tm="0">
+                                          <p:val>
+                                            <p:strVal val="#ppt_y+.1"/>
+                                          </p:val>
+                                        </p:tav>
+                                        <p:tav tm="100000">
+                                          <p:val>
+                                            <p:strVal val="#ppt_y"/>
+                                          </p:val>
+                                        </p:tav>
+                                      </p:tavLst>
+                                    </p:anim>
+                                  </p:childTnLst>
+                                </p:cTn>
+                              </p:par>
+                            </p:childTnLst>
+                          </p:cTn>
+                        </p:par>
+                      </p:childTnLst>
+                    </p:cTn>
+                  </p:par>
+                  <p:par>
+                    <p:cTn id="10" fill="hold">
+                      <p:stCondLst>
+                        <p:cond delay="indefinite"/>
+                      </p:stCondLst>
+                      <p:childTnLst>
+                        <p:par>
+                          <p:cTn id="11" fill="hold">
+                            <p:stCondLst>
+                              <p:cond delay="0"/>
+                            </p:stCondLst>
+                            <p:childTnLst>
+                              <p:par>
+                                <p:cTn id="12" presetID="42" presetClass="entr" presetSubtype="0" fill="hold" nodeType="clickEffect">
+                                  <p:stCondLst>
+                                    <p:cond delay="0"/>
+                                  </p:stCondLst>
+                                  <p:childTnLst>
+                                    <p:set>
+                                      <p:cBhvr>
+                                        <p:cTn id="13" dur="1" fill="hold">
+                                          <p:stCondLst>
+                                            <p:cond delay="0"/>
+                                          </p:stCondLst>
+                                        </p:cTn>
+                                        <p:tgtEl>
+                                          <p:spTgt spid="10"/>
+                                        </p:tgtEl>
+                                        <p:attrNameLst>
+                                          <p:attrName>style.visibility</p:attrName>
+                                        </p:attrNameLst>
+                                      </p:cBhvr>
+                                      <p:to>
+                                        <p:strVal val="visible"/>
+                                      </p:to>
+                                    </p:set>
+                                    <p:animEffect transition="in" filter="fade">
+                                      <p:cBhvr>
+                                        <p:cTn id="14" dur="1000"/>
+                                        <p:tgtEl>
+                                          <p:spTgt spid="10"/>
+                                        </p:tgtEl>
+                                      </p:cBhvr>
+                                    </p:animEffect>
+                                    <p:anim calcmode="lin" valueType="num">
+                                      <p:cBhvr>
+                                        <p:cTn id="15" dur="1000" fill="hold"/>
+                                        <p:tgtEl>
+                                          <p:spTgt spid="10"/>
+                                        </p:tgtEl>
+                                        <p:attrNameLst>
+                                          <p:attrName>ppt_x</p:attrName>
+                                        </p:attrNameLst>
+                                      </p:cBhvr>
+                                      <p:tavLst>
+                                        <p:tav tm="0">
+                                          <p:val>
+                                            <p:strVal val="#ppt_x"/>
+                                          </p:val>
+                                        </p:tav>
+                                        <p:tav tm="100000">
+                                          <p:val>
+                                            <p:strVal val="#ppt_x"/>
+                                          </p:val>
+                                        </p:tav>
+                                      </p:tavLst>
+                                    </p:anim>
+                                    <p:anim calcmode="lin" valueType="num">
+                                      <p:cBhvr>
+                                        <p:cTn id="16" dur="1000" fill="hold"/>
+                                        <p:tgtEl>
+                                          <p:spTgt spid="10"/>
+                                        </p:tgtEl>
+                                        <p:attrNameLst>
+                                          <p:attrName>ppt_y</p:attrName>
+                                        </p:attrNameLst>
+                                      </p:cBhvr>
+                                      <p:tavLst>
+                                        <p:tav tm="0">
+                                          <p:val>
+                                            <p:strVal val="#ppt_y+.1"/>
+                                          </p:val>
+                                        </p:tav>
+                                        <p:tav tm="100000">
+                                          <p:val>
+                                            <p:strVal val="#ppt_y"/>
+                                          </p:val>
+                                        </p:tav>
+                                      </p:tavLst>
+                                    </p:anim>
+                                  </p:childTnLst>
+                                </p:cTn>
+                              </p:par>
+                            </p:childTnLst>
+                          </p:cTn>
+                        </p:par>
+                      </p:childTnLst>
+                    </p:cTn>
+                  </p:par>
+                  <p:par>
+                    <p:cTn id="17" fill="hold">
+                      <p:stCondLst>
+                        <p:cond delay="indefinite"/>
+                      </p:stCondLst>
+                      <p:childTnLst>
+                        <p:par>
+                          <p:cTn id="18" fill="hold">
+                            <p:stCondLst>
+                              <p:cond delay="0"/>
+                            </p:stCondLst>
+                            <p:childTnLst>
+                              <p:par>
+                                <p:cTn id="19" presetID="42" presetClass="entr" presetSubtype="0" fill="hold" nodeType="clickEffect">
+                                  <p:stCondLst>
+                                    <p:cond delay="0"/>
+                                  </p:stCondLst>
+                                  <p:childTnLst>
+                                    <p:set>
+                                      <p:cBhvr>
+                                        <p:cTn id="20" dur="1" fill="hold">
+                                          <p:stCondLst>
+                                            <p:cond delay="0"/>
+                                          </p:stCondLst>
+                                        </p:cTn>
+                                        <p:tgtEl>
+                                          <p:spTgt spid="13"/>
+                                        </p:tgtEl>
+                                        <p:attrNameLst>
+                                          <p:attrName>style.visibility</p:attrName>
+                                        </p:attrNameLst>
+                                      </p:cBhvr>
+                                      <p:to>
+                                        <p:strVal val="visible"/>
+                                      </p:to>
+                                    </p:set>
+                                    <p:animEffect transition="in" filter="fade">
+                                      <p:cBhvr>
+                                        <p:cTn id="21" dur="1000"/>
+                                        <p:tgtEl>
+                                          <p:spTgt spid="13"/>
+                                        </p:tgtEl>
+                                      </p:cBhvr>
+                                    </p:animEffect>
+                                    <p:anim calcmode="lin" valueType="num">
+                                      <p:cBhvr>
+                                        <p:cTn id="22" dur="1000" fill="hold"/>
+                                        <p:tgtEl>
+                                          <p:spTgt spid="13"/>
+                                        </p:tgtEl>
+                                        <p:attrNameLst>
+                                          <p:attrName>ppt_x</p:attrName>
+                                        </p:attrNameLst>
+                                      </p:cBhvr>
+                                      <p:tavLst>
+                                        <p:tav tm="0">
+                                          <p:val>
+                                            <p:strVal val="#ppt_x"/>
+                                          </p:val>
+                                        </p:tav>
+                                        <p:tav tm="100000">
+                                          <p:val>
+                                            <p:strVal val="#ppt_x"/>
+                                          </p:val>
+                                        </p:tav>
+                                      </p:tavLst>
+                                    </p:anim>
+                                    <p:anim calcmode="lin" valueType="num">
+                                      <p:cBhvr>
+                                        <p:cTn id="23" dur="1000" fill="hold"/>
+                                        <p:tgtEl>
+                                          <p:spTgt spid="13"/>
+                                        </p:tgtEl>
+                                        <p:attrNameLst>
+                                          <p:attrName>ppt_y</p:attrName>
+                                        </p:attrNameLst>
+                                      </p:cBhvr>
+                                      <p:tavLst>
+                                        <p:tav tm="0">
+                                          <p:val>
+                                            <p:strVal val="#ppt_y+.1"/>
+                                          </p:val>
+                                        </p:tav>
+                                        <p:tav tm="100000">
+                                          <p:val>
+                                            <p:strVal val="#ppt_y"/>
+                                          </p:val>
+                                        </p:tav>
+                                      </p:tavLst>
+                                    </p:anim>
+                                  </p:childTnLst>
+                                </p:cTn>
+                              </p:par>
+                            </p:childTnLst>
+                          </p:cTn>
+                        </p:par>
+                      </p:childTnLst>
+                    </p:cTn>
+                  </p:par>
+                  <p:par>
+                    <p:cTn id="24" fill="hold">
+                      <p:stCondLst>
+                        <p:cond delay="indefinite"/>
+                      </p:stCondLst>
+                      <p:childTnLst>
+                        <p:par>
+                          <p:cTn id="25" fill="hold">
+                            <p:stCondLst>
+                              <p:cond delay="0"/>
+                            </p:stCondLst>
+                            <p:childTnLst>
+                              <p:par>
+                                <p:cTn id="26" presetID="42" presetClass="entr" presetSubtype="0" fill="hold" nodeType="clickEffect">
+                                  <p:stCondLst>
+                                    <p:cond delay="0"/>
+                                  </p:stCondLst>
+                                  <p:childTnLst>
+                                    <p:set>
+                                      <p:cBhvr>
+                                        <p:cTn id="27" dur="1" fill="hold">
+                                          <p:stCondLst>
+                                            <p:cond delay="0"/>
+                                          </p:stCondLst>
+                                        </p:cTn>
+                                        <p:tgtEl>
+                                          <p:spTgt spid="21"/>
+                                        </p:tgtEl>
+                                        <p:attrNameLst>
+                                          <p:attrName>style.visibility</p:attrName>
+                                        </p:attrNameLst>
+                                      </p:cBhvr>
+                                      <p:to>
+                                        <p:strVal val="visible"/>
+                                      </p:to>
+                                    </p:set>
+                                    <p:animEffect transition="in" filter="fade">
+                                      <p:cBhvr>
+                                        <p:cTn id="28" dur="1000"/>
+                                        <p:tgtEl>
+                                          <p:spTgt spid="21"/>
+                                        </p:tgtEl>
+                                      </p:cBhvr>
+                                    </p:animEffect>
+                                    <p:anim calcmode="lin" valueType="num">
+                                      <p:cBhvr>
+                                        <p:cTn id="29" dur="1000" fill="hold"/>
+                                        <p:tgtEl>
+                                          <p:spTgt spid="21"/>
+                                        </p:tgtEl>
+                                        <p:attrNameLst>
+                                          <p:attrName>ppt_x</p:attrName>
+                                        </p:attrNameLst>
+                                      </p:cBhvr>
+                                      <p:tavLst>
+                                        <p:tav tm="0">
+                                          <p:val>
+                                            <p:strVal val="#ppt_x"/>
+                                          </p:val>
+                                        </p:tav>
+                                        <p:tav tm="100000">
+                                          <p:val>
+                                            <p:strVal val="#ppt_x"/>
+                                          </p:val>
+                                        </p:tav>
+                                      </p:tavLst>
+                                    </p:anim>
+                                    <p:anim calcmode="lin" valueType="num">
+                                      <p:cBhvr>
+                                        <p:cTn id="30" dur="1000" fill="hold"/>
+                                        <p:tgtEl>
+                                          <p:spTgt spid="21"/>
+                                        </p:tgtEl>
+                                        <p:attrNameLst>
+                                          <p:attrName>ppt_y</p:attrName>
+                                        </p:attrNameLst>
+                                      </p:cBhvr>
+                                      <p:tavLst>
+                                        <p:tav tm="0">
+                                          <p:val>
+                                            <p:strVal val="#ppt_y+.1"/>
+                                          </p:val>
+                                        </p:tav>
+                                        <p:tav tm="100000">
+                                          <p:val>
+                                            <p:strVal val="#ppt_y"/>
+                                          </p:val>
+                                        </p:tav>
+                                      </p:tavLst>
+                                    </p:anim>
+                                  </p:childTnLst>
+                                </p:cTn>
+                              </p:par>
+                            </p:childTnLst>
+                          </p:cTn>
+                        </p:par>
+                      </p:childTnLst>
+                    </p:cTn>
+                  </p:par>
+                </p:childTnLst>
+              </p:cTn>
+              <p:prevCondLst>
+                <p:cond evt="onPrev" delay="0">
+                  <p:tgtEl>
+                    <p:sldTgt/>
+                  </p:tgtEl>
+                </p:cond>
+              </p:prevCondLst>
+              <p:nextCondLst>
+                <p:cond evt="onNext" delay="0">
+                  <p:tgtEl>
+                    <p:sldTgt/>
+                  </p:tgtEl>
+                </p:cond>
+              </p:nextCondLst>
+            </p:seq>
+          </p:childTnLst>
+        </p:cTn>
+      </p:par>
+    </p:tnLst>
+  </p:timing>
 </p:sld>
 </file>
 
@@ -7069,7 +7837,21 @@
                 <a:ea typeface="ＭＳ Ｐゴシック" pitchFamily="-106" charset="-128"/>
                 <a:cs typeface="ＭＳ Ｐゴシック" pitchFamily="-106" charset="-128"/>
               </a:rPr>
-              <a:t>What is “the Obedience of Faith”?   Possibilities…</a:t>
+              <a:t>What is “the </a:t>
+            </a:r>
+            <a:r>
+              <a:rPr lang="en-US" sz="2400" b="1" u="sng" dirty="0">
+                <a:ea typeface="ＭＳ Ｐゴシック" pitchFamily="-106" charset="-128"/>
+                <a:cs typeface="ＭＳ Ｐゴシック" pitchFamily="-106" charset="-128"/>
+              </a:rPr>
+              <a:t>Obedience of Faith</a:t>
+            </a:r>
+            <a:r>
+              <a:rPr lang="en-US" sz="2400" b="1" dirty="0">
+                <a:ea typeface="ＭＳ Ｐゴシック" pitchFamily="-106" charset="-128"/>
+                <a:cs typeface="ＭＳ Ｐゴシック" pitchFamily="-106" charset="-128"/>
+              </a:rPr>
+              <a:t>”?   Possibilities…</a:t>
             </a:r>
           </a:p>
           <a:p>
@@ -9913,7 +10695,7 @@
             <a:pPr algn="l"/>
             <a:r>
               <a:rPr lang="en-US" sz="3600" dirty="0"/>
-              <a:t>God’s Sovereignty vs. Human Responsibility</a:t>
+              <a:t>The Just Shall Live by Faith</a:t>
             </a:r>
             <a:br>
               <a:rPr lang="en-US" dirty="0"/>
@@ -9927,7 +10709,7 @@
                   </a:schemeClr>
                 </a:solidFill>
               </a:rPr>
-              <a:t>God’s Purposes Will not Fail</a:t>
+              <a:t>God’s Reconsidering Romans 12-16</a:t>
             </a:r>
           </a:p>
         </p:txBody>
@@ -9946,8 +10728,8 @@
         </p:nvSpPr>
         <p:spPr>
           <a:xfrm>
-            <a:off x="154577" y="1066800"/>
-            <a:ext cx="8665029" cy="400110"/>
+            <a:off x="228599" y="1072243"/>
+            <a:ext cx="8665029" cy="1323439"/>
           </a:xfrm>
           <a:prstGeom prst="rect">
             <a:avLst/>
@@ -9961,12 +10743,46 @@
           <a:lstStyle/>
           <a:p>
             <a:r>
-              <a:rPr lang="en-US" sz="2000" b="1" i="1" dirty="0"/>
-              <a:t>Romans 8:26-30  </a:t>
-            </a:r>
-            <a:r>
-              <a:rPr lang="en-US" sz="2000" i="1" dirty="0"/>
-              <a:t>“</a:t>
+              <a:rPr lang="en-US" sz="2000" b="1" dirty="0">
+                <a:ea typeface="ＭＳ Ｐゴシック" pitchFamily="-106" charset="-128"/>
+                <a:cs typeface="ＭＳ Ｐゴシック" pitchFamily="-106" charset="-128"/>
+              </a:rPr>
+              <a:t>Instead of asking:</a:t>
+            </a:r>
+          </a:p>
+          <a:p>
+            <a:pPr marL="342900" indent="-342900">
+              <a:buFont typeface="Arial" panose="020B0604020202020204" pitchFamily="34" charset="0"/>
+              <a:buChar char="•"/>
+            </a:pPr>
+            <a:r>
+              <a:rPr lang="en-US" sz="2000" dirty="0">
+                <a:ea typeface="ＭＳ Ｐゴシック" pitchFamily="-106" charset="-128"/>
+                <a:cs typeface="ＭＳ Ｐゴシック" pitchFamily="-106" charset="-128"/>
+              </a:rPr>
+              <a:t>What does faith produce?</a:t>
+            </a:r>
+          </a:p>
+          <a:p>
+            <a:r>
+              <a:rPr lang="en-US" sz="2000" b="1" dirty="0">
+                <a:ea typeface="ＭＳ Ｐゴシック" pitchFamily="-106" charset="-128"/>
+                <a:cs typeface="ＭＳ Ｐゴシック" pitchFamily="-106" charset="-128"/>
+              </a:rPr>
+              <a:t>Paul may be asking:</a:t>
+            </a:r>
+          </a:p>
+          <a:p>
+            <a:pPr marL="342900" indent="-342900">
+              <a:buFont typeface="Arial" panose="020B0604020202020204" pitchFamily="34" charset="0"/>
+              <a:buChar char="•"/>
+            </a:pPr>
+            <a:r>
+              <a:rPr lang="en-US" sz="2000" dirty="0">
+                <a:ea typeface="ＭＳ Ｐゴシック" pitchFamily="-106" charset="-128"/>
+                <a:cs typeface="ＭＳ Ｐゴシック" pitchFamily="-106" charset="-128"/>
+              </a:rPr>
+              <a:t>What does faith look like when lived?</a:t>
             </a:r>
           </a:p>
         </p:txBody>
@@ -9985,8 +10801,8 @@
         </p:nvSpPr>
         <p:spPr>
           <a:xfrm>
-            <a:off x="228600" y="3186495"/>
-            <a:ext cx="8588828" cy="400110"/>
+            <a:off x="250370" y="2482768"/>
+            <a:ext cx="8588828" cy="1938992"/>
           </a:xfrm>
           <a:prstGeom prst="rect">
             <a:avLst/>
@@ -10000,8 +10816,166 @@
           <a:lstStyle/>
           <a:p>
             <a:r>
-              <a:rPr lang="en-US" sz="2000" dirty="0"/>
-              <a:t>Paul</a:t>
+              <a:rPr lang="en-US" sz="2000" b="1" dirty="0">
+                <a:ea typeface="ＭＳ Ｐゴシック" pitchFamily="-106" charset="-128"/>
+                <a:cs typeface="ＭＳ Ｐゴシック" pitchFamily="-106" charset="-128"/>
+              </a:rPr>
+              <a:t>Romans 12</a:t>
+            </a:r>
+            <a:endParaRPr lang="en-US" sz="2000" dirty="0">
+              <a:ea typeface="ＭＳ Ｐゴシック" pitchFamily="-106" charset="-128"/>
+              <a:cs typeface="ＭＳ Ｐゴシック" pitchFamily="-106" charset="-128"/>
+            </a:endParaRPr>
+          </a:p>
+          <a:p>
+            <a:pPr marL="342900" indent="-342900">
+              <a:buFont typeface="Arial" panose="020B0604020202020204" pitchFamily="34" charset="0"/>
+              <a:buChar char="•"/>
+            </a:pPr>
+            <a:r>
+              <a:rPr lang="en-US" sz="2000" dirty="0">
+                <a:ea typeface="ＭＳ Ｐゴシック" pitchFamily="-106" charset="-128"/>
+                <a:cs typeface="ＭＳ Ｐゴシック" pitchFamily="-106" charset="-128"/>
+              </a:rPr>
+              <a:t>Faith presents itself as a living sacrifice.</a:t>
+            </a:r>
+          </a:p>
+          <a:p>
+            <a:pPr marL="342900" indent="-342900">
+              <a:buFont typeface="Arial" panose="020B0604020202020204" pitchFamily="34" charset="0"/>
+              <a:buChar char="•"/>
+            </a:pPr>
+            <a:r>
+              <a:rPr lang="en-US" sz="2000" dirty="0">
+                <a:ea typeface="ＭＳ Ｐゴシック" pitchFamily="-106" charset="-128"/>
+                <a:cs typeface="ＭＳ Ｐゴシック" pitchFamily="-106" charset="-128"/>
+              </a:rPr>
+              <a:t>Faith serves.</a:t>
+            </a:r>
+          </a:p>
+          <a:p>
+            <a:pPr marL="342900" indent="-342900">
+              <a:buFont typeface="Arial" panose="020B0604020202020204" pitchFamily="34" charset="0"/>
+              <a:buChar char="•"/>
+            </a:pPr>
+            <a:r>
+              <a:rPr lang="en-US" sz="2000" dirty="0">
+                <a:ea typeface="ＭＳ Ｐゴシック" pitchFamily="-106" charset="-128"/>
+                <a:cs typeface="ＭＳ Ｐゴシック" pitchFamily="-106" charset="-128"/>
+              </a:rPr>
+              <a:t>Faith loves.</a:t>
+            </a:r>
+          </a:p>
+          <a:p>
+            <a:pPr marL="342900" indent="-342900">
+              <a:buFont typeface="Arial" panose="020B0604020202020204" pitchFamily="34" charset="0"/>
+              <a:buChar char="•"/>
+            </a:pPr>
+            <a:r>
+              <a:rPr lang="en-US" sz="2000" dirty="0">
+                <a:ea typeface="ＭＳ Ｐゴシック" pitchFamily="-106" charset="-128"/>
+                <a:cs typeface="ＭＳ Ｐゴシック" pitchFamily="-106" charset="-128"/>
+              </a:rPr>
+              <a:t>Faith blesses enemies.</a:t>
+            </a:r>
+          </a:p>
+          <a:p>
+            <a:r>
+              <a:rPr lang="en-US" sz="2000" i="1" dirty="0">
+                <a:ea typeface="ＭＳ Ｐゴシック" pitchFamily="-106" charset="-128"/>
+                <a:cs typeface="ＭＳ Ｐゴシック" pitchFamily="-106" charset="-128"/>
+              </a:rPr>
+              <a:t>These are not additions to faith.  They are faith embodied.</a:t>
+            </a:r>
+          </a:p>
+        </p:txBody>
+      </p:sp>
+      <p:sp>
+        <p:nvSpPr>
+          <p:cNvPr id="5" name="TextBox 4">
+            <a:extLst>
+              <a:ext uri="{FF2B5EF4-FFF2-40B4-BE49-F238E27FC236}">
+                <a16:creationId xmlns:a16="http://schemas.microsoft.com/office/drawing/2014/main" id="{A422A206-757B-E36B-FC63-C28702219C7A}"/>
+              </a:ext>
+            </a:extLst>
+          </p:cNvPr>
+          <p:cNvSpPr txBox="1"/>
+          <p:nvPr/>
+        </p:nvSpPr>
+        <p:spPr>
+          <a:xfrm>
+            <a:off x="228598" y="4508846"/>
+            <a:ext cx="8665029" cy="1938992"/>
+          </a:xfrm>
+          <a:prstGeom prst="rect">
+            <a:avLst/>
+          </a:prstGeom>
+          <a:noFill/>
+        </p:spPr>
+        <p:txBody>
+          <a:bodyPr wrap="square" rtlCol="0">
+            <a:spAutoFit/>
+          </a:bodyPr>
+          <a:lstStyle/>
+          <a:p>
+            <a:r>
+              <a:rPr lang="en-US" sz="2000" b="1" dirty="0">
+                <a:ea typeface="ＭＳ Ｐゴシック" pitchFamily="-106" charset="-128"/>
+                <a:cs typeface="ＭＳ Ｐゴシック" pitchFamily="-106" charset="-128"/>
+              </a:rPr>
+              <a:t>Romans 13</a:t>
+            </a:r>
+            <a:endParaRPr lang="en-US" sz="2000" dirty="0">
+              <a:ea typeface="ＭＳ Ｐゴシック" pitchFamily="-106" charset="-128"/>
+              <a:cs typeface="ＭＳ Ｐゴシック" pitchFamily="-106" charset="-128"/>
+            </a:endParaRPr>
+          </a:p>
+          <a:p>
+            <a:pPr marL="342900" indent="-342900">
+              <a:buFont typeface="Arial" panose="020B0604020202020204" pitchFamily="34" charset="0"/>
+              <a:buChar char="•"/>
+            </a:pPr>
+            <a:r>
+              <a:rPr lang="en-US" sz="2000" dirty="0">
+                <a:ea typeface="ＭＳ Ｐゴシック" pitchFamily="-106" charset="-128"/>
+                <a:cs typeface="ＭＳ Ｐゴシック" pitchFamily="-106" charset="-128"/>
+              </a:rPr>
+              <a:t>Faith submits to God’s ordained authority.</a:t>
+            </a:r>
+          </a:p>
+          <a:p>
+            <a:pPr marL="342900" indent="-342900">
+              <a:buFont typeface="Arial" panose="020B0604020202020204" pitchFamily="34" charset="0"/>
+              <a:buChar char="•"/>
+            </a:pPr>
+            <a:r>
+              <a:rPr lang="en-US" sz="2000" dirty="0">
+                <a:ea typeface="ＭＳ Ｐゴシック" pitchFamily="-106" charset="-128"/>
+                <a:cs typeface="ＭＳ Ｐゴシック" pitchFamily="-106" charset="-128"/>
+              </a:rPr>
+              <a:t>Faith pays its obligations.</a:t>
+            </a:r>
+          </a:p>
+          <a:p>
+            <a:pPr marL="342900" indent="-342900">
+              <a:buFont typeface="Arial" panose="020B0604020202020204" pitchFamily="34" charset="0"/>
+              <a:buChar char="•"/>
+            </a:pPr>
+            <a:r>
+              <a:rPr lang="en-US" sz="2000" dirty="0">
+                <a:ea typeface="ＭＳ Ｐゴシック" pitchFamily="-106" charset="-128"/>
+                <a:cs typeface="ＭＳ Ｐゴシック" pitchFamily="-106" charset="-128"/>
+              </a:rPr>
+              <a:t>Faith loves its neighbor.</a:t>
+            </a:r>
+          </a:p>
+          <a:p>
+            <a:r>
+              <a:rPr lang="en-US" sz="2000" i="1" dirty="0">
+                <a:ea typeface="ＭＳ Ｐゴシック" pitchFamily="-106" charset="-128"/>
+                <a:cs typeface="ＭＳ Ｐゴシック" pitchFamily="-106" charset="-128"/>
+              </a:rPr>
+              <a:t>Again, this is not faith plus obedience.  This is faith expressing its true nature.</a:t>
             </a:r>
           </a:p>
         </p:txBody>
@@ -10123,6 +11097,105 @@
                       </p:childTnLst>
                     </p:cTn>
                   </p:par>
+                  <p:par>
+                    <p:cTn id="10" fill="hold">
+                      <p:stCondLst>
+                        <p:cond delay="indefinite"/>
+                      </p:stCondLst>
+                      <p:childTnLst>
+                        <p:par>
+                          <p:cTn id="11" fill="hold">
+                            <p:stCondLst>
+                              <p:cond delay="0"/>
+                            </p:stCondLst>
+                            <p:childTnLst>
+                              <p:par>
+                                <p:cTn id="12" presetID="42" presetClass="entr" presetSubtype="0" fill="hold" grpId="0" nodeType="clickEffect">
+                                  <p:stCondLst>
+                                    <p:cond delay="0"/>
+                                  </p:stCondLst>
+                                  <p:childTnLst>
+                                    <p:set>
+                                      <p:cBhvr>
+                                        <p:cTn id="13" dur="1" fill="hold">
+                                          <p:stCondLst>
+                                            <p:cond delay="0"/>
+                                          </p:stCondLst>
+                                        </p:cTn>
+                                        <p:tgtEl>
+                                          <p:spTgt spid="5"/>
+                                        </p:tgtEl>
+                                        <p:attrNameLst>
+                                          <p:attrName>style.visibility</p:attrName>
+                                        </p:attrNameLst>
+                                      </p:cBhvr>
+                                      <p:to>
+                                        <p:strVal val="visible"/>
+                                      </p:to>
+                                    </p:set>
+                                    <p:animEffect transition="in" filter="fade">
+                                      <p:cBhvr>
+                                        <p:cTn id="14" dur="1000"/>
+                                        <p:tgtEl>
+                                          <p:spTgt spid="5"/>
+                                        </p:tgtEl>
+                                      </p:cBhvr>
+                                    </p:animEffect>
+                                    <p:anim calcmode="lin" valueType="num">
+                                      <p:cBhvr>
+                                        <p:cTn id="15" dur="1000" fill="hold"/>
+                                        <p:tgtEl>
+                                          <p:spTgt spid="5"/>
+                                        </p:tgtEl>
+                                        <p:attrNameLst>
+                                          <p:attrName>ppt_x</p:attrName>
+                                        </p:attrNameLst>
+                                      </p:cBhvr>
+                                      <p:tavLst>
+                                        <p:tav tm="0">
+                                          <p:val>
+                                            <p:strVal val="#ppt_x"/>
+                                          </p:val>
+                                        </p:tav>
+                                        <p:tav tm="100000">
+                                          <p:val>
+                                            <p:strVal val="#ppt_x"/>
+                                          </p:val>
+                                        </p:tav>
+                                      </p:tavLst>
+                                    </p:anim>
+                                    <p:anim calcmode="lin" valueType="num">
+                                      <p:cBhvr>
+                                        <p:cTn id="16" dur="1000" fill="hold"/>
+                                        <p:tgtEl>
+                                          <p:spTgt spid="5"/>
+                                        </p:tgtEl>
+                                        <p:attrNameLst>
+                                          <p:attrName>ppt_y</p:attrName>
+                                        </p:attrNameLst>
+                                      </p:cBhvr>
+                                      <p:tavLst>
+                                        <p:tav tm="0">
+                                          <p:val>
+                                            <p:strVal val="#ppt_y+.1"/>
+                                          </p:val>
+                                        </p:tav>
+                                        <p:tav tm="100000">
+                                          <p:val>
+                                            <p:strVal val="#ppt_y"/>
+                                          </p:val>
+                                        </p:tav>
+                                      </p:tavLst>
+                                    </p:anim>
+                                  </p:childTnLst>
+                                </p:cTn>
+                              </p:par>
+                            </p:childTnLst>
+                          </p:cTn>
+                        </p:par>
+                      </p:childTnLst>
+                    </p:cTn>
+                  </p:par>
                 </p:childTnLst>
               </p:cTn>
               <p:prevCondLst>
@@ -10146,12 +11219,727 @@
     </p:tnLst>
     <p:bldLst>
       <p:bldP spid="4" grpId="0"/>
+      <p:bldP spid="5" grpId="0"/>
     </p:bldLst>
   </p:timing>
 </p:sld>
 </file>
 
 <file path=ppt/slides/slide6.xml><?xml version="1.0" encoding="utf-8"?>
+<p:sld xmlns:a="http://schemas.openxmlformats.org/drawingml/2006/main" xmlns:r="http://schemas.openxmlformats.org/officeDocument/2006/relationships" xmlns:p="http://schemas.openxmlformats.org/presentationml/2006/main">
+  <p:cSld>
+    <p:spTree>
+      <p:nvGrpSpPr>
+        <p:cNvPr id="1" name="">
+          <a:extLst>
+            <a:ext uri="{FF2B5EF4-FFF2-40B4-BE49-F238E27FC236}">
+              <a16:creationId xmlns:a16="http://schemas.microsoft.com/office/drawing/2014/main" id="{98DD8670-4F8A-8907-9DB7-F2FBD90E7666}"/>
+            </a:ext>
+          </a:extLst>
+        </p:cNvPr>
+        <p:cNvGrpSpPr/>
+        <p:nvPr/>
+      </p:nvGrpSpPr>
+      <p:grpSpPr>
+        <a:xfrm>
+          <a:off x="0" y="0"/>
+          <a:ext cx="0" cy="0"/>
+          <a:chOff x="0" y="0"/>
+          <a:chExt cx="0" cy="0"/>
+        </a:xfrm>
+      </p:grpSpPr>
+      <p:sp>
+        <p:nvSpPr>
+          <p:cNvPr id="2" name="Title 1">
+            <a:extLst>
+              <a:ext uri="{FF2B5EF4-FFF2-40B4-BE49-F238E27FC236}">
+                <a16:creationId xmlns:a16="http://schemas.microsoft.com/office/drawing/2014/main" id="{AB8A0D54-04E8-17BB-0285-47FB2D3FD74F}"/>
+              </a:ext>
+            </a:extLst>
+          </p:cNvPr>
+          <p:cNvSpPr>
+            <a:spLocks noGrp="1"/>
+          </p:cNvSpPr>
+          <p:nvPr>
+            <p:ph type="title"/>
+          </p:nvPr>
+        </p:nvSpPr>
+        <p:spPr>
+          <a:xfrm>
+            <a:off x="152400" y="0"/>
+            <a:ext cx="8915400" cy="914400"/>
+          </a:xfrm>
+        </p:spPr>
+        <p:txBody>
+          <a:bodyPr>
+            <a:normAutofit fontScale="90000"/>
+          </a:bodyPr>
+          <a:lstStyle/>
+          <a:p>
+            <a:pPr algn="l"/>
+            <a:r>
+              <a:rPr lang="en-US" sz="3600" dirty="0"/>
+              <a:t>The Just Shall Live by Faith</a:t>
+            </a:r>
+            <a:br>
+              <a:rPr lang="en-US" dirty="0"/>
+            </a:br>
+            <a:r>
+              <a:rPr lang="en-US" sz="2400" dirty="0">
+                <a:solidFill>
+                  <a:schemeClr val="tx2">
+                    <a:lumMod val="60000"/>
+                    <a:lumOff val="40000"/>
+                  </a:schemeClr>
+                </a:solidFill>
+              </a:rPr>
+              <a:t>God’s Reconsidering Romans 12-16</a:t>
+            </a:r>
+          </a:p>
+        </p:txBody>
+      </p:sp>
+      <p:sp>
+        <p:nvSpPr>
+          <p:cNvPr id="4" name="TextBox 3">
+            <a:extLst>
+              <a:ext uri="{FF2B5EF4-FFF2-40B4-BE49-F238E27FC236}">
+                <a16:creationId xmlns:a16="http://schemas.microsoft.com/office/drawing/2014/main" id="{11043960-D9B6-5D92-3177-E1F6291C3AE7}"/>
+              </a:ext>
+            </a:extLst>
+          </p:cNvPr>
+          <p:cNvSpPr txBox="1"/>
+          <p:nvPr/>
+        </p:nvSpPr>
+        <p:spPr>
+          <a:xfrm>
+            <a:off x="244928" y="1143000"/>
+            <a:ext cx="8588828" cy="1323439"/>
+          </a:xfrm>
+          <a:prstGeom prst="rect">
+            <a:avLst/>
+          </a:prstGeom>
+          <a:noFill/>
+        </p:spPr>
+        <p:txBody>
+          <a:bodyPr wrap="square" rtlCol="0">
+            <a:spAutoFit/>
+          </a:bodyPr>
+          <a:lstStyle/>
+          <a:p>
+            <a:r>
+              <a:rPr lang="en-US" sz="2000" b="1" dirty="0">
+                <a:ea typeface="ＭＳ Ｐゴシック" pitchFamily="-106" charset="-128"/>
+                <a:cs typeface="ＭＳ Ｐゴシック" pitchFamily="-106" charset="-128"/>
+              </a:rPr>
+              <a:t>Romans 14</a:t>
+            </a:r>
+            <a:endParaRPr lang="en-US" sz="2000" dirty="0">
+              <a:ea typeface="ＭＳ Ｐゴシック" pitchFamily="-106" charset="-128"/>
+              <a:cs typeface="ＭＳ Ｐゴシック" pitchFamily="-106" charset="-128"/>
+            </a:endParaRPr>
+          </a:p>
+          <a:p>
+            <a:pPr marL="342900" indent="-342900">
+              <a:buFont typeface="Arial" panose="020B0604020202020204" pitchFamily="34" charset="0"/>
+              <a:buChar char="•"/>
+            </a:pPr>
+            <a:r>
+              <a:rPr lang="en-US" sz="2000" dirty="0">
+                <a:ea typeface="ＭＳ Ｐゴシック" pitchFamily="-106" charset="-128"/>
+                <a:cs typeface="ＭＳ Ｐゴシック" pitchFamily="-106" charset="-128"/>
+              </a:rPr>
+              <a:t>Faith respects conscience.</a:t>
+            </a:r>
+          </a:p>
+          <a:p>
+            <a:pPr marL="342900" indent="-342900">
+              <a:buFont typeface="Arial" panose="020B0604020202020204" pitchFamily="34" charset="0"/>
+              <a:buChar char="•"/>
+            </a:pPr>
+            <a:r>
+              <a:rPr lang="en-US" sz="2000" dirty="0">
+                <a:ea typeface="ＭＳ Ｐゴシック" pitchFamily="-106" charset="-128"/>
+                <a:cs typeface="ＭＳ Ｐゴシック" pitchFamily="-106" charset="-128"/>
+              </a:rPr>
+              <a:t>Faith refuses to judge fellow servants of God.</a:t>
+            </a:r>
+          </a:p>
+          <a:p>
+            <a:pPr marL="342900" indent="-342900">
+              <a:buFont typeface="Arial" panose="020B0604020202020204" pitchFamily="34" charset="0"/>
+              <a:buChar char="•"/>
+            </a:pPr>
+            <a:r>
+              <a:rPr lang="en-US" sz="2000" dirty="0">
+                <a:ea typeface="ＭＳ Ｐゴシック" pitchFamily="-106" charset="-128"/>
+                <a:cs typeface="ＭＳ Ｐゴシック" pitchFamily="-106" charset="-128"/>
+              </a:rPr>
+              <a:t>Faith trusts God enough to leave judgment in His hands.</a:t>
+            </a:r>
+          </a:p>
+        </p:txBody>
+      </p:sp>
+      <p:sp>
+        <p:nvSpPr>
+          <p:cNvPr id="5" name="TextBox 4">
+            <a:extLst>
+              <a:ext uri="{FF2B5EF4-FFF2-40B4-BE49-F238E27FC236}">
+                <a16:creationId xmlns:a16="http://schemas.microsoft.com/office/drawing/2014/main" id="{10CC1BC1-60C1-D3B3-021A-45A9140A614F}"/>
+              </a:ext>
+            </a:extLst>
+          </p:cNvPr>
+          <p:cNvSpPr txBox="1"/>
+          <p:nvPr/>
+        </p:nvSpPr>
+        <p:spPr>
+          <a:xfrm>
+            <a:off x="244928" y="2695039"/>
+            <a:ext cx="8588828" cy="1323439"/>
+          </a:xfrm>
+          <a:prstGeom prst="rect">
+            <a:avLst/>
+          </a:prstGeom>
+          <a:noFill/>
+        </p:spPr>
+        <p:txBody>
+          <a:bodyPr wrap="square" rtlCol="0">
+            <a:spAutoFit/>
+          </a:bodyPr>
+          <a:lstStyle/>
+          <a:p>
+            <a:r>
+              <a:rPr lang="en-US" sz="2000" b="1" dirty="0">
+                <a:ea typeface="ＭＳ Ｐゴシック" pitchFamily="-106" charset="-128"/>
+                <a:cs typeface="ＭＳ Ｐゴシック" pitchFamily="-106" charset="-128"/>
+              </a:rPr>
+              <a:t>Romans 15</a:t>
+            </a:r>
+            <a:endParaRPr lang="en-US" sz="2000" dirty="0">
+              <a:ea typeface="ＭＳ Ｐゴシック" pitchFamily="-106" charset="-128"/>
+              <a:cs typeface="ＭＳ Ｐゴシック" pitchFamily="-106" charset="-128"/>
+            </a:endParaRPr>
+          </a:p>
+          <a:p>
+            <a:pPr marL="342900" indent="-342900">
+              <a:buFont typeface="Arial" panose="020B0604020202020204" pitchFamily="34" charset="0"/>
+              <a:buChar char="•"/>
+            </a:pPr>
+            <a:r>
+              <a:rPr lang="en-US" sz="2000" dirty="0">
+                <a:ea typeface="ＭＳ Ｐゴシック" pitchFamily="-106" charset="-128"/>
+                <a:cs typeface="ＭＳ Ｐゴシック" pitchFamily="-106" charset="-128"/>
+              </a:rPr>
+              <a:t>Faith bears the weak.</a:t>
+            </a:r>
+          </a:p>
+          <a:p>
+            <a:pPr marL="342900" indent="-342900">
+              <a:buFont typeface="Arial" panose="020B0604020202020204" pitchFamily="34" charset="0"/>
+              <a:buChar char="•"/>
+            </a:pPr>
+            <a:r>
+              <a:rPr lang="en-US" sz="2000" dirty="0">
+                <a:ea typeface="ＭＳ Ｐゴシック" pitchFamily="-106" charset="-128"/>
+                <a:cs typeface="ＭＳ Ｐゴシック" pitchFamily="-106" charset="-128"/>
+              </a:rPr>
+              <a:t>Faith sacrifices personal rights.</a:t>
+            </a:r>
+          </a:p>
+          <a:p>
+            <a:pPr marL="342900" indent="-342900">
+              <a:buFont typeface="Arial" panose="020B0604020202020204" pitchFamily="34" charset="0"/>
+              <a:buChar char="•"/>
+            </a:pPr>
+            <a:r>
+              <a:rPr lang="en-US" sz="2000" dirty="0">
+                <a:ea typeface="ＭＳ Ｐゴシック" pitchFamily="-106" charset="-128"/>
+                <a:cs typeface="ＭＳ Ｐゴシック" pitchFamily="-106" charset="-128"/>
+              </a:rPr>
+              <a:t>Faith seeks unity.</a:t>
+            </a:r>
+          </a:p>
+        </p:txBody>
+      </p:sp>
+      <p:sp>
+        <p:nvSpPr>
+          <p:cNvPr id="6" name="TextBox 5">
+            <a:extLst>
+              <a:ext uri="{FF2B5EF4-FFF2-40B4-BE49-F238E27FC236}">
+                <a16:creationId xmlns:a16="http://schemas.microsoft.com/office/drawing/2014/main" id="{6173C859-1157-C833-935C-C8E846F61054}"/>
+              </a:ext>
+            </a:extLst>
+          </p:cNvPr>
+          <p:cNvSpPr txBox="1"/>
+          <p:nvPr/>
+        </p:nvSpPr>
+        <p:spPr>
+          <a:xfrm>
+            <a:off x="277585" y="4247078"/>
+            <a:ext cx="8665029" cy="1323439"/>
+          </a:xfrm>
+          <a:prstGeom prst="rect">
+            <a:avLst/>
+          </a:prstGeom>
+          <a:noFill/>
+        </p:spPr>
+        <p:txBody>
+          <a:bodyPr wrap="square" rtlCol="0">
+            <a:spAutoFit/>
+          </a:bodyPr>
+          <a:lstStyle/>
+          <a:p>
+            <a:r>
+              <a:rPr lang="en-US" sz="2000" b="1" dirty="0">
+                <a:ea typeface="ＭＳ Ｐゴシック" pitchFamily="-106" charset="-128"/>
+                <a:cs typeface="ＭＳ Ｐゴシック" pitchFamily="-106" charset="-128"/>
+              </a:rPr>
+              <a:t>Romans 16</a:t>
+            </a:r>
+            <a:endParaRPr lang="en-US" sz="2000" dirty="0">
+              <a:ea typeface="ＭＳ Ｐゴシック" pitchFamily="-106" charset="-128"/>
+              <a:cs typeface="ＭＳ Ｐゴシック" pitchFamily="-106" charset="-128"/>
+            </a:endParaRPr>
+          </a:p>
+          <a:p>
+            <a:pPr marL="342900" indent="-342900">
+              <a:buFont typeface="Arial" panose="020B0604020202020204" pitchFamily="34" charset="0"/>
+              <a:buChar char="•"/>
+            </a:pPr>
+            <a:r>
+              <a:rPr lang="en-US" sz="2000" dirty="0">
+                <a:ea typeface="ＭＳ Ｐゴシック" pitchFamily="-106" charset="-128"/>
+                <a:cs typeface="ＭＳ Ｐゴシック" pitchFamily="-106" charset="-128"/>
+              </a:rPr>
+              <a:t>Faith remains loyal to apostolic truth.</a:t>
+            </a:r>
+          </a:p>
+          <a:p>
+            <a:pPr marL="342900" indent="-342900">
+              <a:buFont typeface="Arial" panose="020B0604020202020204" pitchFamily="34" charset="0"/>
+              <a:buChar char="•"/>
+            </a:pPr>
+            <a:r>
+              <a:rPr lang="en-US" sz="2000" dirty="0">
+                <a:ea typeface="ＭＳ Ｐゴシック" pitchFamily="-106" charset="-128"/>
+                <a:cs typeface="ＭＳ Ｐゴシック" pitchFamily="-106" charset="-128"/>
+              </a:rPr>
+              <a:t>Faith recognizes faithful laborers.</a:t>
+            </a:r>
+          </a:p>
+          <a:p>
+            <a:pPr marL="342900" indent="-342900">
+              <a:buFont typeface="Arial" panose="020B0604020202020204" pitchFamily="34" charset="0"/>
+              <a:buChar char="•"/>
+            </a:pPr>
+            <a:r>
+              <a:rPr lang="en-US" sz="2000" dirty="0">
+                <a:ea typeface="ＭＳ Ｐゴシック" pitchFamily="-106" charset="-128"/>
+                <a:cs typeface="ＭＳ Ｐゴシック" pitchFamily="-106" charset="-128"/>
+              </a:rPr>
+              <a:t>Faith rejects false teaching.</a:t>
+            </a:r>
+          </a:p>
+        </p:txBody>
+      </p:sp>
+      <p:sp>
+        <p:nvSpPr>
+          <p:cNvPr id="7" name="TextBox 6">
+            <a:extLst>
+              <a:ext uri="{FF2B5EF4-FFF2-40B4-BE49-F238E27FC236}">
+                <a16:creationId xmlns:a16="http://schemas.microsoft.com/office/drawing/2014/main" id="{4EC0924C-F4EC-595D-F32E-4A5CB60D9458}"/>
+              </a:ext>
+            </a:extLst>
+          </p:cNvPr>
+          <p:cNvSpPr txBox="1"/>
+          <p:nvPr/>
+        </p:nvSpPr>
+        <p:spPr>
+          <a:xfrm>
+            <a:off x="277585" y="5799117"/>
+            <a:ext cx="8523515" cy="707886"/>
+          </a:xfrm>
+          <a:prstGeom prst="rect">
+            <a:avLst/>
+          </a:prstGeom>
+          <a:noFill/>
+        </p:spPr>
+        <p:txBody>
+          <a:bodyPr wrap="square">
+            <a:spAutoFit/>
+          </a:bodyPr>
+          <a:lstStyle/>
+          <a:p>
+            <a:r>
+              <a:rPr lang="en-US" sz="2000" b="1" i="1" dirty="0">
+                <a:ea typeface="ＭＳ Ｐゴシック" pitchFamily="-106" charset="-128"/>
+                <a:cs typeface="ＭＳ Ｐゴシック" pitchFamily="-106" charset="-128"/>
+              </a:rPr>
+              <a:t>Romans 12-16 </a:t>
+            </a:r>
+            <a:r>
+              <a:rPr lang="en-US" sz="2000" i="1" dirty="0">
+                <a:ea typeface="ＭＳ Ｐゴシック" pitchFamily="-106" charset="-128"/>
+                <a:cs typeface="ＭＳ Ｐゴシック" pitchFamily="-106" charset="-128"/>
+              </a:rPr>
+              <a:t>is not merely a list of consequences that happen after faith.  </a:t>
+            </a:r>
+            <a:r>
+              <a:rPr lang="en-US" sz="2000" b="1" i="1" dirty="0">
+                <a:ea typeface="ＭＳ Ｐゴシック" pitchFamily="-106" charset="-128"/>
+                <a:cs typeface="ＭＳ Ｐゴシック" pitchFamily="-106" charset="-128"/>
+              </a:rPr>
+              <a:t>It is a description of faith itself in action.</a:t>
+            </a:r>
+            <a:endParaRPr lang="en-US" sz="2000" b="1" i="1" dirty="0"/>
+          </a:p>
+        </p:txBody>
+      </p:sp>
+    </p:spTree>
+    <p:extLst>
+      <p:ext uri="{BB962C8B-B14F-4D97-AF65-F5344CB8AC3E}">
+        <p14:creationId xmlns:p14="http://schemas.microsoft.com/office/powerpoint/2010/main" val="949585541"/>
+      </p:ext>
+    </p:extLst>
+  </p:cSld>
+  <p:clrMapOvr>
+    <a:masterClrMapping/>
+  </p:clrMapOvr>
+  <p:timing>
+    <p:tnLst>
+      <p:par>
+        <p:cTn id="1" dur="indefinite" restart="never" nodeType="tmRoot">
+          <p:childTnLst>
+            <p:seq concurrent="1" nextAc="seek">
+              <p:cTn id="2" dur="indefinite" nodeType="mainSeq">
+                <p:childTnLst>
+                  <p:par>
+                    <p:cTn id="3" fill="hold">
+                      <p:stCondLst>
+                        <p:cond delay="indefinite"/>
+                      </p:stCondLst>
+                      <p:childTnLst>
+                        <p:par>
+                          <p:cTn id="4" fill="hold">
+                            <p:stCondLst>
+                              <p:cond delay="0"/>
+                            </p:stCondLst>
+                            <p:childTnLst>
+                              <p:par>
+                                <p:cTn id="5" presetID="42" presetClass="entr" presetSubtype="0" fill="hold" grpId="0" nodeType="clickEffect">
+                                  <p:stCondLst>
+                                    <p:cond delay="0"/>
+                                  </p:stCondLst>
+                                  <p:childTnLst>
+                                    <p:set>
+                                      <p:cBhvr>
+                                        <p:cTn id="6" dur="1" fill="hold">
+                                          <p:stCondLst>
+                                            <p:cond delay="0"/>
+                                          </p:stCondLst>
+                                        </p:cTn>
+                                        <p:tgtEl>
+                                          <p:spTgt spid="5"/>
+                                        </p:tgtEl>
+                                        <p:attrNameLst>
+                                          <p:attrName>style.visibility</p:attrName>
+                                        </p:attrNameLst>
+                                      </p:cBhvr>
+                                      <p:to>
+                                        <p:strVal val="visible"/>
+                                      </p:to>
+                                    </p:set>
+                                    <p:animEffect transition="in" filter="fade">
+                                      <p:cBhvr>
+                                        <p:cTn id="7" dur="1000"/>
+                                        <p:tgtEl>
+                                          <p:spTgt spid="5"/>
+                                        </p:tgtEl>
+                                      </p:cBhvr>
+                                    </p:animEffect>
+                                    <p:anim calcmode="lin" valueType="num">
+                                      <p:cBhvr>
+                                        <p:cTn id="8" dur="1000" fill="hold"/>
+                                        <p:tgtEl>
+                                          <p:spTgt spid="5"/>
+                                        </p:tgtEl>
+                                        <p:attrNameLst>
+                                          <p:attrName>ppt_x</p:attrName>
+                                        </p:attrNameLst>
+                                      </p:cBhvr>
+                                      <p:tavLst>
+                                        <p:tav tm="0">
+                                          <p:val>
+                                            <p:strVal val="#ppt_x"/>
+                                          </p:val>
+                                        </p:tav>
+                                        <p:tav tm="100000">
+                                          <p:val>
+                                            <p:strVal val="#ppt_x"/>
+                                          </p:val>
+                                        </p:tav>
+                                      </p:tavLst>
+                                    </p:anim>
+                                    <p:anim calcmode="lin" valueType="num">
+                                      <p:cBhvr>
+                                        <p:cTn id="9" dur="1000" fill="hold"/>
+                                        <p:tgtEl>
+                                          <p:spTgt spid="5"/>
+                                        </p:tgtEl>
+                                        <p:attrNameLst>
+                                          <p:attrName>ppt_y</p:attrName>
+                                        </p:attrNameLst>
+                                      </p:cBhvr>
+                                      <p:tavLst>
+                                        <p:tav tm="0">
+                                          <p:val>
+                                            <p:strVal val="#ppt_y+.1"/>
+                                          </p:val>
+                                        </p:tav>
+                                        <p:tav tm="100000">
+                                          <p:val>
+                                            <p:strVal val="#ppt_y"/>
+                                          </p:val>
+                                        </p:tav>
+                                      </p:tavLst>
+                                    </p:anim>
+                                  </p:childTnLst>
+                                </p:cTn>
+                              </p:par>
+                            </p:childTnLst>
+                          </p:cTn>
+                        </p:par>
+                      </p:childTnLst>
+                    </p:cTn>
+                  </p:par>
+                  <p:par>
+                    <p:cTn id="10" fill="hold">
+                      <p:stCondLst>
+                        <p:cond delay="indefinite"/>
+                      </p:stCondLst>
+                      <p:childTnLst>
+                        <p:par>
+                          <p:cTn id="11" fill="hold">
+                            <p:stCondLst>
+                              <p:cond delay="0"/>
+                            </p:stCondLst>
+                            <p:childTnLst>
+                              <p:par>
+                                <p:cTn id="12" presetID="42" presetClass="entr" presetSubtype="0" fill="hold" grpId="0" nodeType="clickEffect">
+                                  <p:stCondLst>
+                                    <p:cond delay="0"/>
+                                  </p:stCondLst>
+                                  <p:childTnLst>
+                                    <p:set>
+                                      <p:cBhvr>
+                                        <p:cTn id="13" dur="1" fill="hold">
+                                          <p:stCondLst>
+                                            <p:cond delay="0"/>
+                                          </p:stCondLst>
+                                        </p:cTn>
+                                        <p:tgtEl>
+                                          <p:spTgt spid="6"/>
+                                        </p:tgtEl>
+                                        <p:attrNameLst>
+                                          <p:attrName>style.visibility</p:attrName>
+                                        </p:attrNameLst>
+                                      </p:cBhvr>
+                                      <p:to>
+                                        <p:strVal val="visible"/>
+                                      </p:to>
+                                    </p:set>
+                                    <p:animEffect transition="in" filter="fade">
+                                      <p:cBhvr>
+                                        <p:cTn id="14" dur="1000"/>
+                                        <p:tgtEl>
+                                          <p:spTgt spid="6"/>
+                                        </p:tgtEl>
+                                      </p:cBhvr>
+                                    </p:animEffect>
+                                    <p:anim calcmode="lin" valueType="num">
+                                      <p:cBhvr>
+                                        <p:cTn id="15" dur="1000" fill="hold"/>
+                                        <p:tgtEl>
+                                          <p:spTgt spid="6"/>
+                                        </p:tgtEl>
+                                        <p:attrNameLst>
+                                          <p:attrName>ppt_x</p:attrName>
+                                        </p:attrNameLst>
+                                      </p:cBhvr>
+                                      <p:tavLst>
+                                        <p:tav tm="0">
+                                          <p:val>
+                                            <p:strVal val="#ppt_x"/>
+                                          </p:val>
+                                        </p:tav>
+                                        <p:tav tm="100000">
+                                          <p:val>
+                                            <p:strVal val="#ppt_x"/>
+                                          </p:val>
+                                        </p:tav>
+                                      </p:tavLst>
+                                    </p:anim>
+                                    <p:anim calcmode="lin" valueType="num">
+                                      <p:cBhvr>
+                                        <p:cTn id="16" dur="1000" fill="hold"/>
+                                        <p:tgtEl>
+                                          <p:spTgt spid="6"/>
+                                        </p:tgtEl>
+                                        <p:attrNameLst>
+                                          <p:attrName>ppt_y</p:attrName>
+                                        </p:attrNameLst>
+                                      </p:cBhvr>
+                                      <p:tavLst>
+                                        <p:tav tm="0">
+                                          <p:val>
+                                            <p:strVal val="#ppt_y+.1"/>
+                                          </p:val>
+                                        </p:tav>
+                                        <p:tav tm="100000">
+                                          <p:val>
+                                            <p:strVal val="#ppt_y"/>
+                                          </p:val>
+                                        </p:tav>
+                                      </p:tavLst>
+                                    </p:anim>
+                                  </p:childTnLst>
+                                </p:cTn>
+                              </p:par>
+                            </p:childTnLst>
+                          </p:cTn>
+                        </p:par>
+                      </p:childTnLst>
+                    </p:cTn>
+                  </p:par>
+                  <p:par>
+                    <p:cTn id="17" fill="hold">
+                      <p:stCondLst>
+                        <p:cond delay="indefinite"/>
+                      </p:stCondLst>
+                      <p:childTnLst>
+                        <p:par>
+                          <p:cTn id="18" fill="hold">
+                            <p:stCondLst>
+                              <p:cond delay="0"/>
+                            </p:stCondLst>
+                            <p:childTnLst>
+                              <p:par>
+                                <p:cTn id="19" presetID="42" presetClass="entr" presetSubtype="0" fill="hold" grpId="0" nodeType="clickEffect">
+                                  <p:stCondLst>
+                                    <p:cond delay="0"/>
+                                  </p:stCondLst>
+                                  <p:childTnLst>
+                                    <p:set>
+                                      <p:cBhvr>
+                                        <p:cTn id="20" dur="1" fill="hold">
+                                          <p:stCondLst>
+                                            <p:cond delay="0"/>
+                                          </p:stCondLst>
+                                        </p:cTn>
+                                        <p:tgtEl>
+                                          <p:spTgt spid="7"/>
+                                        </p:tgtEl>
+                                        <p:attrNameLst>
+                                          <p:attrName>style.visibility</p:attrName>
+                                        </p:attrNameLst>
+                                      </p:cBhvr>
+                                      <p:to>
+                                        <p:strVal val="visible"/>
+                                      </p:to>
+                                    </p:set>
+                                    <p:animEffect transition="in" filter="fade">
+                                      <p:cBhvr>
+                                        <p:cTn id="21" dur="1000"/>
+                                        <p:tgtEl>
+                                          <p:spTgt spid="7"/>
+                                        </p:tgtEl>
+                                      </p:cBhvr>
+                                    </p:animEffect>
+                                    <p:anim calcmode="lin" valueType="num">
+                                      <p:cBhvr>
+                                        <p:cTn id="22" dur="1000" fill="hold"/>
+                                        <p:tgtEl>
+                                          <p:spTgt spid="7"/>
+                                        </p:tgtEl>
+                                        <p:attrNameLst>
+                                          <p:attrName>ppt_x</p:attrName>
+                                        </p:attrNameLst>
+                                      </p:cBhvr>
+                                      <p:tavLst>
+                                        <p:tav tm="0">
+                                          <p:val>
+                                            <p:strVal val="#ppt_x"/>
+                                          </p:val>
+                                        </p:tav>
+                                        <p:tav tm="100000">
+                                          <p:val>
+                                            <p:strVal val="#ppt_x"/>
+                                          </p:val>
+                                        </p:tav>
+                                      </p:tavLst>
+                                    </p:anim>
+                                    <p:anim calcmode="lin" valueType="num">
+                                      <p:cBhvr>
+                                        <p:cTn id="23" dur="1000" fill="hold"/>
+                                        <p:tgtEl>
+                                          <p:spTgt spid="7"/>
+                                        </p:tgtEl>
+                                        <p:attrNameLst>
+                                          <p:attrName>ppt_y</p:attrName>
+                                        </p:attrNameLst>
+                                      </p:cBhvr>
+                                      <p:tavLst>
+                                        <p:tav tm="0">
+                                          <p:val>
+                                            <p:strVal val="#ppt_y+.1"/>
+                                          </p:val>
+                                        </p:tav>
+                                        <p:tav tm="100000">
+                                          <p:val>
+                                            <p:strVal val="#ppt_y"/>
+                                          </p:val>
+                                        </p:tav>
+                                      </p:tavLst>
+                                    </p:anim>
+                                  </p:childTnLst>
+                                </p:cTn>
+                              </p:par>
+                            </p:childTnLst>
+                          </p:cTn>
+                        </p:par>
+                      </p:childTnLst>
+                    </p:cTn>
+                  </p:par>
+                </p:childTnLst>
+              </p:cTn>
+              <p:prevCondLst>
+                <p:cond evt="onPrev" delay="0">
+                  <p:tgtEl>
+                    <p:sldTgt/>
+                  </p:tgtEl>
+                </p:cond>
+              </p:prevCondLst>
+              <p:nextCondLst>
+                <p:cond evt="onNext" delay="0">
+                  <p:tgtEl>
+                    <p:sldTgt/>
+                  </p:tgtEl>
+                </p:cond>
+              </p:nextCondLst>
+            </p:seq>
+          </p:childTnLst>
+        </p:cTn>
+      </p:par>
+    </p:tnLst>
+    <p:bldLst>
+      <p:bldP spid="5" grpId="0"/>
+      <p:bldP spid="6" grpId="0"/>
+      <p:bldP spid="7" grpId="0"/>
+    </p:bldLst>
+  </p:timing>
+</p:sld>
+</file>
+
+<file path=ppt/slides/slide7.xml><?xml version="1.0" encoding="utf-8"?>
 <p:sld xmlns:a="http://schemas.openxmlformats.org/drawingml/2006/main" xmlns:r="http://schemas.openxmlformats.org/officeDocument/2006/relationships" xmlns:p="http://schemas.openxmlformats.org/presentationml/2006/main">
   <p:cSld>
     <p:spTree>
@@ -10205,7 +11993,7 @@
             <a:pPr algn="l"/>
             <a:r>
               <a:rPr lang="en-US" sz="3600" dirty="0"/>
-              <a:t>God’s Sovereignty vs. Human Responsibility</a:t>
+              <a:t>The Obedience of Faith</a:t>
             </a:r>
             <a:br>
               <a:rPr lang="en-US" dirty="0"/>
@@ -10219,7 +12007,7 @@
                   </a:schemeClr>
                 </a:solidFill>
               </a:rPr>
-              <a:t>God’s Purposes Will not Fail</a:t>
+              <a:t>Israel’s Failure Revisited (Romans 9-11)</a:t>
             </a:r>
           </a:p>
         </p:txBody>
@@ -10239,7 +12027,7 @@
         <p:spPr>
           <a:xfrm>
             <a:off x="154577" y="1066800"/>
-            <a:ext cx="8665029" cy="400110"/>
+            <a:ext cx="8665029" cy="2246769"/>
           </a:xfrm>
           <a:prstGeom prst="rect">
             <a:avLst/>
@@ -10253,12 +12041,137 @@
           <a:lstStyle/>
           <a:p>
             <a:r>
-              <a:rPr lang="en-US" sz="2000" b="1" i="1" dirty="0"/>
-              <a:t>Romans 8:26-30  </a:t>
-            </a:r>
-            <a:r>
-              <a:rPr lang="en-US" sz="2000" i="1" dirty="0"/>
-              <a:t>“</a:t>
+              <a:rPr lang="en-US" sz="2000" dirty="0">
+                <a:ea typeface="ＭＳ Ｐゴシック" pitchFamily="-106" charset="-128"/>
+                <a:cs typeface="ＭＳ Ｐゴシック" pitchFamily="-106" charset="-128"/>
+              </a:rPr>
+              <a:t>Many readers frame the issue as:</a:t>
+            </a:r>
+          </a:p>
+          <a:p>
+            <a:pPr marL="171450" indent="-171450" fontAlgn="ctr">
+              <a:buFont typeface="Arial" panose="020B0604020202020204" pitchFamily="34" charset="0"/>
+              <a:buChar char="•"/>
+            </a:pPr>
+            <a:r>
+              <a:rPr lang="en-US" sz="2000" dirty="0">
+                <a:ea typeface="ＭＳ Ｐゴシック" pitchFamily="-106" charset="-128"/>
+                <a:cs typeface="ＭＳ Ｐゴシック" pitchFamily="-106" charset="-128"/>
+              </a:rPr>
+              <a:t>Israel pursued </a:t>
+            </a:r>
+            <a:r>
+              <a:rPr lang="en-US" sz="2000" u="sng" dirty="0">
+                <a:ea typeface="ＭＳ Ｐゴシック" pitchFamily="-106" charset="-128"/>
+                <a:cs typeface="ＭＳ Ｐゴシック" pitchFamily="-106" charset="-128"/>
+              </a:rPr>
+              <a:t>works</a:t>
+            </a:r>
+            <a:r>
+              <a:rPr lang="en-US" sz="2000" dirty="0">
+                <a:ea typeface="ＭＳ Ｐゴシック" pitchFamily="-106" charset="-128"/>
+                <a:cs typeface="ＭＳ Ｐゴシック" pitchFamily="-106" charset="-128"/>
+              </a:rPr>
+              <a:t>.</a:t>
+            </a:r>
+          </a:p>
+          <a:p>
+            <a:pPr marL="171450" indent="-171450" fontAlgn="ctr">
+              <a:buFont typeface="Arial" panose="020B0604020202020204" pitchFamily="34" charset="0"/>
+              <a:buChar char="•"/>
+            </a:pPr>
+            <a:r>
+              <a:rPr lang="en-US" sz="2000" dirty="0">
+                <a:ea typeface="ＭＳ Ｐゴシック" pitchFamily="-106" charset="-128"/>
+                <a:cs typeface="ＭＳ Ｐゴシック" pitchFamily="-106" charset="-128"/>
+              </a:rPr>
+              <a:t>Gentiles pursued </a:t>
+            </a:r>
+            <a:r>
+              <a:rPr lang="en-US" sz="2000" u="sng" dirty="0">
+                <a:ea typeface="ＭＳ Ｐゴシック" pitchFamily="-106" charset="-128"/>
+                <a:cs typeface="ＭＳ Ｐゴシック" pitchFamily="-106" charset="-128"/>
+              </a:rPr>
+              <a:t>faith</a:t>
+            </a:r>
+            <a:r>
+              <a:rPr lang="en-US" sz="2000" dirty="0">
+                <a:ea typeface="ＭＳ Ｐゴシック" pitchFamily="-106" charset="-128"/>
+                <a:cs typeface="ＭＳ Ｐゴシック" pitchFamily="-106" charset="-128"/>
+              </a:rPr>
+              <a:t>.</a:t>
+            </a:r>
+          </a:p>
+          <a:p>
+            <a:r>
+              <a:rPr lang="en-US" sz="2000" dirty="0">
+                <a:ea typeface="ＭＳ Ｐゴシック" pitchFamily="-106" charset="-128"/>
+                <a:cs typeface="ＭＳ Ｐゴシック" pitchFamily="-106" charset="-128"/>
+              </a:rPr>
+              <a:t>Paul’s point seems deeper.</a:t>
+            </a:r>
+          </a:p>
+          <a:p>
+            <a:pPr marL="171450" indent="-171450">
+              <a:buFont typeface="Arial" panose="020B0604020202020204" pitchFamily="34" charset="0"/>
+              <a:buChar char="•"/>
+            </a:pPr>
+            <a:r>
+              <a:rPr lang="en-US" sz="2000" dirty="0">
+                <a:ea typeface="ＭＳ Ｐゴシック" pitchFamily="-106" charset="-128"/>
+                <a:cs typeface="ＭＳ Ｐゴシック" pitchFamily="-106" charset="-128"/>
+              </a:rPr>
+              <a:t>Israel often sought covenant blessing while resisting God’s word.</a:t>
+            </a:r>
+          </a:p>
+          <a:p>
+            <a:r>
+              <a:rPr lang="en-US" sz="2000" dirty="0">
+                <a:ea typeface="ＭＳ Ｐゴシック" pitchFamily="-106" charset="-128"/>
+                <a:cs typeface="ＭＳ Ｐゴシック" pitchFamily="-106" charset="-128"/>
+              </a:rPr>
+              <a:t>Consider </a:t>
+            </a:r>
+            <a:r>
+              <a:rPr lang="en-US" sz="2000" b="1" dirty="0">
+                <a:ea typeface="ＭＳ Ｐゴシック" pitchFamily="-106" charset="-128"/>
+                <a:cs typeface="ＭＳ Ｐゴシック" pitchFamily="-106" charset="-128"/>
+              </a:rPr>
+              <a:t>Romans 10:16</a:t>
+            </a:r>
+            <a:r>
+              <a:rPr lang="en-US" sz="2000" dirty="0">
+                <a:ea typeface="ＭＳ Ｐゴシック" pitchFamily="-106" charset="-128"/>
+                <a:cs typeface="ＭＳ Ｐゴシック" pitchFamily="-106" charset="-128"/>
+              </a:rPr>
+              <a:t>:</a:t>
+            </a:r>
+          </a:p>
+          <a:p>
+            <a:pPr marL="171450" indent="-171450">
+              <a:buFont typeface="Arial" panose="020B0604020202020204" pitchFamily="34" charset="0"/>
+              <a:buChar char="•"/>
+            </a:pPr>
+            <a:r>
+              <a:rPr lang="en-US" sz="2000" i="1" dirty="0">
+                <a:ea typeface="ＭＳ Ｐゴシック" pitchFamily="-106" charset="-128"/>
+                <a:cs typeface="ＭＳ Ｐゴシック" pitchFamily="-106" charset="-128"/>
+              </a:rPr>
+              <a:t>“But not all have </a:t>
+            </a:r>
+            <a:r>
+              <a:rPr lang="en-US" sz="2000" i="1" u="sng" dirty="0">
+                <a:ea typeface="ＭＳ Ｐゴシック" pitchFamily="-106" charset="-128"/>
+                <a:cs typeface="ＭＳ Ｐゴシック" pitchFamily="-106" charset="-128"/>
+              </a:rPr>
+              <a:t>obeyed</a:t>
+            </a:r>
+            <a:r>
+              <a:rPr lang="en-US" sz="2000" i="1" dirty="0">
+                <a:ea typeface="ＭＳ Ｐゴシック" pitchFamily="-106" charset="-128"/>
+                <a:cs typeface="ＭＳ Ｐゴシック" pitchFamily="-106" charset="-128"/>
+              </a:rPr>
+              <a:t> the good news.”</a:t>
             </a:r>
           </a:p>
         </p:txBody>
@@ -10277,8 +12190,8 @@
         </p:nvSpPr>
         <p:spPr>
           <a:xfrm>
-            <a:off x="228600" y="3186495"/>
-            <a:ext cx="8588828" cy="400110"/>
+            <a:off x="230778" y="3549875"/>
+            <a:ext cx="8588828" cy="2677656"/>
           </a:xfrm>
           <a:prstGeom prst="rect">
             <a:avLst/>
@@ -10292,8 +12205,132 @@
           <a:lstStyle/>
           <a:p>
             <a:r>
-              <a:rPr lang="en-US" sz="2000" dirty="0"/>
-              <a:t>Paul</a:t>
+              <a:rPr lang="en-US" sz="2000" dirty="0">
+                <a:ea typeface="ＭＳ Ｐゴシック" pitchFamily="-106" charset="-128"/>
+                <a:cs typeface="ＭＳ Ｐゴシック" pitchFamily="-106" charset="-128"/>
+              </a:rPr>
+              <a:t>Again, Paul equates </a:t>
+            </a:r>
+            <a:r>
+              <a:rPr lang="en-US" sz="2000" u="sng" dirty="0">
+                <a:ea typeface="ＭＳ Ｐゴシック" pitchFamily="-106" charset="-128"/>
+                <a:cs typeface="ＭＳ Ｐゴシック" pitchFamily="-106" charset="-128"/>
+              </a:rPr>
+              <a:t>believing</a:t>
+            </a:r>
+            <a:r>
+              <a:rPr lang="en-US" sz="2000" dirty="0">
+                <a:ea typeface="ＭＳ Ｐゴシック" pitchFamily="-106" charset="-128"/>
+                <a:cs typeface="ＭＳ Ｐゴシック" pitchFamily="-106" charset="-128"/>
+              </a:rPr>
+              <a:t> and </a:t>
+            </a:r>
+            <a:r>
+              <a:rPr lang="en-US" sz="2000" u="sng" dirty="0">
+                <a:ea typeface="ＭＳ Ｐゴシック" pitchFamily="-106" charset="-128"/>
+                <a:cs typeface="ＭＳ Ｐゴシック" pitchFamily="-106" charset="-128"/>
+              </a:rPr>
+              <a:t>obeying</a:t>
+            </a:r>
+            <a:r>
+              <a:rPr lang="en-US" sz="2000" dirty="0">
+                <a:ea typeface="ＭＳ Ｐゴシック" pitchFamily="-106" charset="-128"/>
+                <a:cs typeface="ＭＳ Ｐゴシック" pitchFamily="-106" charset="-128"/>
+              </a:rPr>
+              <a:t>.</a:t>
+            </a:r>
+          </a:p>
+          <a:p>
+            <a:pPr marL="171450" indent="-171450">
+              <a:buFont typeface="Arial" panose="020B0604020202020204" pitchFamily="34" charset="0"/>
+              <a:buChar char="•"/>
+            </a:pPr>
+            <a:r>
+              <a:rPr lang="en-US" sz="2000" dirty="0">
+                <a:ea typeface="ＭＳ Ｐゴシック" pitchFamily="-106" charset="-128"/>
+                <a:cs typeface="ＭＳ Ｐゴシック" pitchFamily="-106" charset="-128"/>
+              </a:rPr>
+              <a:t>The fundamental issue was not merely a lack of intellectual faith.</a:t>
+            </a:r>
+          </a:p>
+          <a:p>
+            <a:pPr marL="171450" indent="-171450">
+              <a:buFont typeface="Arial" panose="020B0604020202020204" pitchFamily="34" charset="0"/>
+              <a:buChar char="•"/>
+            </a:pPr>
+            <a:r>
+              <a:rPr lang="en-US" sz="2000" dirty="0">
+                <a:ea typeface="ＭＳ Ｐゴシック" pitchFamily="-106" charset="-128"/>
+                <a:cs typeface="ＭＳ Ｐゴシック" pitchFamily="-106" charset="-128"/>
+              </a:rPr>
+              <a:t>It was a refusal to submit to God’s righteousness.</a:t>
+            </a:r>
+          </a:p>
+          <a:p>
+            <a:pPr marL="171450" indent="-171450">
+              <a:buFont typeface="Arial" panose="020B0604020202020204" pitchFamily="34" charset="0"/>
+              <a:buChar char="•"/>
+            </a:pPr>
+            <a:r>
+              <a:rPr lang="en-US" sz="2000" i="1" dirty="0">
+                <a:ea typeface="ＭＳ Ｐゴシック" pitchFamily="-106" charset="-128"/>
+                <a:cs typeface="ＭＳ Ｐゴシック" pitchFamily="-106" charset="-128"/>
+              </a:rPr>
+              <a:t>“For ignoring the righteousness that comes from God, and seeking instead to establish their own righteousness, they did not </a:t>
+            </a:r>
+            <a:r>
+              <a:rPr lang="en-US" sz="2000" b="1" i="1" u="sng" dirty="0">
+                <a:ea typeface="ＭＳ Ｐゴシック" pitchFamily="-106" charset="-128"/>
+                <a:cs typeface="ＭＳ Ｐゴシック" pitchFamily="-106" charset="-128"/>
+              </a:rPr>
+              <a:t>submit</a:t>
+            </a:r>
+            <a:r>
+              <a:rPr lang="en-US" sz="2000" i="1" dirty="0">
+                <a:ea typeface="ＭＳ Ｐゴシック" pitchFamily="-106" charset="-128"/>
+                <a:cs typeface="ＭＳ Ｐゴシック" pitchFamily="-106" charset="-128"/>
+              </a:rPr>
+              <a:t> to God’s righteousness.” </a:t>
+            </a:r>
+            <a:r>
+              <a:rPr lang="en-US" sz="2000" dirty="0">
+                <a:ea typeface="ＭＳ Ｐゴシック" pitchFamily="-106" charset="-128"/>
+                <a:cs typeface="ＭＳ Ｐゴシック" pitchFamily="-106" charset="-128"/>
+              </a:rPr>
+              <a:t>(</a:t>
+            </a:r>
+            <a:r>
+              <a:rPr lang="en-US" sz="2000" b="1" dirty="0">
+                <a:ea typeface="ＭＳ Ｐゴシック" pitchFamily="-106" charset="-128"/>
+                <a:cs typeface="ＭＳ Ｐゴシック" pitchFamily="-106" charset="-128"/>
+              </a:rPr>
+              <a:t>Romans 10:3</a:t>
+            </a:r>
+            <a:r>
+              <a:rPr lang="en-US" sz="2000" dirty="0">
+                <a:ea typeface="ＭＳ Ｐゴシック" pitchFamily="-106" charset="-128"/>
+                <a:cs typeface="ＭＳ Ｐゴシック" pitchFamily="-106" charset="-128"/>
+              </a:rPr>
+              <a:t>)</a:t>
+            </a:r>
+          </a:p>
+          <a:p>
+            <a:pPr marL="171450" indent="-171450">
+              <a:buFont typeface="Arial" panose="020B0604020202020204" pitchFamily="34" charset="0"/>
+              <a:buChar char="•"/>
+            </a:pPr>
+            <a:endParaRPr lang="en-US" sz="2000" dirty="0">
+              <a:ea typeface="ＭＳ Ｐゴシック" pitchFamily="-106" charset="-128"/>
+              <a:cs typeface="ＭＳ Ｐゴシック" pitchFamily="-106" charset="-128"/>
+            </a:endParaRPr>
+          </a:p>
+          <a:p>
+            <a:r>
+              <a:rPr lang="en-US" sz="2800" b="1" dirty="0">
+                <a:ea typeface="ＭＳ Ｐゴシック" pitchFamily="-106" charset="-128"/>
+                <a:cs typeface="ＭＳ Ｐゴシック" pitchFamily="-106" charset="-128"/>
+              </a:rPr>
+              <a:t>What is the opposite of faith?  Unbelief?  No…</a:t>
             </a:r>
           </a:p>
         </p:txBody>
@@ -10329,7 +12366,7 @@
                             </p:stCondLst>
                             <p:childTnLst>
                               <p:par>
-                                <p:cTn id="5" presetID="42" presetClass="entr" presetSubtype="0" fill="hold" grpId="0" nodeType="clickEffect">
+                                <p:cTn id="5" presetID="42" presetClass="entr" presetSubtype="0" fill="hold" nodeType="clickEffect">
                                   <p:stCondLst>
                                     <p:cond delay="0"/>
                                   </p:stCondLst>
@@ -10342,7 +12379,11 @@
                                           </p:stCondLst>
                                         </p:cTn>
                                         <p:tgtEl>
-                                          <p:spTgt spid="4"/>
+                                          <p:spTgt spid="4">
+                                            <p:txEl>
+                                              <p:pRg st="0" end="0"/>
+                                            </p:txEl>
+                                          </p:spTgt>
                                         </p:tgtEl>
                                         <p:attrNameLst>
                                           <p:attrName>style.visibility</p:attrName>
@@ -10356,7 +12397,11 @@
                                       <p:cBhvr>
                                         <p:cTn id="7" dur="1000"/>
                                         <p:tgtEl>
-                                          <p:spTgt spid="4"/>
+                                          <p:spTgt spid="4">
+                                            <p:txEl>
+                                              <p:pRg st="0" end="0"/>
+                                            </p:txEl>
+                                          </p:spTgt>
                                         </p:tgtEl>
                                       </p:cBhvr>
                                     </p:animEffect>
@@ -10364,7 +12409,11 @@
                                       <p:cBhvr>
                                         <p:cTn id="8" dur="1000" fill="hold"/>
                                         <p:tgtEl>
-                                          <p:spTgt spid="4"/>
+                                          <p:spTgt spid="4">
+                                            <p:txEl>
+                                              <p:pRg st="0" end="0"/>
+                                            </p:txEl>
+                                          </p:spTgt>
                                         </p:tgtEl>
                                         <p:attrNameLst>
                                           <p:attrName>ppt_x</p:attrName>
@@ -10387,7 +12436,417 @@
                                       <p:cBhvr>
                                         <p:cTn id="9" dur="1000" fill="hold"/>
                                         <p:tgtEl>
-                                          <p:spTgt spid="4"/>
+                                          <p:spTgt spid="4">
+                                            <p:txEl>
+                                              <p:pRg st="0" end="0"/>
+                                            </p:txEl>
+                                          </p:spTgt>
+                                        </p:tgtEl>
+                                        <p:attrNameLst>
+                                          <p:attrName>ppt_y</p:attrName>
+                                        </p:attrNameLst>
+                                      </p:cBhvr>
+                                      <p:tavLst>
+                                        <p:tav tm="0">
+                                          <p:val>
+                                            <p:strVal val="#ppt_y+.1"/>
+                                          </p:val>
+                                        </p:tav>
+                                        <p:tav tm="100000">
+                                          <p:val>
+                                            <p:strVal val="#ppt_y"/>
+                                          </p:val>
+                                        </p:tav>
+                                      </p:tavLst>
+                                    </p:anim>
+                                  </p:childTnLst>
+                                </p:cTn>
+                              </p:par>
+                              <p:par>
+                                <p:cTn id="10" presetID="42" presetClass="entr" presetSubtype="0" fill="hold" nodeType="withEffect">
+                                  <p:stCondLst>
+                                    <p:cond delay="0"/>
+                                  </p:stCondLst>
+                                  <p:childTnLst>
+                                    <p:set>
+                                      <p:cBhvr>
+                                        <p:cTn id="11" dur="1" fill="hold">
+                                          <p:stCondLst>
+                                            <p:cond delay="0"/>
+                                          </p:stCondLst>
+                                        </p:cTn>
+                                        <p:tgtEl>
+                                          <p:spTgt spid="4">
+                                            <p:txEl>
+                                              <p:pRg st="1" end="1"/>
+                                            </p:txEl>
+                                          </p:spTgt>
+                                        </p:tgtEl>
+                                        <p:attrNameLst>
+                                          <p:attrName>style.visibility</p:attrName>
+                                        </p:attrNameLst>
+                                      </p:cBhvr>
+                                      <p:to>
+                                        <p:strVal val="visible"/>
+                                      </p:to>
+                                    </p:set>
+                                    <p:animEffect transition="in" filter="fade">
+                                      <p:cBhvr>
+                                        <p:cTn id="12" dur="1000"/>
+                                        <p:tgtEl>
+                                          <p:spTgt spid="4">
+                                            <p:txEl>
+                                              <p:pRg st="1" end="1"/>
+                                            </p:txEl>
+                                          </p:spTgt>
+                                        </p:tgtEl>
+                                      </p:cBhvr>
+                                    </p:animEffect>
+                                    <p:anim calcmode="lin" valueType="num">
+                                      <p:cBhvr>
+                                        <p:cTn id="13" dur="1000" fill="hold"/>
+                                        <p:tgtEl>
+                                          <p:spTgt spid="4">
+                                            <p:txEl>
+                                              <p:pRg st="1" end="1"/>
+                                            </p:txEl>
+                                          </p:spTgt>
+                                        </p:tgtEl>
+                                        <p:attrNameLst>
+                                          <p:attrName>ppt_x</p:attrName>
+                                        </p:attrNameLst>
+                                      </p:cBhvr>
+                                      <p:tavLst>
+                                        <p:tav tm="0">
+                                          <p:val>
+                                            <p:strVal val="#ppt_x"/>
+                                          </p:val>
+                                        </p:tav>
+                                        <p:tav tm="100000">
+                                          <p:val>
+                                            <p:strVal val="#ppt_x"/>
+                                          </p:val>
+                                        </p:tav>
+                                      </p:tavLst>
+                                    </p:anim>
+                                    <p:anim calcmode="lin" valueType="num">
+                                      <p:cBhvr>
+                                        <p:cTn id="14" dur="1000" fill="hold"/>
+                                        <p:tgtEl>
+                                          <p:spTgt spid="4">
+                                            <p:txEl>
+                                              <p:pRg st="1" end="1"/>
+                                            </p:txEl>
+                                          </p:spTgt>
+                                        </p:tgtEl>
+                                        <p:attrNameLst>
+                                          <p:attrName>ppt_y</p:attrName>
+                                        </p:attrNameLst>
+                                      </p:cBhvr>
+                                      <p:tavLst>
+                                        <p:tav tm="0">
+                                          <p:val>
+                                            <p:strVal val="#ppt_y+.1"/>
+                                          </p:val>
+                                        </p:tav>
+                                        <p:tav tm="100000">
+                                          <p:val>
+                                            <p:strVal val="#ppt_y"/>
+                                          </p:val>
+                                        </p:tav>
+                                      </p:tavLst>
+                                    </p:anim>
+                                  </p:childTnLst>
+                                </p:cTn>
+                              </p:par>
+                              <p:par>
+                                <p:cTn id="15" presetID="42" presetClass="entr" presetSubtype="0" fill="hold" nodeType="withEffect">
+                                  <p:stCondLst>
+                                    <p:cond delay="0"/>
+                                  </p:stCondLst>
+                                  <p:childTnLst>
+                                    <p:set>
+                                      <p:cBhvr>
+                                        <p:cTn id="16" dur="1" fill="hold">
+                                          <p:stCondLst>
+                                            <p:cond delay="0"/>
+                                          </p:stCondLst>
+                                        </p:cTn>
+                                        <p:tgtEl>
+                                          <p:spTgt spid="4">
+                                            <p:txEl>
+                                              <p:pRg st="2" end="2"/>
+                                            </p:txEl>
+                                          </p:spTgt>
+                                        </p:tgtEl>
+                                        <p:attrNameLst>
+                                          <p:attrName>style.visibility</p:attrName>
+                                        </p:attrNameLst>
+                                      </p:cBhvr>
+                                      <p:to>
+                                        <p:strVal val="visible"/>
+                                      </p:to>
+                                    </p:set>
+                                    <p:animEffect transition="in" filter="fade">
+                                      <p:cBhvr>
+                                        <p:cTn id="17" dur="1000"/>
+                                        <p:tgtEl>
+                                          <p:spTgt spid="4">
+                                            <p:txEl>
+                                              <p:pRg st="2" end="2"/>
+                                            </p:txEl>
+                                          </p:spTgt>
+                                        </p:tgtEl>
+                                      </p:cBhvr>
+                                    </p:animEffect>
+                                    <p:anim calcmode="lin" valueType="num">
+                                      <p:cBhvr>
+                                        <p:cTn id="18" dur="1000" fill="hold"/>
+                                        <p:tgtEl>
+                                          <p:spTgt spid="4">
+                                            <p:txEl>
+                                              <p:pRg st="2" end="2"/>
+                                            </p:txEl>
+                                          </p:spTgt>
+                                        </p:tgtEl>
+                                        <p:attrNameLst>
+                                          <p:attrName>ppt_x</p:attrName>
+                                        </p:attrNameLst>
+                                      </p:cBhvr>
+                                      <p:tavLst>
+                                        <p:tav tm="0">
+                                          <p:val>
+                                            <p:strVal val="#ppt_x"/>
+                                          </p:val>
+                                        </p:tav>
+                                        <p:tav tm="100000">
+                                          <p:val>
+                                            <p:strVal val="#ppt_x"/>
+                                          </p:val>
+                                        </p:tav>
+                                      </p:tavLst>
+                                    </p:anim>
+                                    <p:anim calcmode="lin" valueType="num">
+                                      <p:cBhvr>
+                                        <p:cTn id="19" dur="1000" fill="hold"/>
+                                        <p:tgtEl>
+                                          <p:spTgt spid="4">
+                                            <p:txEl>
+                                              <p:pRg st="2" end="2"/>
+                                            </p:txEl>
+                                          </p:spTgt>
+                                        </p:tgtEl>
+                                        <p:attrNameLst>
+                                          <p:attrName>ppt_y</p:attrName>
+                                        </p:attrNameLst>
+                                      </p:cBhvr>
+                                      <p:tavLst>
+                                        <p:tav tm="0">
+                                          <p:val>
+                                            <p:strVal val="#ppt_y+.1"/>
+                                          </p:val>
+                                        </p:tav>
+                                        <p:tav tm="100000">
+                                          <p:val>
+                                            <p:strVal val="#ppt_y"/>
+                                          </p:val>
+                                        </p:tav>
+                                      </p:tavLst>
+                                    </p:anim>
+                                  </p:childTnLst>
+                                </p:cTn>
+                              </p:par>
+                              <p:par>
+                                <p:cTn id="20" presetID="42" presetClass="entr" presetSubtype="0" fill="hold" nodeType="withEffect">
+                                  <p:stCondLst>
+                                    <p:cond delay="0"/>
+                                  </p:stCondLst>
+                                  <p:childTnLst>
+                                    <p:set>
+                                      <p:cBhvr>
+                                        <p:cTn id="21" dur="1" fill="hold">
+                                          <p:stCondLst>
+                                            <p:cond delay="0"/>
+                                          </p:stCondLst>
+                                        </p:cTn>
+                                        <p:tgtEl>
+                                          <p:spTgt spid="4">
+                                            <p:txEl>
+                                              <p:pRg st="3" end="3"/>
+                                            </p:txEl>
+                                          </p:spTgt>
+                                        </p:tgtEl>
+                                        <p:attrNameLst>
+                                          <p:attrName>style.visibility</p:attrName>
+                                        </p:attrNameLst>
+                                      </p:cBhvr>
+                                      <p:to>
+                                        <p:strVal val="visible"/>
+                                      </p:to>
+                                    </p:set>
+                                    <p:animEffect transition="in" filter="fade">
+                                      <p:cBhvr>
+                                        <p:cTn id="22" dur="1000"/>
+                                        <p:tgtEl>
+                                          <p:spTgt spid="4">
+                                            <p:txEl>
+                                              <p:pRg st="3" end="3"/>
+                                            </p:txEl>
+                                          </p:spTgt>
+                                        </p:tgtEl>
+                                      </p:cBhvr>
+                                    </p:animEffect>
+                                    <p:anim calcmode="lin" valueType="num">
+                                      <p:cBhvr>
+                                        <p:cTn id="23" dur="1000" fill="hold"/>
+                                        <p:tgtEl>
+                                          <p:spTgt spid="4">
+                                            <p:txEl>
+                                              <p:pRg st="3" end="3"/>
+                                            </p:txEl>
+                                          </p:spTgt>
+                                        </p:tgtEl>
+                                        <p:attrNameLst>
+                                          <p:attrName>ppt_x</p:attrName>
+                                        </p:attrNameLst>
+                                      </p:cBhvr>
+                                      <p:tavLst>
+                                        <p:tav tm="0">
+                                          <p:val>
+                                            <p:strVal val="#ppt_x"/>
+                                          </p:val>
+                                        </p:tav>
+                                        <p:tav tm="100000">
+                                          <p:val>
+                                            <p:strVal val="#ppt_x"/>
+                                          </p:val>
+                                        </p:tav>
+                                      </p:tavLst>
+                                    </p:anim>
+                                    <p:anim calcmode="lin" valueType="num">
+                                      <p:cBhvr>
+                                        <p:cTn id="24" dur="1000" fill="hold"/>
+                                        <p:tgtEl>
+                                          <p:spTgt spid="4">
+                                            <p:txEl>
+                                              <p:pRg st="3" end="3"/>
+                                            </p:txEl>
+                                          </p:spTgt>
+                                        </p:tgtEl>
+                                        <p:attrNameLst>
+                                          <p:attrName>ppt_y</p:attrName>
+                                        </p:attrNameLst>
+                                      </p:cBhvr>
+                                      <p:tavLst>
+                                        <p:tav tm="0">
+                                          <p:val>
+                                            <p:strVal val="#ppt_y+.1"/>
+                                          </p:val>
+                                        </p:tav>
+                                        <p:tav tm="100000">
+                                          <p:val>
+                                            <p:strVal val="#ppt_y"/>
+                                          </p:val>
+                                        </p:tav>
+                                      </p:tavLst>
+                                    </p:anim>
+                                  </p:childTnLst>
+                                </p:cTn>
+                              </p:par>
+                            </p:childTnLst>
+                          </p:cTn>
+                        </p:par>
+                      </p:childTnLst>
+                    </p:cTn>
+                  </p:par>
+                  <p:par>
+                    <p:cTn id="25" fill="hold">
+                      <p:stCondLst>
+                        <p:cond delay="indefinite"/>
+                      </p:stCondLst>
+                      <p:childTnLst>
+                        <p:par>
+                          <p:cTn id="26" fill="hold">
+                            <p:stCondLst>
+                              <p:cond delay="0"/>
+                            </p:stCondLst>
+                            <p:childTnLst>
+                              <p:par>
+                                <p:cTn id="27" presetID="42" presetClass="entr" presetSubtype="0" fill="hold" nodeType="clickEffect">
+                                  <p:stCondLst>
+                                    <p:cond delay="0"/>
+                                  </p:stCondLst>
+                                  <p:childTnLst>
+                                    <p:set>
+                                      <p:cBhvr>
+                                        <p:cTn id="28" dur="1" fill="hold">
+                                          <p:stCondLst>
+                                            <p:cond delay="0"/>
+                                          </p:stCondLst>
+                                        </p:cTn>
+                                        <p:tgtEl>
+                                          <p:spTgt spid="4">
+                                            <p:txEl>
+                                              <p:pRg st="5" end="5"/>
+                                            </p:txEl>
+                                          </p:spTgt>
+                                        </p:tgtEl>
+                                        <p:attrNameLst>
+                                          <p:attrName>style.visibility</p:attrName>
+                                        </p:attrNameLst>
+                                      </p:cBhvr>
+                                      <p:to>
+                                        <p:strVal val="visible"/>
+                                      </p:to>
+                                    </p:set>
+                                    <p:animEffect transition="in" filter="fade">
+                                      <p:cBhvr>
+                                        <p:cTn id="29" dur="1000"/>
+                                        <p:tgtEl>
+                                          <p:spTgt spid="4">
+                                            <p:txEl>
+                                              <p:pRg st="5" end="5"/>
+                                            </p:txEl>
+                                          </p:spTgt>
+                                        </p:tgtEl>
+                                      </p:cBhvr>
+                                    </p:animEffect>
+                                    <p:anim calcmode="lin" valueType="num">
+                                      <p:cBhvr>
+                                        <p:cTn id="30" dur="1000" fill="hold"/>
+                                        <p:tgtEl>
+                                          <p:spTgt spid="4">
+                                            <p:txEl>
+                                              <p:pRg st="5" end="5"/>
+                                            </p:txEl>
+                                          </p:spTgt>
+                                        </p:tgtEl>
+                                        <p:attrNameLst>
+                                          <p:attrName>ppt_x</p:attrName>
+                                        </p:attrNameLst>
+                                      </p:cBhvr>
+                                      <p:tavLst>
+                                        <p:tav tm="0">
+                                          <p:val>
+                                            <p:strVal val="#ppt_x"/>
+                                          </p:val>
+                                        </p:tav>
+                                        <p:tav tm="100000">
+                                          <p:val>
+                                            <p:strVal val="#ppt_x"/>
+                                          </p:val>
+                                        </p:tav>
+                                      </p:tavLst>
+                                    </p:anim>
+                                    <p:anim calcmode="lin" valueType="num">
+                                      <p:cBhvr>
+                                        <p:cTn id="31" dur="1000" fill="hold"/>
+                                        <p:tgtEl>
+                                          <p:spTgt spid="4">
+                                            <p:txEl>
+                                              <p:pRg st="5" end="5"/>
+                                            </p:txEl>
+                                          </p:spTgt>
                                         </p:tgtEl>
                                         <p:attrNameLst>
                                           <p:attrName>ppt_y</p:attrName>
@@ -10436,14 +12895,11 @@
         </p:cTn>
       </p:par>
     </p:tnLst>
-    <p:bldLst>
-      <p:bldP spid="4" grpId="0"/>
-    </p:bldLst>
   </p:timing>
 </p:sld>
 </file>
 
-<file path=ppt/slides/slide7.xml><?xml version="1.0" encoding="utf-8"?>
+<file path=ppt/slides/slide8.xml><?xml version="1.0" encoding="utf-8"?>
 <p:sld xmlns:a="http://schemas.openxmlformats.org/drawingml/2006/main" xmlns:r="http://schemas.openxmlformats.org/officeDocument/2006/relationships" xmlns:p="http://schemas.openxmlformats.org/presentationml/2006/main">
   <p:cSld>
     <p:spTree>
@@ -10497,7 +12953,7 @@
             <a:pPr algn="l"/>
             <a:r>
               <a:rPr lang="en-US" sz="3600" dirty="0"/>
-              <a:t>God’s Sovereignty vs. Human Responsibility</a:t>
+              <a:t>The Obedience of Faith</a:t>
             </a:r>
             <a:br>
               <a:rPr lang="en-US" dirty="0"/>
@@ -10511,7 +12967,7 @@
                   </a:schemeClr>
                 </a:solidFill>
               </a:rPr>
-              <a:t>God’s Purposes Will not Fail</a:t>
+              <a:t>God’s Romans, Galatians, and Hebrews Revisited</a:t>
             </a:r>
           </a:p>
         </p:txBody>
@@ -10531,7 +12987,7 @@
         <p:spPr>
           <a:xfrm>
             <a:off x="154577" y="1066800"/>
-            <a:ext cx="8665029" cy="400110"/>
+            <a:ext cx="8913223" cy="707886"/>
           </a:xfrm>
           <a:prstGeom prst="rect">
             <a:avLst/>
@@ -10545,12 +13001,25 @@
           <a:lstStyle/>
           <a:p>
             <a:r>
-              <a:rPr lang="en-US" sz="2000" b="1" i="1" dirty="0"/>
-              <a:t>Romans 8:26-30  </a:t>
-            </a:r>
-            <a:r>
-              <a:rPr lang="en-US" sz="2000" i="1" dirty="0"/>
-              <a:t>“</a:t>
+              <a:rPr lang="en-US" sz="2000" dirty="0">
+                <a:ea typeface="ＭＳ Ｐゴシック" pitchFamily="-106" charset="-128"/>
+                <a:cs typeface="ＭＳ Ｐゴシック" pitchFamily="-106" charset="-128"/>
+              </a:rPr>
+              <a:t>With “</a:t>
+            </a:r>
+            <a:r>
+              <a:rPr lang="en-US" sz="2000" i="1" dirty="0">
+                <a:ea typeface="ＭＳ Ｐゴシック" pitchFamily="-106" charset="-128"/>
+                <a:cs typeface="ＭＳ Ｐゴシック" pitchFamily="-106" charset="-128"/>
+              </a:rPr>
+              <a:t>the obedience of faith</a:t>
+            </a:r>
+            <a:r>
+              <a:rPr lang="en-US" sz="2000" dirty="0">
+                <a:ea typeface="ＭＳ Ｐゴシック" pitchFamily="-106" charset="-128"/>
+                <a:cs typeface="ＭＳ Ｐゴシック" pitchFamily="-106" charset="-128"/>
+              </a:rPr>
+              <a:t>” in view, the three books become even more unified.</a:t>
             </a:r>
           </a:p>
         </p:txBody>
@@ -10569,8 +13038,8 @@
         </p:nvSpPr>
         <p:spPr>
           <a:xfrm>
-            <a:off x="228600" y="3186495"/>
-            <a:ext cx="8588828" cy="400110"/>
+            <a:off x="163286" y="1785572"/>
+            <a:ext cx="8904514" cy="1015663"/>
           </a:xfrm>
           <a:prstGeom prst="rect">
             <a:avLst/>
@@ -10584,8 +13053,270 @@
           <a:lstStyle/>
           <a:p>
             <a:r>
-              <a:rPr lang="en-US" sz="2000" dirty="0"/>
-              <a:t>Paul</a:t>
+              <a:rPr lang="en-US" sz="2000" b="1" dirty="0">
+                <a:ea typeface="ＭＳ Ｐゴシック" pitchFamily="-106" charset="-128"/>
+                <a:cs typeface="ＭＳ Ｐゴシック" pitchFamily="-106" charset="-128"/>
+              </a:rPr>
+              <a:t>Romans</a:t>
+            </a:r>
+            <a:endParaRPr lang="en-US" sz="2000" dirty="0">
+              <a:ea typeface="ＭＳ Ｐゴシック" pitchFamily="-106" charset="-128"/>
+              <a:cs typeface="ＭＳ Ｐゴシック" pitchFamily="-106" charset="-128"/>
+            </a:endParaRPr>
+          </a:p>
+          <a:p>
+            <a:pPr marL="342900" indent="-342900">
+              <a:buFont typeface="Arial" panose="020B0604020202020204" pitchFamily="34" charset="0"/>
+              <a:buChar char="•"/>
+            </a:pPr>
+            <a:r>
+              <a:rPr lang="en-US" sz="2000" dirty="0">
+                <a:ea typeface="ＭＳ Ｐゴシック" pitchFamily="-106" charset="-128"/>
+                <a:cs typeface="ＭＳ Ｐゴシック" pitchFamily="-106" charset="-128"/>
+              </a:rPr>
+              <a:t>Who are the righteous?</a:t>
+            </a:r>
+          </a:p>
+          <a:p>
+            <a:pPr marL="342900" indent="-342900">
+              <a:buFont typeface="Arial" panose="020B0604020202020204" pitchFamily="34" charset="0"/>
+              <a:buChar char="•"/>
+            </a:pPr>
+            <a:r>
+              <a:rPr lang="en-US" sz="2000" dirty="0">
+                <a:ea typeface="ＭＳ Ｐゴシック" pitchFamily="-106" charset="-128"/>
+                <a:cs typeface="ＭＳ Ｐゴシック" pitchFamily="-106" charset="-128"/>
+              </a:rPr>
+              <a:t>Those who have submitted to God’s righteousness through faithful trust.</a:t>
+            </a:r>
+          </a:p>
+        </p:txBody>
+      </p:sp>
+      <p:sp>
+        <p:nvSpPr>
+          <p:cNvPr id="5" name="TextBox 4">
+            <a:extLst>
+              <a:ext uri="{FF2B5EF4-FFF2-40B4-BE49-F238E27FC236}">
+                <a16:creationId xmlns:a16="http://schemas.microsoft.com/office/drawing/2014/main" id="{D2FE85C4-F03B-9E6D-67D0-F2CBE8DBF096}"/>
+              </a:ext>
+            </a:extLst>
+          </p:cNvPr>
+          <p:cNvSpPr txBox="1"/>
+          <p:nvPr/>
+        </p:nvSpPr>
+        <p:spPr>
+          <a:xfrm>
+            <a:off x="152400" y="2940479"/>
+            <a:ext cx="8588828" cy="1631216"/>
+          </a:xfrm>
+          <a:prstGeom prst="rect">
+            <a:avLst/>
+          </a:prstGeom>
+          <a:noFill/>
+        </p:spPr>
+        <p:txBody>
+          <a:bodyPr wrap="square" rtlCol="0">
+            <a:spAutoFit/>
+          </a:bodyPr>
+          <a:lstStyle/>
+          <a:p>
+            <a:r>
+              <a:rPr lang="en-US" sz="2000" b="1" dirty="0">
+                <a:ea typeface="ＭＳ Ｐゴシック" pitchFamily="-106" charset="-128"/>
+                <a:cs typeface="ＭＳ Ｐゴシック" pitchFamily="-106" charset="-128"/>
+              </a:rPr>
+              <a:t>Galatians</a:t>
+            </a:r>
+            <a:endParaRPr lang="en-US" sz="2000" dirty="0">
+              <a:ea typeface="ＭＳ Ｐゴシック" pitchFamily="-106" charset="-128"/>
+              <a:cs typeface="ＭＳ Ｐゴシック" pitchFamily="-106" charset="-128"/>
+            </a:endParaRPr>
+          </a:p>
+          <a:p>
+            <a:pPr marL="342900" indent="-342900">
+              <a:buFont typeface="Arial" panose="020B0604020202020204" pitchFamily="34" charset="0"/>
+              <a:buChar char="•"/>
+            </a:pPr>
+            <a:r>
+              <a:rPr lang="en-US" sz="2000" dirty="0">
+                <a:ea typeface="ＭＳ Ｐゴシック" pitchFamily="-106" charset="-128"/>
+                <a:cs typeface="ＭＳ Ｐゴシック" pitchFamily="-106" charset="-128"/>
+              </a:rPr>
+              <a:t>What is obedient faith?</a:t>
+            </a:r>
+          </a:p>
+          <a:p>
+            <a:pPr marL="342900" indent="-342900">
+              <a:buFont typeface="Arial" panose="020B0604020202020204" pitchFamily="34" charset="0"/>
+              <a:buChar char="•"/>
+            </a:pPr>
+            <a:r>
+              <a:rPr lang="en-US" sz="2000" dirty="0">
+                <a:ea typeface="ＭＳ Ｐゴシック" pitchFamily="-106" charset="-128"/>
+                <a:cs typeface="ＭＳ Ｐゴシック" pitchFamily="-106" charset="-128"/>
+              </a:rPr>
+              <a:t>Not merely belief.</a:t>
+            </a:r>
+          </a:p>
+          <a:p>
+            <a:pPr marL="342900" indent="-342900">
+              <a:buFont typeface="Arial" panose="020B0604020202020204" pitchFamily="34" charset="0"/>
+              <a:buChar char="•"/>
+            </a:pPr>
+            <a:r>
+              <a:rPr lang="en-US" sz="2000" dirty="0">
+                <a:ea typeface="ＭＳ Ｐゴシック" pitchFamily="-106" charset="-128"/>
+                <a:cs typeface="ＭＳ Ｐゴシック" pitchFamily="-106" charset="-128"/>
+              </a:rPr>
+              <a:t>Faith working through love (</a:t>
+            </a:r>
+            <a:r>
+              <a:rPr lang="en-US" sz="2000" b="1" dirty="0">
+                <a:ea typeface="ＭＳ Ｐゴシック" pitchFamily="-106" charset="-128"/>
+                <a:cs typeface="ＭＳ Ｐゴシック" pitchFamily="-106" charset="-128"/>
+              </a:rPr>
+              <a:t>Galatians 5:6</a:t>
+            </a:r>
+            <a:r>
+              <a:rPr lang="en-US" sz="2000" dirty="0">
+                <a:ea typeface="ＭＳ Ｐゴシック" pitchFamily="-106" charset="-128"/>
+                <a:cs typeface="ＭＳ Ｐゴシック" pitchFamily="-106" charset="-128"/>
+              </a:rPr>
+              <a:t>).</a:t>
+            </a:r>
+          </a:p>
+          <a:p>
+            <a:pPr marL="342900" indent="-342900">
+              <a:buFont typeface="Arial" panose="020B0604020202020204" pitchFamily="34" charset="0"/>
+              <a:buChar char="•"/>
+            </a:pPr>
+            <a:r>
+              <a:rPr lang="en-US" sz="2000" dirty="0">
+                <a:ea typeface="ＭＳ Ｐゴシック" pitchFamily="-106" charset="-128"/>
+                <a:cs typeface="ＭＳ Ｐゴシック" pitchFamily="-106" charset="-128"/>
+              </a:rPr>
+              <a:t>Faithful allegiance to Christ rather than reliance on fleshly achievement.</a:t>
+            </a:r>
+          </a:p>
+        </p:txBody>
+      </p:sp>
+      <p:sp>
+        <p:nvSpPr>
+          <p:cNvPr id="6" name="TextBox 5">
+            <a:extLst>
+              <a:ext uri="{FF2B5EF4-FFF2-40B4-BE49-F238E27FC236}">
+                <a16:creationId xmlns:a16="http://schemas.microsoft.com/office/drawing/2014/main" id="{B619F7D9-9CBE-4C2C-5298-2085AB4ED93B}"/>
+              </a:ext>
+            </a:extLst>
+          </p:cNvPr>
+          <p:cNvSpPr txBox="1"/>
+          <p:nvPr/>
+        </p:nvSpPr>
+        <p:spPr>
+          <a:xfrm>
+            <a:off x="152400" y="4710939"/>
+            <a:ext cx="8588828" cy="1938992"/>
+          </a:xfrm>
+          <a:prstGeom prst="rect">
+            <a:avLst/>
+          </a:prstGeom>
+          <a:noFill/>
+        </p:spPr>
+        <p:txBody>
+          <a:bodyPr wrap="square" rtlCol="0">
+            <a:spAutoFit/>
+          </a:bodyPr>
+          <a:lstStyle/>
+          <a:p>
+            <a:r>
+              <a:rPr lang="en-US" sz="2000" b="1" dirty="0">
+                <a:ea typeface="ＭＳ Ｐゴシック" pitchFamily="-106" charset="-128"/>
+                <a:cs typeface="ＭＳ Ｐゴシック" pitchFamily="-106" charset="-128"/>
+              </a:rPr>
+              <a:t>Hebrews</a:t>
+            </a:r>
+            <a:endParaRPr lang="en-US" sz="2000" dirty="0">
+              <a:ea typeface="ＭＳ Ｐゴシック" pitchFamily="-106" charset="-128"/>
+              <a:cs typeface="ＭＳ Ｐゴシック" pitchFamily="-106" charset="-128"/>
+            </a:endParaRPr>
+          </a:p>
+          <a:p>
+            <a:pPr marL="342900" indent="-342900">
+              <a:buFont typeface="Arial" panose="020B0604020202020204" pitchFamily="34" charset="0"/>
+              <a:buChar char="•"/>
+            </a:pPr>
+            <a:r>
+              <a:rPr lang="en-US" sz="2000" dirty="0">
+                <a:ea typeface="ＭＳ Ｐゴシック" pitchFamily="-106" charset="-128"/>
+                <a:cs typeface="ＭＳ Ｐゴシック" pitchFamily="-106" charset="-128"/>
+              </a:rPr>
+              <a:t>What does it mean to live by faith?</a:t>
+            </a:r>
+          </a:p>
+          <a:p>
+            <a:pPr marL="342900" indent="-342900">
+              <a:buFont typeface="Arial" panose="020B0604020202020204" pitchFamily="34" charset="0"/>
+              <a:buChar char="•"/>
+            </a:pPr>
+            <a:r>
+              <a:rPr lang="en-US" sz="2000" dirty="0">
+                <a:ea typeface="ＭＳ Ｐゴシック" pitchFamily="-106" charset="-128"/>
+                <a:cs typeface="ＭＳ Ｐゴシック" pitchFamily="-106" charset="-128"/>
+              </a:rPr>
+              <a:t>Persevering loyalty.</a:t>
+            </a:r>
+          </a:p>
+          <a:p>
+            <a:pPr marL="342900" indent="-342900">
+              <a:buFont typeface="Arial" panose="020B0604020202020204" pitchFamily="34" charset="0"/>
+              <a:buChar char="•"/>
+            </a:pPr>
+            <a:r>
+              <a:rPr lang="en-US" sz="2000" dirty="0">
+                <a:ea typeface="ＭＳ Ｐゴシック" pitchFamily="-106" charset="-128"/>
+                <a:cs typeface="ＭＳ Ｐゴシック" pitchFamily="-106" charset="-128"/>
+              </a:rPr>
+              <a:t>The heroes of </a:t>
+            </a:r>
+            <a:r>
+              <a:rPr lang="en-US" sz="2000" b="1" dirty="0">
+                <a:ea typeface="ＭＳ Ｐゴシック" pitchFamily="-106" charset="-128"/>
+                <a:cs typeface="ＭＳ Ｐゴシック" pitchFamily="-106" charset="-128"/>
+              </a:rPr>
+              <a:t>Hebrews 11</a:t>
+            </a:r>
+            <a:r>
+              <a:rPr lang="en-US" sz="2000" dirty="0">
+                <a:ea typeface="ＭＳ Ｐゴシック" pitchFamily="-106" charset="-128"/>
+                <a:cs typeface="ＭＳ Ｐゴシック" pitchFamily="-106" charset="-128"/>
+              </a:rPr>
+              <a:t> did not merely hold correct beliefs.</a:t>
+            </a:r>
+          </a:p>
+          <a:p>
+            <a:pPr marL="342900" indent="-342900">
+              <a:buFont typeface="Arial" panose="020B0604020202020204" pitchFamily="34" charset="0"/>
+              <a:buChar char="•"/>
+            </a:pPr>
+            <a:r>
+              <a:rPr lang="en-US" sz="2000" dirty="0">
+                <a:ea typeface="ＭＳ Ｐゴシック" pitchFamily="-106" charset="-128"/>
+                <a:cs typeface="ＭＳ Ｐゴシック" pitchFamily="-106" charset="-128"/>
+              </a:rPr>
+              <a:t>They obeyed.</a:t>
+            </a:r>
+          </a:p>
+          <a:p>
+            <a:pPr marL="342900" indent="-342900">
+              <a:buFont typeface="Arial" panose="020B0604020202020204" pitchFamily="34" charset="0"/>
+              <a:buChar char="•"/>
+            </a:pPr>
+            <a:r>
+              <a:rPr lang="en-US" sz="2000" dirty="0">
+                <a:ea typeface="ＭＳ Ｐゴシック" pitchFamily="-106" charset="-128"/>
+                <a:cs typeface="ＭＳ Ｐゴシック" pitchFamily="-106" charset="-128"/>
+              </a:rPr>
+              <a:t>Their faith was visible because it acted.</a:t>
             </a:r>
           </a:p>
         </p:txBody>
@@ -10707,6 +13438,204 @@
                       </p:childTnLst>
                     </p:cTn>
                   </p:par>
+                  <p:par>
+                    <p:cTn id="10" fill="hold">
+                      <p:stCondLst>
+                        <p:cond delay="indefinite"/>
+                      </p:stCondLst>
+                      <p:childTnLst>
+                        <p:par>
+                          <p:cTn id="11" fill="hold">
+                            <p:stCondLst>
+                              <p:cond delay="0"/>
+                            </p:stCondLst>
+                            <p:childTnLst>
+                              <p:par>
+                                <p:cTn id="12" presetID="42" presetClass="entr" presetSubtype="0" fill="hold" grpId="0" nodeType="clickEffect">
+                                  <p:stCondLst>
+                                    <p:cond delay="0"/>
+                                  </p:stCondLst>
+                                  <p:childTnLst>
+                                    <p:set>
+                                      <p:cBhvr>
+                                        <p:cTn id="13" dur="1" fill="hold">
+                                          <p:stCondLst>
+                                            <p:cond delay="0"/>
+                                          </p:stCondLst>
+                                        </p:cTn>
+                                        <p:tgtEl>
+                                          <p:spTgt spid="5"/>
+                                        </p:tgtEl>
+                                        <p:attrNameLst>
+                                          <p:attrName>style.visibility</p:attrName>
+                                        </p:attrNameLst>
+                                      </p:cBhvr>
+                                      <p:to>
+                                        <p:strVal val="visible"/>
+                                      </p:to>
+                                    </p:set>
+                                    <p:animEffect transition="in" filter="fade">
+                                      <p:cBhvr>
+                                        <p:cTn id="14" dur="1000"/>
+                                        <p:tgtEl>
+                                          <p:spTgt spid="5"/>
+                                        </p:tgtEl>
+                                      </p:cBhvr>
+                                    </p:animEffect>
+                                    <p:anim calcmode="lin" valueType="num">
+                                      <p:cBhvr>
+                                        <p:cTn id="15" dur="1000" fill="hold"/>
+                                        <p:tgtEl>
+                                          <p:spTgt spid="5"/>
+                                        </p:tgtEl>
+                                        <p:attrNameLst>
+                                          <p:attrName>ppt_x</p:attrName>
+                                        </p:attrNameLst>
+                                      </p:cBhvr>
+                                      <p:tavLst>
+                                        <p:tav tm="0">
+                                          <p:val>
+                                            <p:strVal val="#ppt_x"/>
+                                          </p:val>
+                                        </p:tav>
+                                        <p:tav tm="100000">
+                                          <p:val>
+                                            <p:strVal val="#ppt_x"/>
+                                          </p:val>
+                                        </p:tav>
+                                      </p:tavLst>
+                                    </p:anim>
+                                    <p:anim calcmode="lin" valueType="num">
+                                      <p:cBhvr>
+                                        <p:cTn id="16" dur="1000" fill="hold"/>
+                                        <p:tgtEl>
+                                          <p:spTgt spid="5"/>
+                                        </p:tgtEl>
+                                        <p:attrNameLst>
+                                          <p:attrName>ppt_y</p:attrName>
+                                        </p:attrNameLst>
+                                      </p:cBhvr>
+                                      <p:tavLst>
+                                        <p:tav tm="0">
+                                          <p:val>
+                                            <p:strVal val="#ppt_y+.1"/>
+                                          </p:val>
+                                        </p:tav>
+                                        <p:tav tm="100000">
+                                          <p:val>
+                                            <p:strVal val="#ppt_y"/>
+                                          </p:val>
+                                        </p:tav>
+                                      </p:tavLst>
+                                    </p:anim>
+                                  </p:childTnLst>
+                                </p:cTn>
+                              </p:par>
+                            </p:childTnLst>
+                          </p:cTn>
+                        </p:par>
+                      </p:childTnLst>
+                    </p:cTn>
+                  </p:par>
+                  <p:par>
+                    <p:cTn id="17" fill="hold">
+                      <p:stCondLst>
+                        <p:cond delay="indefinite"/>
+                      </p:stCondLst>
+                      <p:childTnLst>
+                        <p:par>
+                          <p:cTn id="18" fill="hold">
+                            <p:stCondLst>
+                              <p:cond delay="0"/>
+                            </p:stCondLst>
+                            <p:childTnLst>
+                              <p:par>
+                                <p:cTn id="19" presetID="42" presetClass="entr" presetSubtype="0" fill="hold" grpId="0" nodeType="clickEffect">
+                                  <p:stCondLst>
+                                    <p:cond delay="0"/>
+                                  </p:stCondLst>
+                                  <p:childTnLst>
+                                    <p:set>
+                                      <p:cBhvr>
+                                        <p:cTn id="20" dur="1" fill="hold">
+                                          <p:stCondLst>
+                                            <p:cond delay="0"/>
+                                          </p:stCondLst>
+                                        </p:cTn>
+                                        <p:tgtEl>
+                                          <p:spTgt spid="6"/>
+                                        </p:tgtEl>
+                                        <p:attrNameLst>
+                                          <p:attrName>style.visibility</p:attrName>
+                                        </p:attrNameLst>
+                                      </p:cBhvr>
+                                      <p:to>
+                                        <p:strVal val="visible"/>
+                                      </p:to>
+                                    </p:set>
+                                    <p:animEffect transition="in" filter="fade">
+                                      <p:cBhvr>
+                                        <p:cTn id="21" dur="1000"/>
+                                        <p:tgtEl>
+                                          <p:spTgt spid="6"/>
+                                        </p:tgtEl>
+                                      </p:cBhvr>
+                                    </p:animEffect>
+                                    <p:anim calcmode="lin" valueType="num">
+                                      <p:cBhvr>
+                                        <p:cTn id="22" dur="1000" fill="hold"/>
+                                        <p:tgtEl>
+                                          <p:spTgt spid="6"/>
+                                        </p:tgtEl>
+                                        <p:attrNameLst>
+                                          <p:attrName>ppt_x</p:attrName>
+                                        </p:attrNameLst>
+                                      </p:cBhvr>
+                                      <p:tavLst>
+                                        <p:tav tm="0">
+                                          <p:val>
+                                            <p:strVal val="#ppt_x"/>
+                                          </p:val>
+                                        </p:tav>
+                                        <p:tav tm="100000">
+                                          <p:val>
+                                            <p:strVal val="#ppt_x"/>
+                                          </p:val>
+                                        </p:tav>
+                                      </p:tavLst>
+                                    </p:anim>
+                                    <p:anim calcmode="lin" valueType="num">
+                                      <p:cBhvr>
+                                        <p:cTn id="23" dur="1000" fill="hold"/>
+                                        <p:tgtEl>
+                                          <p:spTgt spid="6"/>
+                                        </p:tgtEl>
+                                        <p:attrNameLst>
+                                          <p:attrName>ppt_y</p:attrName>
+                                        </p:attrNameLst>
+                                      </p:cBhvr>
+                                      <p:tavLst>
+                                        <p:tav tm="0">
+                                          <p:val>
+                                            <p:strVal val="#ppt_y+.1"/>
+                                          </p:val>
+                                        </p:tav>
+                                        <p:tav tm="100000">
+                                          <p:val>
+                                            <p:strVal val="#ppt_y"/>
+                                          </p:val>
+                                        </p:tav>
+                                      </p:tavLst>
+                                    </p:anim>
+                                  </p:childTnLst>
+                                </p:cTn>
+                              </p:par>
+                            </p:childTnLst>
+                          </p:cTn>
+                        </p:par>
+                      </p:childTnLst>
+                    </p:cTn>
+                  </p:par>
                 </p:childTnLst>
               </p:cTn>
               <p:prevCondLst>
@@ -10730,12 +13659,14 @@
     </p:tnLst>
     <p:bldLst>
       <p:bldP spid="4" grpId="0"/>
+      <p:bldP spid="5" grpId="0"/>
+      <p:bldP spid="6" grpId="0"/>
     </p:bldLst>
   </p:timing>
 </p:sld>
 </file>
 
-<file path=ppt/slides/slide8.xml><?xml version="1.0" encoding="utf-8"?>
+<file path=ppt/slides/slide9.xml><?xml version="1.0" encoding="utf-8"?>
 <p:sld xmlns:a="http://schemas.openxmlformats.org/drawingml/2006/main" xmlns:r="http://schemas.openxmlformats.org/officeDocument/2006/relationships" xmlns:p="http://schemas.openxmlformats.org/presentationml/2006/main">
   <p:cSld>
     <p:spTree>
@@ -10789,7 +13720,7 @@
             <a:pPr algn="l"/>
             <a:r>
               <a:rPr lang="en-US" sz="3600" dirty="0"/>
-              <a:t>God’s Sovereignty vs. Human Responsibility</a:t>
+              <a:t>Conclusion</a:t>
             </a:r>
             <a:br>
               <a:rPr lang="en-US" dirty="0"/>
@@ -10823,7 +13754,7 @@
         <p:spPr>
           <a:xfrm>
             <a:off x="154577" y="1066800"/>
-            <a:ext cx="8665029" cy="400110"/>
+            <a:ext cx="8665029" cy="5632311"/>
           </a:xfrm>
           <a:prstGeom prst="rect">
             <a:avLst/>
@@ -10837,47 +13768,192 @@
           <a:lstStyle/>
           <a:p>
             <a:r>
-              <a:rPr lang="en-US" sz="2000" b="1" i="1" dirty="0"/>
-              <a:t>Romans 8:26-30  </a:t>
-            </a:r>
-            <a:r>
-              <a:rPr lang="en-US" sz="2000" i="1" dirty="0"/>
-              <a:t>“</a:t>
-            </a:r>
-          </a:p>
-        </p:txBody>
-      </p:sp>
-      <p:sp>
-        <p:nvSpPr>
-          <p:cNvPr id="4" name="TextBox 3">
-            <a:extLst>
-              <a:ext uri="{FF2B5EF4-FFF2-40B4-BE49-F238E27FC236}">
-                <a16:creationId xmlns:a16="http://schemas.microsoft.com/office/drawing/2014/main" id="{4AB8C60F-7A73-8B4F-9817-10D21E74BA55}"/>
-              </a:ext>
-            </a:extLst>
-          </p:cNvPr>
-          <p:cNvSpPr txBox="1"/>
-          <p:nvPr/>
-        </p:nvSpPr>
-        <p:spPr>
-          <a:xfrm>
-            <a:off x="228600" y="3186495"/>
-            <a:ext cx="8588828" cy="400110"/>
-          </a:xfrm>
-          <a:prstGeom prst="rect">
-            <a:avLst/>
-          </a:prstGeom>
-          <a:noFill/>
-        </p:spPr>
-        <p:txBody>
-          <a:bodyPr wrap="square" rtlCol="0">
-            <a:spAutoFit/>
-          </a:bodyPr>
-          <a:lstStyle/>
-          <a:p>
-            <a:r>
-              <a:rPr lang="en-US" sz="2000" dirty="0"/>
-              <a:t>Paul</a:t>
+              <a:rPr lang="en-US" sz="2000" dirty="0">
+                <a:ea typeface="ＭＳ Ｐゴシック" pitchFamily="-106" charset="-128"/>
+                <a:cs typeface="ＭＳ Ｐゴシック" pitchFamily="-106" charset="-128"/>
+              </a:rPr>
+              <a:t>If Romans is framed by “</a:t>
+            </a:r>
+            <a:r>
+              <a:rPr lang="en-US" sz="2000" i="1" dirty="0">
+                <a:ea typeface="ＭＳ Ｐゴシック" pitchFamily="-106" charset="-128"/>
+                <a:cs typeface="ＭＳ Ｐゴシック" pitchFamily="-106" charset="-128"/>
+              </a:rPr>
+              <a:t>the obedience of faith</a:t>
+            </a:r>
+            <a:r>
+              <a:rPr lang="en-US" sz="2000" dirty="0">
+                <a:ea typeface="ＭＳ Ｐゴシック" pitchFamily="-106" charset="-128"/>
+                <a:cs typeface="ＭＳ Ｐゴシック" pitchFamily="-106" charset="-128"/>
+              </a:rPr>
+              <a:t>” (</a:t>
+            </a:r>
+            <a:r>
+              <a:rPr lang="en-US" sz="2000" b="1" dirty="0">
+                <a:ea typeface="ＭＳ Ｐゴシック" pitchFamily="-106" charset="-128"/>
+                <a:cs typeface="ＭＳ Ｐゴシック" pitchFamily="-106" charset="-128"/>
+              </a:rPr>
+              <a:t>1:5; 16:26</a:t>
+            </a:r>
+            <a:r>
+              <a:rPr lang="en-US" sz="2000" dirty="0">
+                <a:ea typeface="ＭＳ Ｐゴシック" pitchFamily="-106" charset="-128"/>
+                <a:cs typeface="ＭＳ Ｐゴシック" pitchFamily="-106" charset="-128"/>
+              </a:rPr>
+              <a:t>), then </a:t>
+            </a:r>
+            <a:r>
+              <a:rPr lang="en-US" sz="2000" b="1" dirty="0">
+                <a:ea typeface="ＭＳ Ｐゴシック" pitchFamily="-106" charset="-128"/>
+                <a:cs typeface="ＭＳ Ｐゴシック" pitchFamily="-106" charset="-128"/>
+              </a:rPr>
+              <a:t>Romans 12-16</a:t>
+            </a:r>
+            <a:r>
+              <a:rPr lang="en-US" sz="2000" dirty="0">
+                <a:ea typeface="ＭＳ Ｐゴシック" pitchFamily="-106" charset="-128"/>
+                <a:cs typeface="ＭＳ Ｐゴシック" pitchFamily="-106" charset="-128"/>
+              </a:rPr>
+              <a:t> should not primarily be viewed as a section on works that follow faith.</a:t>
+            </a:r>
+          </a:p>
+          <a:p>
+            <a:endParaRPr lang="en-US" sz="2000" dirty="0">
+              <a:ea typeface="ＭＳ Ｐゴシック" pitchFamily="-106" charset="-128"/>
+              <a:cs typeface="ＭＳ Ｐゴシック" pitchFamily="-106" charset="-128"/>
+            </a:endParaRPr>
+          </a:p>
+          <a:p>
+            <a:r>
+              <a:rPr lang="en-US" sz="2000" dirty="0">
+                <a:ea typeface="ＭＳ Ｐゴシック" pitchFamily="-106" charset="-128"/>
+                <a:cs typeface="ＭＳ Ｐゴシック" pitchFamily="-106" charset="-128"/>
+              </a:rPr>
+              <a:t>Rather, it is Paul’s portrait of what faith actually is.</a:t>
+            </a:r>
+          </a:p>
+          <a:p>
+            <a:pPr marL="342900" indent="-342900">
+              <a:buFont typeface="Arial" panose="020B0604020202020204" pitchFamily="34" charset="0"/>
+              <a:buChar char="•"/>
+            </a:pPr>
+            <a:r>
+              <a:rPr lang="en-US" sz="2000" dirty="0">
+                <a:ea typeface="ＭＳ Ｐゴシック" pitchFamily="-106" charset="-128"/>
+                <a:cs typeface="ＭＳ Ｐゴシック" pitchFamily="-106" charset="-128"/>
+              </a:rPr>
+              <a:t>The faith that justifies is not mere mental assent.</a:t>
+            </a:r>
+          </a:p>
+          <a:p>
+            <a:pPr marL="342900" indent="-342900">
+              <a:buFont typeface="Arial" panose="020B0604020202020204" pitchFamily="34" charset="0"/>
+              <a:buChar char="•"/>
+            </a:pPr>
+            <a:r>
+              <a:rPr lang="en-US" sz="2000" dirty="0">
+                <a:ea typeface="ＭＳ Ｐゴシック" pitchFamily="-106" charset="-128"/>
+                <a:cs typeface="ＭＳ Ｐゴシック" pitchFamily="-106" charset="-128"/>
+              </a:rPr>
+              <a:t>It is trusting submission to God.</a:t>
+            </a:r>
+          </a:p>
+          <a:p>
+            <a:pPr marL="342900" indent="-342900">
+              <a:buFont typeface="Arial" panose="020B0604020202020204" pitchFamily="34" charset="0"/>
+              <a:buChar char="•"/>
+            </a:pPr>
+            <a:r>
+              <a:rPr lang="en-US" sz="2000" dirty="0">
+                <a:ea typeface="ＭＳ Ｐゴシック" pitchFamily="-106" charset="-128"/>
+                <a:cs typeface="ＭＳ Ｐゴシック" pitchFamily="-106" charset="-128"/>
+              </a:rPr>
+              <a:t>It is believing allegiance to Christ.</a:t>
+            </a:r>
+          </a:p>
+          <a:p>
+            <a:pPr marL="342900" indent="-342900">
+              <a:buFont typeface="Arial" panose="020B0604020202020204" pitchFamily="34" charset="0"/>
+              <a:buChar char="•"/>
+            </a:pPr>
+            <a:r>
+              <a:rPr lang="en-US" sz="2000" dirty="0">
+                <a:ea typeface="ＭＳ Ｐゴシック" pitchFamily="-106" charset="-128"/>
+                <a:cs typeface="ＭＳ Ｐゴシック" pitchFamily="-106" charset="-128"/>
+              </a:rPr>
+              <a:t>It is the kind of faith that offers the body as a living sacrifice, loves enemies, submits to God-ordained authority, serves fellow believers, bears the weak, preserves unity, and remains faithful to the gospel.</a:t>
+            </a:r>
+          </a:p>
+          <a:p>
+            <a:endParaRPr lang="en-US" sz="2000" dirty="0">
+              <a:ea typeface="ＭＳ Ｐゴシック" pitchFamily="-106" charset="-128"/>
+              <a:cs typeface="ＭＳ Ｐゴシック" pitchFamily="-106" charset="-128"/>
+            </a:endParaRPr>
+          </a:p>
+          <a:p>
+            <a:r>
+              <a:rPr lang="en-US" sz="2000" dirty="0">
+                <a:ea typeface="ＭＳ Ｐゴシック" pitchFamily="-106" charset="-128"/>
+                <a:cs typeface="ＭＳ Ｐゴシック" pitchFamily="-106" charset="-128"/>
+              </a:rPr>
+              <a:t>In that sense, </a:t>
+            </a:r>
+            <a:r>
+              <a:rPr lang="en-US" sz="2000" b="1" dirty="0">
+                <a:ea typeface="ＭＳ Ｐゴシック" pitchFamily="-106" charset="-128"/>
+                <a:cs typeface="ＭＳ Ｐゴシック" pitchFamily="-106" charset="-128"/>
+              </a:rPr>
+              <a:t>Habakkuk 2:4</a:t>
+            </a:r>
+            <a:r>
+              <a:rPr lang="en-US" sz="2000" dirty="0">
+                <a:ea typeface="ＭＳ Ｐゴシック" pitchFamily="-106" charset="-128"/>
+                <a:cs typeface="ＭＳ Ｐゴシック" pitchFamily="-106" charset="-128"/>
+              </a:rPr>
+              <a:t>, </a:t>
+            </a:r>
+            <a:r>
+              <a:rPr lang="en-US" sz="2000" b="1" dirty="0">
+                <a:ea typeface="ＭＳ Ｐゴシック" pitchFamily="-106" charset="-128"/>
+                <a:cs typeface="ＭＳ Ｐゴシック" pitchFamily="-106" charset="-128"/>
+              </a:rPr>
+              <a:t>Romans 1:5</a:t>
+            </a:r>
+            <a:r>
+              <a:rPr lang="en-US" sz="2000" dirty="0">
+                <a:ea typeface="ＭＳ Ｐゴシック" pitchFamily="-106" charset="-128"/>
+                <a:cs typeface="ＭＳ Ｐゴシック" pitchFamily="-106" charset="-128"/>
+              </a:rPr>
+              <a:t>, and </a:t>
+            </a:r>
+            <a:r>
+              <a:rPr lang="en-US" sz="2000" b="1" dirty="0">
+                <a:ea typeface="ＭＳ Ｐゴシック" pitchFamily="-106" charset="-128"/>
+                <a:cs typeface="ＭＳ Ｐゴシック" pitchFamily="-106" charset="-128"/>
+              </a:rPr>
+              <a:t>Romans 12-16 </a:t>
+            </a:r>
+            <a:r>
+              <a:rPr lang="en-US" sz="2000" dirty="0">
+                <a:ea typeface="ＭＳ Ｐゴシック" pitchFamily="-106" charset="-128"/>
+                <a:cs typeface="ＭＳ Ｐゴシック" pitchFamily="-106" charset="-128"/>
+              </a:rPr>
+              <a:t>all converge on a single idea:</a:t>
+            </a:r>
+          </a:p>
+          <a:p>
+            <a:endParaRPr lang="en-US" sz="2000" dirty="0">
+              <a:ea typeface="ＭＳ Ｐゴシック" pitchFamily="-106" charset="-128"/>
+              <a:cs typeface="ＭＳ Ｐゴシック" pitchFamily="-106" charset="-128"/>
+            </a:endParaRPr>
+          </a:p>
+          <a:p>
+            <a:r>
+              <a:rPr lang="en-US" sz="2000" b="1" i="1" dirty="0">
+                <a:ea typeface="ＭＳ Ｐゴシック" pitchFamily="-106" charset="-128"/>
+                <a:cs typeface="ＭＳ Ｐゴシック" pitchFamily="-106" charset="-128"/>
+              </a:rPr>
+              <a:t>The righteous person lives by a faith that obeys because it trusts, and trusts because it has surrendered itself to God. Faith and obedience are not rivals in Paul’s thought; they are inseparable expressions of covenant loyalty to the God who saves.</a:t>
             </a:r>
           </a:p>
         </p:txBody>
@@ -10913,7 +13989,7 @@
                             </p:stCondLst>
                             <p:childTnLst>
                               <p:par>
-                                <p:cTn id="5" presetID="42" presetClass="entr" presetSubtype="0" fill="hold" grpId="0" nodeType="clickEffect">
+                                <p:cTn id="5" presetID="42" presetClass="entr" presetSubtype="0" fill="hold" nodeType="clickEffect">
                                   <p:stCondLst>
                                     <p:cond delay="0"/>
                                   </p:stCondLst>
@@ -10926,7 +14002,11 @@
                                           </p:stCondLst>
                                         </p:cTn>
                                         <p:tgtEl>
-                                          <p:spTgt spid="4"/>
+                                          <p:spTgt spid="3">
+                                            <p:txEl>
+                                              <p:pRg st="2" end="2"/>
+                                            </p:txEl>
+                                          </p:spTgt>
                                         </p:tgtEl>
                                         <p:attrNameLst>
                                           <p:attrName>style.visibility</p:attrName>
@@ -10940,7 +14020,11 @@
                                       <p:cBhvr>
                                         <p:cTn id="7" dur="1000"/>
                                         <p:tgtEl>
-                                          <p:spTgt spid="4"/>
+                                          <p:spTgt spid="3">
+                                            <p:txEl>
+                                              <p:pRg st="2" end="2"/>
+                                            </p:txEl>
+                                          </p:spTgt>
                                         </p:tgtEl>
                                       </p:cBhvr>
                                     </p:animEffect>
@@ -10948,7 +14032,11 @@
                                       <p:cBhvr>
                                         <p:cTn id="8" dur="1000" fill="hold"/>
                                         <p:tgtEl>
-                                          <p:spTgt spid="4"/>
+                                          <p:spTgt spid="3">
+                                            <p:txEl>
+                                              <p:pRg st="2" end="2"/>
+                                            </p:txEl>
+                                          </p:spTgt>
                                         </p:tgtEl>
                                         <p:attrNameLst>
                                           <p:attrName>ppt_x</p:attrName>
@@ -10971,7 +14059,611 @@
                                       <p:cBhvr>
                                         <p:cTn id="9" dur="1000" fill="hold"/>
                                         <p:tgtEl>
-                                          <p:spTgt spid="4"/>
+                                          <p:spTgt spid="3">
+                                            <p:txEl>
+                                              <p:pRg st="2" end="2"/>
+                                            </p:txEl>
+                                          </p:spTgt>
+                                        </p:tgtEl>
+                                        <p:attrNameLst>
+                                          <p:attrName>ppt_y</p:attrName>
+                                        </p:attrNameLst>
+                                      </p:cBhvr>
+                                      <p:tavLst>
+                                        <p:tav tm="0">
+                                          <p:val>
+                                            <p:strVal val="#ppt_y+.1"/>
+                                          </p:val>
+                                        </p:tav>
+                                        <p:tav tm="100000">
+                                          <p:val>
+                                            <p:strVal val="#ppt_y"/>
+                                          </p:val>
+                                        </p:tav>
+                                      </p:tavLst>
+                                    </p:anim>
+                                  </p:childTnLst>
+                                </p:cTn>
+                              </p:par>
+                              <p:par>
+                                <p:cTn id="10" presetID="42" presetClass="entr" presetSubtype="0" fill="hold" nodeType="withEffect">
+                                  <p:stCondLst>
+                                    <p:cond delay="0"/>
+                                  </p:stCondLst>
+                                  <p:childTnLst>
+                                    <p:set>
+                                      <p:cBhvr>
+                                        <p:cTn id="11" dur="1" fill="hold">
+                                          <p:stCondLst>
+                                            <p:cond delay="0"/>
+                                          </p:stCondLst>
+                                        </p:cTn>
+                                        <p:tgtEl>
+                                          <p:spTgt spid="3">
+                                            <p:txEl>
+                                              <p:pRg st="3" end="3"/>
+                                            </p:txEl>
+                                          </p:spTgt>
+                                        </p:tgtEl>
+                                        <p:attrNameLst>
+                                          <p:attrName>style.visibility</p:attrName>
+                                        </p:attrNameLst>
+                                      </p:cBhvr>
+                                      <p:to>
+                                        <p:strVal val="visible"/>
+                                      </p:to>
+                                    </p:set>
+                                    <p:animEffect transition="in" filter="fade">
+                                      <p:cBhvr>
+                                        <p:cTn id="12" dur="1000"/>
+                                        <p:tgtEl>
+                                          <p:spTgt spid="3">
+                                            <p:txEl>
+                                              <p:pRg st="3" end="3"/>
+                                            </p:txEl>
+                                          </p:spTgt>
+                                        </p:tgtEl>
+                                      </p:cBhvr>
+                                    </p:animEffect>
+                                    <p:anim calcmode="lin" valueType="num">
+                                      <p:cBhvr>
+                                        <p:cTn id="13" dur="1000" fill="hold"/>
+                                        <p:tgtEl>
+                                          <p:spTgt spid="3">
+                                            <p:txEl>
+                                              <p:pRg st="3" end="3"/>
+                                            </p:txEl>
+                                          </p:spTgt>
+                                        </p:tgtEl>
+                                        <p:attrNameLst>
+                                          <p:attrName>ppt_x</p:attrName>
+                                        </p:attrNameLst>
+                                      </p:cBhvr>
+                                      <p:tavLst>
+                                        <p:tav tm="0">
+                                          <p:val>
+                                            <p:strVal val="#ppt_x"/>
+                                          </p:val>
+                                        </p:tav>
+                                        <p:tav tm="100000">
+                                          <p:val>
+                                            <p:strVal val="#ppt_x"/>
+                                          </p:val>
+                                        </p:tav>
+                                      </p:tavLst>
+                                    </p:anim>
+                                    <p:anim calcmode="lin" valueType="num">
+                                      <p:cBhvr>
+                                        <p:cTn id="14" dur="1000" fill="hold"/>
+                                        <p:tgtEl>
+                                          <p:spTgt spid="3">
+                                            <p:txEl>
+                                              <p:pRg st="3" end="3"/>
+                                            </p:txEl>
+                                          </p:spTgt>
+                                        </p:tgtEl>
+                                        <p:attrNameLst>
+                                          <p:attrName>ppt_y</p:attrName>
+                                        </p:attrNameLst>
+                                      </p:cBhvr>
+                                      <p:tavLst>
+                                        <p:tav tm="0">
+                                          <p:val>
+                                            <p:strVal val="#ppt_y+.1"/>
+                                          </p:val>
+                                        </p:tav>
+                                        <p:tav tm="100000">
+                                          <p:val>
+                                            <p:strVal val="#ppt_y"/>
+                                          </p:val>
+                                        </p:tav>
+                                      </p:tavLst>
+                                    </p:anim>
+                                  </p:childTnLst>
+                                </p:cTn>
+                              </p:par>
+                              <p:par>
+                                <p:cTn id="15" presetID="42" presetClass="entr" presetSubtype="0" fill="hold" nodeType="withEffect">
+                                  <p:stCondLst>
+                                    <p:cond delay="0"/>
+                                  </p:stCondLst>
+                                  <p:childTnLst>
+                                    <p:set>
+                                      <p:cBhvr>
+                                        <p:cTn id="16" dur="1" fill="hold">
+                                          <p:stCondLst>
+                                            <p:cond delay="0"/>
+                                          </p:stCondLst>
+                                        </p:cTn>
+                                        <p:tgtEl>
+                                          <p:spTgt spid="3">
+                                            <p:txEl>
+                                              <p:pRg st="4" end="4"/>
+                                            </p:txEl>
+                                          </p:spTgt>
+                                        </p:tgtEl>
+                                        <p:attrNameLst>
+                                          <p:attrName>style.visibility</p:attrName>
+                                        </p:attrNameLst>
+                                      </p:cBhvr>
+                                      <p:to>
+                                        <p:strVal val="visible"/>
+                                      </p:to>
+                                    </p:set>
+                                    <p:animEffect transition="in" filter="fade">
+                                      <p:cBhvr>
+                                        <p:cTn id="17" dur="1000"/>
+                                        <p:tgtEl>
+                                          <p:spTgt spid="3">
+                                            <p:txEl>
+                                              <p:pRg st="4" end="4"/>
+                                            </p:txEl>
+                                          </p:spTgt>
+                                        </p:tgtEl>
+                                      </p:cBhvr>
+                                    </p:animEffect>
+                                    <p:anim calcmode="lin" valueType="num">
+                                      <p:cBhvr>
+                                        <p:cTn id="18" dur="1000" fill="hold"/>
+                                        <p:tgtEl>
+                                          <p:spTgt spid="3">
+                                            <p:txEl>
+                                              <p:pRg st="4" end="4"/>
+                                            </p:txEl>
+                                          </p:spTgt>
+                                        </p:tgtEl>
+                                        <p:attrNameLst>
+                                          <p:attrName>ppt_x</p:attrName>
+                                        </p:attrNameLst>
+                                      </p:cBhvr>
+                                      <p:tavLst>
+                                        <p:tav tm="0">
+                                          <p:val>
+                                            <p:strVal val="#ppt_x"/>
+                                          </p:val>
+                                        </p:tav>
+                                        <p:tav tm="100000">
+                                          <p:val>
+                                            <p:strVal val="#ppt_x"/>
+                                          </p:val>
+                                        </p:tav>
+                                      </p:tavLst>
+                                    </p:anim>
+                                    <p:anim calcmode="lin" valueType="num">
+                                      <p:cBhvr>
+                                        <p:cTn id="19" dur="1000" fill="hold"/>
+                                        <p:tgtEl>
+                                          <p:spTgt spid="3">
+                                            <p:txEl>
+                                              <p:pRg st="4" end="4"/>
+                                            </p:txEl>
+                                          </p:spTgt>
+                                        </p:tgtEl>
+                                        <p:attrNameLst>
+                                          <p:attrName>ppt_y</p:attrName>
+                                        </p:attrNameLst>
+                                      </p:cBhvr>
+                                      <p:tavLst>
+                                        <p:tav tm="0">
+                                          <p:val>
+                                            <p:strVal val="#ppt_y+.1"/>
+                                          </p:val>
+                                        </p:tav>
+                                        <p:tav tm="100000">
+                                          <p:val>
+                                            <p:strVal val="#ppt_y"/>
+                                          </p:val>
+                                        </p:tav>
+                                      </p:tavLst>
+                                    </p:anim>
+                                  </p:childTnLst>
+                                </p:cTn>
+                              </p:par>
+                              <p:par>
+                                <p:cTn id="20" presetID="42" presetClass="entr" presetSubtype="0" fill="hold" nodeType="withEffect">
+                                  <p:stCondLst>
+                                    <p:cond delay="0"/>
+                                  </p:stCondLst>
+                                  <p:childTnLst>
+                                    <p:set>
+                                      <p:cBhvr>
+                                        <p:cTn id="21" dur="1" fill="hold">
+                                          <p:stCondLst>
+                                            <p:cond delay="0"/>
+                                          </p:stCondLst>
+                                        </p:cTn>
+                                        <p:tgtEl>
+                                          <p:spTgt spid="3">
+                                            <p:txEl>
+                                              <p:pRg st="5" end="5"/>
+                                            </p:txEl>
+                                          </p:spTgt>
+                                        </p:tgtEl>
+                                        <p:attrNameLst>
+                                          <p:attrName>style.visibility</p:attrName>
+                                        </p:attrNameLst>
+                                      </p:cBhvr>
+                                      <p:to>
+                                        <p:strVal val="visible"/>
+                                      </p:to>
+                                    </p:set>
+                                    <p:animEffect transition="in" filter="fade">
+                                      <p:cBhvr>
+                                        <p:cTn id="22" dur="1000"/>
+                                        <p:tgtEl>
+                                          <p:spTgt spid="3">
+                                            <p:txEl>
+                                              <p:pRg st="5" end="5"/>
+                                            </p:txEl>
+                                          </p:spTgt>
+                                        </p:tgtEl>
+                                      </p:cBhvr>
+                                    </p:animEffect>
+                                    <p:anim calcmode="lin" valueType="num">
+                                      <p:cBhvr>
+                                        <p:cTn id="23" dur="1000" fill="hold"/>
+                                        <p:tgtEl>
+                                          <p:spTgt spid="3">
+                                            <p:txEl>
+                                              <p:pRg st="5" end="5"/>
+                                            </p:txEl>
+                                          </p:spTgt>
+                                        </p:tgtEl>
+                                        <p:attrNameLst>
+                                          <p:attrName>ppt_x</p:attrName>
+                                        </p:attrNameLst>
+                                      </p:cBhvr>
+                                      <p:tavLst>
+                                        <p:tav tm="0">
+                                          <p:val>
+                                            <p:strVal val="#ppt_x"/>
+                                          </p:val>
+                                        </p:tav>
+                                        <p:tav tm="100000">
+                                          <p:val>
+                                            <p:strVal val="#ppt_x"/>
+                                          </p:val>
+                                        </p:tav>
+                                      </p:tavLst>
+                                    </p:anim>
+                                    <p:anim calcmode="lin" valueType="num">
+                                      <p:cBhvr>
+                                        <p:cTn id="24" dur="1000" fill="hold"/>
+                                        <p:tgtEl>
+                                          <p:spTgt spid="3">
+                                            <p:txEl>
+                                              <p:pRg st="5" end="5"/>
+                                            </p:txEl>
+                                          </p:spTgt>
+                                        </p:tgtEl>
+                                        <p:attrNameLst>
+                                          <p:attrName>ppt_y</p:attrName>
+                                        </p:attrNameLst>
+                                      </p:cBhvr>
+                                      <p:tavLst>
+                                        <p:tav tm="0">
+                                          <p:val>
+                                            <p:strVal val="#ppt_y+.1"/>
+                                          </p:val>
+                                        </p:tav>
+                                        <p:tav tm="100000">
+                                          <p:val>
+                                            <p:strVal val="#ppt_y"/>
+                                          </p:val>
+                                        </p:tav>
+                                      </p:tavLst>
+                                    </p:anim>
+                                  </p:childTnLst>
+                                </p:cTn>
+                              </p:par>
+                              <p:par>
+                                <p:cTn id="25" presetID="42" presetClass="entr" presetSubtype="0" fill="hold" nodeType="withEffect">
+                                  <p:stCondLst>
+                                    <p:cond delay="0"/>
+                                  </p:stCondLst>
+                                  <p:childTnLst>
+                                    <p:set>
+                                      <p:cBhvr>
+                                        <p:cTn id="26" dur="1" fill="hold">
+                                          <p:stCondLst>
+                                            <p:cond delay="0"/>
+                                          </p:stCondLst>
+                                        </p:cTn>
+                                        <p:tgtEl>
+                                          <p:spTgt spid="3">
+                                            <p:txEl>
+                                              <p:pRg st="6" end="6"/>
+                                            </p:txEl>
+                                          </p:spTgt>
+                                        </p:tgtEl>
+                                        <p:attrNameLst>
+                                          <p:attrName>style.visibility</p:attrName>
+                                        </p:attrNameLst>
+                                      </p:cBhvr>
+                                      <p:to>
+                                        <p:strVal val="visible"/>
+                                      </p:to>
+                                    </p:set>
+                                    <p:animEffect transition="in" filter="fade">
+                                      <p:cBhvr>
+                                        <p:cTn id="27" dur="1000"/>
+                                        <p:tgtEl>
+                                          <p:spTgt spid="3">
+                                            <p:txEl>
+                                              <p:pRg st="6" end="6"/>
+                                            </p:txEl>
+                                          </p:spTgt>
+                                        </p:tgtEl>
+                                      </p:cBhvr>
+                                    </p:animEffect>
+                                    <p:anim calcmode="lin" valueType="num">
+                                      <p:cBhvr>
+                                        <p:cTn id="28" dur="1000" fill="hold"/>
+                                        <p:tgtEl>
+                                          <p:spTgt spid="3">
+                                            <p:txEl>
+                                              <p:pRg st="6" end="6"/>
+                                            </p:txEl>
+                                          </p:spTgt>
+                                        </p:tgtEl>
+                                        <p:attrNameLst>
+                                          <p:attrName>ppt_x</p:attrName>
+                                        </p:attrNameLst>
+                                      </p:cBhvr>
+                                      <p:tavLst>
+                                        <p:tav tm="0">
+                                          <p:val>
+                                            <p:strVal val="#ppt_x"/>
+                                          </p:val>
+                                        </p:tav>
+                                        <p:tav tm="100000">
+                                          <p:val>
+                                            <p:strVal val="#ppt_x"/>
+                                          </p:val>
+                                        </p:tav>
+                                      </p:tavLst>
+                                    </p:anim>
+                                    <p:anim calcmode="lin" valueType="num">
+                                      <p:cBhvr>
+                                        <p:cTn id="29" dur="1000" fill="hold"/>
+                                        <p:tgtEl>
+                                          <p:spTgt spid="3">
+                                            <p:txEl>
+                                              <p:pRg st="6" end="6"/>
+                                            </p:txEl>
+                                          </p:spTgt>
+                                        </p:tgtEl>
+                                        <p:attrNameLst>
+                                          <p:attrName>ppt_y</p:attrName>
+                                        </p:attrNameLst>
+                                      </p:cBhvr>
+                                      <p:tavLst>
+                                        <p:tav tm="0">
+                                          <p:val>
+                                            <p:strVal val="#ppt_y+.1"/>
+                                          </p:val>
+                                        </p:tav>
+                                        <p:tav tm="100000">
+                                          <p:val>
+                                            <p:strVal val="#ppt_y"/>
+                                          </p:val>
+                                        </p:tav>
+                                      </p:tavLst>
+                                    </p:anim>
+                                  </p:childTnLst>
+                                </p:cTn>
+                              </p:par>
+                            </p:childTnLst>
+                          </p:cTn>
+                        </p:par>
+                      </p:childTnLst>
+                    </p:cTn>
+                  </p:par>
+                  <p:par>
+                    <p:cTn id="30" fill="hold">
+                      <p:stCondLst>
+                        <p:cond delay="indefinite"/>
+                      </p:stCondLst>
+                      <p:childTnLst>
+                        <p:par>
+                          <p:cTn id="31" fill="hold">
+                            <p:stCondLst>
+                              <p:cond delay="0"/>
+                            </p:stCondLst>
+                            <p:childTnLst>
+                              <p:par>
+                                <p:cTn id="32" presetID="42" presetClass="entr" presetSubtype="0" fill="hold" nodeType="clickEffect">
+                                  <p:stCondLst>
+                                    <p:cond delay="0"/>
+                                  </p:stCondLst>
+                                  <p:childTnLst>
+                                    <p:set>
+                                      <p:cBhvr>
+                                        <p:cTn id="33" dur="1" fill="hold">
+                                          <p:stCondLst>
+                                            <p:cond delay="0"/>
+                                          </p:stCondLst>
+                                        </p:cTn>
+                                        <p:tgtEl>
+                                          <p:spTgt spid="3">
+                                            <p:txEl>
+                                              <p:pRg st="8" end="8"/>
+                                            </p:txEl>
+                                          </p:spTgt>
+                                        </p:tgtEl>
+                                        <p:attrNameLst>
+                                          <p:attrName>style.visibility</p:attrName>
+                                        </p:attrNameLst>
+                                      </p:cBhvr>
+                                      <p:to>
+                                        <p:strVal val="visible"/>
+                                      </p:to>
+                                    </p:set>
+                                    <p:animEffect transition="in" filter="fade">
+                                      <p:cBhvr>
+                                        <p:cTn id="34" dur="1000"/>
+                                        <p:tgtEl>
+                                          <p:spTgt spid="3">
+                                            <p:txEl>
+                                              <p:pRg st="8" end="8"/>
+                                            </p:txEl>
+                                          </p:spTgt>
+                                        </p:tgtEl>
+                                      </p:cBhvr>
+                                    </p:animEffect>
+                                    <p:anim calcmode="lin" valueType="num">
+                                      <p:cBhvr>
+                                        <p:cTn id="35" dur="1000" fill="hold"/>
+                                        <p:tgtEl>
+                                          <p:spTgt spid="3">
+                                            <p:txEl>
+                                              <p:pRg st="8" end="8"/>
+                                            </p:txEl>
+                                          </p:spTgt>
+                                        </p:tgtEl>
+                                        <p:attrNameLst>
+                                          <p:attrName>ppt_x</p:attrName>
+                                        </p:attrNameLst>
+                                      </p:cBhvr>
+                                      <p:tavLst>
+                                        <p:tav tm="0">
+                                          <p:val>
+                                            <p:strVal val="#ppt_x"/>
+                                          </p:val>
+                                        </p:tav>
+                                        <p:tav tm="100000">
+                                          <p:val>
+                                            <p:strVal val="#ppt_x"/>
+                                          </p:val>
+                                        </p:tav>
+                                      </p:tavLst>
+                                    </p:anim>
+                                    <p:anim calcmode="lin" valueType="num">
+                                      <p:cBhvr>
+                                        <p:cTn id="36" dur="1000" fill="hold"/>
+                                        <p:tgtEl>
+                                          <p:spTgt spid="3">
+                                            <p:txEl>
+                                              <p:pRg st="8" end="8"/>
+                                            </p:txEl>
+                                          </p:spTgt>
+                                        </p:tgtEl>
+                                        <p:attrNameLst>
+                                          <p:attrName>ppt_y</p:attrName>
+                                        </p:attrNameLst>
+                                      </p:cBhvr>
+                                      <p:tavLst>
+                                        <p:tav tm="0">
+                                          <p:val>
+                                            <p:strVal val="#ppt_y+.1"/>
+                                          </p:val>
+                                        </p:tav>
+                                        <p:tav tm="100000">
+                                          <p:val>
+                                            <p:strVal val="#ppt_y"/>
+                                          </p:val>
+                                        </p:tav>
+                                      </p:tavLst>
+                                    </p:anim>
+                                  </p:childTnLst>
+                                </p:cTn>
+                              </p:par>
+                              <p:par>
+                                <p:cTn id="37" presetID="42" presetClass="entr" presetSubtype="0" fill="hold" nodeType="withEffect">
+                                  <p:stCondLst>
+                                    <p:cond delay="0"/>
+                                  </p:stCondLst>
+                                  <p:childTnLst>
+                                    <p:set>
+                                      <p:cBhvr>
+                                        <p:cTn id="38" dur="1" fill="hold">
+                                          <p:stCondLst>
+                                            <p:cond delay="0"/>
+                                          </p:stCondLst>
+                                        </p:cTn>
+                                        <p:tgtEl>
+                                          <p:spTgt spid="3">
+                                            <p:txEl>
+                                              <p:pRg st="10" end="10"/>
+                                            </p:txEl>
+                                          </p:spTgt>
+                                        </p:tgtEl>
+                                        <p:attrNameLst>
+                                          <p:attrName>style.visibility</p:attrName>
+                                        </p:attrNameLst>
+                                      </p:cBhvr>
+                                      <p:to>
+                                        <p:strVal val="visible"/>
+                                      </p:to>
+                                    </p:set>
+                                    <p:animEffect transition="in" filter="fade">
+                                      <p:cBhvr>
+                                        <p:cTn id="39" dur="1000"/>
+                                        <p:tgtEl>
+                                          <p:spTgt spid="3">
+                                            <p:txEl>
+                                              <p:pRg st="10" end="10"/>
+                                            </p:txEl>
+                                          </p:spTgt>
+                                        </p:tgtEl>
+                                      </p:cBhvr>
+                                    </p:animEffect>
+                                    <p:anim calcmode="lin" valueType="num">
+                                      <p:cBhvr>
+                                        <p:cTn id="40" dur="1000" fill="hold"/>
+                                        <p:tgtEl>
+                                          <p:spTgt spid="3">
+                                            <p:txEl>
+                                              <p:pRg st="10" end="10"/>
+                                            </p:txEl>
+                                          </p:spTgt>
+                                        </p:tgtEl>
+                                        <p:attrNameLst>
+                                          <p:attrName>ppt_x</p:attrName>
+                                        </p:attrNameLst>
+                                      </p:cBhvr>
+                                      <p:tavLst>
+                                        <p:tav tm="0">
+                                          <p:val>
+                                            <p:strVal val="#ppt_x"/>
+                                          </p:val>
+                                        </p:tav>
+                                        <p:tav tm="100000">
+                                          <p:val>
+                                            <p:strVal val="#ppt_x"/>
+                                          </p:val>
+                                        </p:tav>
+                                      </p:tavLst>
+                                    </p:anim>
+                                    <p:anim calcmode="lin" valueType="num">
+                                      <p:cBhvr>
+                                        <p:cTn id="41" dur="1000" fill="hold"/>
+                                        <p:tgtEl>
+                                          <p:spTgt spid="3">
+                                            <p:txEl>
+                                              <p:pRg st="10" end="10"/>
+                                            </p:txEl>
+                                          </p:spTgt>
                                         </p:tgtEl>
                                         <p:attrNameLst>
                                           <p:attrName>ppt_y</p:attrName>
@@ -11020,9 +14712,6 @@
         </p:cTn>
       </p:par>
     </p:tnLst>
-    <p:bldLst>
-      <p:bldP spid="4" grpId="0"/>
-    </p:bldLst>
   </p:timing>
 </p:sld>
 </file>
